--- a/outputs/asterinas-gdb-helpers-ccf-demo.pptx
+++ b/outputs/asterinas-gdb-helpers-ccf-demo.pptx
@@ -1,28 +1,28 @@
 
 <file path=ppt/presentation.xml><?xml version="1.0" encoding="utf-8"?>
-<p:presentation xmlns:p="http://schemas.openxmlformats.org/presentationml/2006/main">
+<p:presentation xmlns:a="http://schemas.openxmlformats.org/drawingml/2006/main" xmlns:r="http://schemas.openxmlformats.org/officeDocument/2006/relationships" xmlns:p="http://schemas.openxmlformats.org/presentationml/2006/main">
   <p:sldMasterIdLst>
-    <p:sldMasterId xmlns:r="http://schemas.openxmlformats.org/officeDocument/2006/relationships" id="2147483648" r:id="Rf157c3ba5db34795"/>
+    <p:sldMasterId id="2147483648" r:id="rId1"/>
   </p:sldMasterIdLst>
   <p:notesMasterIdLst>
-    <p:notesMasterId xmlns:r="http://schemas.openxmlformats.org/officeDocument/2006/relationships" r:id="Rfce0804b44ab4171"/>
+    <p:notesMasterId r:id="rId9"/>
   </p:notesMasterIdLst>
   <p:sldIdLst>
-    <p:sldId xmlns:r="http://schemas.openxmlformats.org/officeDocument/2006/relationships" id="256" r:id="R4ae5372ec6ae48e0"/>
-    <p:sldId xmlns:r="http://schemas.openxmlformats.org/officeDocument/2006/relationships" id="257" r:id="R5dc6c528e5e64e46"/>
-    <p:sldId xmlns:r="http://schemas.openxmlformats.org/officeDocument/2006/relationships" id="258" r:id="Rff09674289154c91"/>
-    <p:sldId xmlns:r="http://schemas.openxmlformats.org/officeDocument/2006/relationships" id="259" r:id="R2d2f93ea0c0244b6"/>
-    <p:sldId xmlns:r="http://schemas.openxmlformats.org/officeDocument/2006/relationships" id="260" r:id="R997ae29190114546"/>
-    <p:sldId xmlns:r="http://schemas.openxmlformats.org/officeDocument/2006/relationships" id="261" r:id="R55be38c81e3c451b"/>
-    <p:sldId xmlns:r="http://schemas.openxmlformats.org/officeDocument/2006/relationships" id="262" r:id="Rcf2f9f21c5ff401a"/>
+    <p:sldId id="256" r:id="rId2"/>
+    <p:sldId id="257" r:id="rId3"/>
+    <p:sldId id="258" r:id="rId4"/>
+    <p:sldId id="259" r:id="rId5"/>
+    <p:sldId id="260" r:id="rId6"/>
+    <p:sldId id="261" r:id="rId7"/>
+    <p:sldId id="262" r:id="rId8"/>
   </p:sldIdLst>
   <p:sldSz cx="12192000" cy="6858000"/>
   <p:notesSz cx="6858000" cy="9144000"/>
   <p:defaultTextStyle>
-    <a:defPPr xmlns:a="http://schemas.openxmlformats.org/drawingml/2006/main">
+    <a:defPPr>
       <a:defRPr lang="en-US"/>
     </a:defPPr>
-    <a:lvl1pPr xmlns:a="http://schemas.openxmlformats.org/drawingml/2006/main" marL="0" indent="0" algn="l" defTabSz="914400">
+    <a:lvl1pPr marL="0" indent="0" algn="l" defTabSz="914400">
       <a:defRPr sz="1800" kern="1200">
         <a:solidFill>
           <a:schemeClr val="tx1"/>
@@ -32,7 +32,7 @@
         <a:cs typeface="+mn-cs"/>
       </a:defRPr>
     </a:lvl1pPr>
-    <a:lvl2pPr xmlns:a="http://schemas.openxmlformats.org/drawingml/2006/main" marL="457200" indent="0" algn="l" defTabSz="914400">
+    <a:lvl2pPr marL="457200" indent="0" algn="l" defTabSz="914400">
       <a:defRPr sz="1800" kern="1200">
         <a:solidFill>
           <a:schemeClr val="tx1"/>
@@ -42,7 +42,7 @@
         <a:cs typeface="+mn-cs"/>
       </a:defRPr>
     </a:lvl2pPr>
-    <a:lvl3pPr xmlns:a="http://schemas.openxmlformats.org/drawingml/2006/main" marL="914400" indent="0" algn="l" defTabSz="914400">
+    <a:lvl3pPr marL="914400" indent="0" algn="l" defTabSz="914400">
       <a:defRPr sz="1800" kern="1200">
         <a:solidFill>
           <a:schemeClr val="tx1"/>
@@ -52,7 +52,7 @@
         <a:cs typeface="+mn-cs"/>
       </a:defRPr>
     </a:lvl3pPr>
-    <a:lvl4pPr xmlns:a="http://schemas.openxmlformats.org/drawingml/2006/main" marL="1371600" indent="0" algn="l" defTabSz="914400">
+    <a:lvl4pPr marL="1371600" indent="0" algn="l" defTabSz="914400">
       <a:defRPr sz="1800" kern="1200">
         <a:solidFill>
           <a:schemeClr val="tx1"/>
@@ -62,7 +62,7 @@
         <a:cs typeface="+mn-cs"/>
       </a:defRPr>
     </a:lvl4pPr>
-    <a:lvl5pPr xmlns:a="http://schemas.openxmlformats.org/drawingml/2006/main" marL="1828800" indent="0" algn="l" defTabSz="914400">
+    <a:lvl5pPr marL="1828800" indent="0" algn="l" defTabSz="914400">
       <a:defRPr sz="1800" kern="1200">
         <a:solidFill>
           <a:schemeClr val="tx1"/>
@@ -72,7 +72,7 @@
         <a:cs typeface="+mn-cs"/>
       </a:defRPr>
     </a:lvl5pPr>
-    <a:lvl6pPr xmlns:a="http://schemas.openxmlformats.org/drawingml/2006/main" marL="2286000" indent="0" algn="l" defTabSz="914400">
+    <a:lvl6pPr marL="2286000" indent="0" algn="l" defTabSz="914400">
       <a:defRPr sz="1800" kern="1200">
         <a:solidFill>
           <a:schemeClr val="tx1"/>
@@ -82,7 +82,7 @@
         <a:cs typeface="+mn-cs"/>
       </a:defRPr>
     </a:lvl6pPr>
-    <a:lvl7pPr xmlns:a="http://schemas.openxmlformats.org/drawingml/2006/main" marL="2743200" indent="0" algn="l" defTabSz="914400">
+    <a:lvl7pPr marL="2743200" indent="0" algn="l" defTabSz="914400">
       <a:defRPr sz="1800" kern="1200">
         <a:solidFill>
           <a:schemeClr val="tx1"/>
@@ -92,7 +92,7 @@
         <a:cs typeface="+mn-cs"/>
       </a:defRPr>
     </a:lvl7pPr>
-    <a:lvl8pPr xmlns:a="http://schemas.openxmlformats.org/drawingml/2006/main" marL="3200400" indent="0" algn="l" defTabSz="914400">
+    <a:lvl8pPr marL="3200400" indent="0" algn="l" defTabSz="914400">
       <a:defRPr sz="1800" kern="1200">
         <a:solidFill>
           <a:schemeClr val="tx1"/>
@@ -102,7 +102,7 @@
         <a:cs typeface="+mn-cs"/>
       </a:defRPr>
     </a:lvl8pPr>
-    <a:lvl9pPr xmlns:a="http://schemas.openxmlformats.org/drawingml/2006/main" marL="3657600" indent="0" algn="l" defTabSz="914400">
+    <a:lvl9pPr marL="3657600" indent="0" algn="l" defTabSz="914400">
       <a:defRPr sz="1800" kern="1200">
         <a:solidFill>
           <a:schemeClr val="tx1"/>
@@ -117,11 +117,11 @@
 </file>
 
 <file path=ppt/notesMasters/notesMaster1.xml><?xml version="1.0" encoding="utf-8"?>
-<p:notesMaster xmlns:p="http://schemas.openxmlformats.org/presentationml/2006/main">
+<p:notesMaster xmlns:a="http://schemas.openxmlformats.org/drawingml/2006/main" xmlns:r="http://schemas.openxmlformats.org/officeDocument/2006/relationships" xmlns:p="http://schemas.openxmlformats.org/presentationml/2006/main">
   <p:cSld>
     <p:bg>
       <p:bgRef idx="1001">
-        <a:schemeClr xmlns:a="http://schemas.openxmlformats.org/drawingml/2006/main" val="bg1"/>
+        <a:schemeClr val="bg1"/>
       </p:bgRef>
     </p:bg>
     <p:spTree>
@@ -131,380 +131,164 @@
         <p:nvPr/>
       </p:nvGrpSpPr>
       <p:grpSpPr>
-        <a:xfrm xmlns:a="http://schemas.openxmlformats.org/drawingml/2006/main"/>
+        <a:xfrm>
+          <a:off x="0" y="0"/>
+          <a:ext cx="0" cy="0"/>
+          <a:chOff x="0" y="0"/>
+          <a:chExt cx="0" cy="0"/>
+        </a:xfrm>
       </p:grpSpPr>
       <p:sp>
         <p:nvSpPr>
           <p:cNvPr id="2" name="Header Placeholder"/>
-          <p:cNvSpPr/>
+          <p:cNvSpPr>
+            <a:spLocks noGrp="1"/>
+          </p:cNvSpPr>
           <p:nvPr>
             <p:ph type="hdr" sz="quarter"/>
           </p:nvPr>
         </p:nvSpPr>
         <p:spPr>
-          <a:prstGeom xmlns:a="http://schemas.openxmlformats.org/drawingml/2006/main" prst="rect">
-            <a:avLst/>
-          </a:prstGeom>
-        </p:spPr>
-        <p:txBody>
-          <a:bodyPr xmlns:a="http://schemas.openxmlformats.org/drawingml/2006/main"/>
-          <a:lstStyle xmlns:a="http://schemas.openxmlformats.org/drawingml/2006/main"/>
-          <a:p xmlns:a="http://schemas.openxmlformats.org/drawingml/2006/main"/>
+          <a:prstGeom prst="rect">
+            <a:avLst/>
+          </a:prstGeom>
+        </p:spPr>
+        <p:txBody>
+          <a:bodyPr/>
+          <a:lstStyle/>
+          <a:p>
+            <a:endParaRPr/>
+          </a:p>
         </p:txBody>
       </p:sp>
       <p:sp>
         <p:nvSpPr>
           <p:cNvPr id="3" name="Date Placeholder"/>
-          <p:cNvSpPr/>
+          <p:cNvSpPr>
+            <a:spLocks noGrp="1"/>
+          </p:cNvSpPr>
           <p:nvPr>
             <p:ph type="dt" sz="quarter" idx="1"/>
           </p:nvPr>
         </p:nvSpPr>
         <p:spPr>
-          <a:prstGeom xmlns:a="http://schemas.openxmlformats.org/drawingml/2006/main" prst="rect">
-            <a:avLst/>
-          </a:prstGeom>
-        </p:spPr>
-        <p:txBody>
-          <a:bodyPr xmlns:a="http://schemas.openxmlformats.org/drawingml/2006/main"/>
-          <a:lstStyle xmlns:a="http://schemas.openxmlformats.org/drawingml/2006/main"/>
-          <a:p xmlns:a="http://schemas.openxmlformats.org/drawingml/2006/main"/>
+          <a:prstGeom prst="rect">
+            <a:avLst/>
+          </a:prstGeom>
+        </p:spPr>
+        <p:txBody>
+          <a:bodyPr/>
+          <a:lstStyle/>
+          <a:p>
+            <a:endParaRPr/>
+          </a:p>
         </p:txBody>
       </p:sp>
       <p:sp>
         <p:nvSpPr>
           <p:cNvPr id="4" name="Slide Image Placeholder"/>
-          <p:cNvSpPr/>
+          <p:cNvSpPr>
+            <a:spLocks noGrp="1" noRot="1" noChangeAspect="1"/>
+          </p:cNvSpPr>
           <p:nvPr>
             <p:ph type="sldImg" idx="2"/>
           </p:nvPr>
         </p:nvSpPr>
         <p:spPr>
-          <a:prstGeom xmlns:a="http://schemas.openxmlformats.org/drawingml/2006/main" prst="rect">
-            <a:avLst/>
-          </a:prstGeom>
-        </p:spPr>
-        <p:txBody>
-          <a:bodyPr xmlns:a="http://schemas.openxmlformats.org/drawingml/2006/main"/>
-          <a:lstStyle xmlns:a="http://schemas.openxmlformats.org/drawingml/2006/main"/>
-          <a:p xmlns:a="http://schemas.openxmlformats.org/drawingml/2006/main"/>
+          <a:prstGeom prst="rect">
+            <a:avLst/>
+          </a:prstGeom>
+        </p:spPr>
+        <p:txBody>
+          <a:bodyPr/>
+          <a:lstStyle/>
+          <a:p>
+            <a:endParaRPr/>
+          </a:p>
         </p:txBody>
       </p:sp>
       <p:sp>
         <p:nvSpPr>
           <p:cNvPr id="5" name="Notes Placeholder"/>
-          <p:cNvSpPr/>
+          <p:cNvSpPr>
+            <a:spLocks noGrp="1"/>
+          </p:cNvSpPr>
           <p:nvPr>
             <p:ph type="body" sz="quarter" idx="3"/>
           </p:nvPr>
         </p:nvSpPr>
         <p:spPr>
-          <a:prstGeom xmlns:a="http://schemas.openxmlformats.org/drawingml/2006/main" prst="rect">
-            <a:avLst/>
-          </a:prstGeom>
-        </p:spPr>
-        <p:txBody>
-          <a:bodyPr xmlns:a="http://schemas.openxmlformats.org/drawingml/2006/main"/>
-          <a:lstStyle xmlns:a="http://schemas.openxmlformats.org/drawingml/2006/main"/>
-          <a:p xmlns:a="http://schemas.openxmlformats.org/drawingml/2006/main"/>
+          <a:prstGeom prst="rect">
+            <a:avLst/>
+          </a:prstGeom>
+        </p:spPr>
+        <p:txBody>
+          <a:bodyPr/>
+          <a:lstStyle/>
+          <a:p>
+            <a:endParaRPr/>
+          </a:p>
         </p:txBody>
       </p:sp>
       <p:sp>
         <p:nvSpPr>
           <p:cNvPr id="6" name="Footer Placeholder"/>
-          <p:cNvSpPr/>
+          <p:cNvSpPr>
+            <a:spLocks noGrp="1"/>
+          </p:cNvSpPr>
           <p:nvPr>
             <p:ph type="ftr" sz="quarter" idx="4"/>
           </p:nvPr>
         </p:nvSpPr>
         <p:spPr>
-          <a:prstGeom xmlns:a="http://schemas.openxmlformats.org/drawingml/2006/main" prst="rect">
-            <a:avLst/>
-          </a:prstGeom>
-        </p:spPr>
-        <p:txBody>
-          <a:bodyPr xmlns:a="http://schemas.openxmlformats.org/drawingml/2006/main"/>
-          <a:lstStyle xmlns:a="http://schemas.openxmlformats.org/drawingml/2006/main"/>
-          <a:p xmlns:a="http://schemas.openxmlformats.org/drawingml/2006/main"/>
+          <a:prstGeom prst="rect">
+            <a:avLst/>
+          </a:prstGeom>
+        </p:spPr>
+        <p:txBody>
+          <a:bodyPr/>
+          <a:lstStyle/>
+          <a:p>
+            <a:endParaRPr/>
+          </a:p>
         </p:txBody>
       </p:sp>
       <p:sp>
         <p:nvSpPr>
           <p:cNvPr id="7" name="Slide Number Placeholder"/>
-          <p:cNvSpPr/>
+          <p:cNvSpPr>
+            <a:spLocks noGrp="1"/>
+          </p:cNvSpPr>
           <p:nvPr>
             <p:ph type="sldNum" sz="quarter" idx="5"/>
           </p:nvPr>
         </p:nvSpPr>
         <p:spPr>
-          <a:prstGeom xmlns:a="http://schemas.openxmlformats.org/drawingml/2006/main" prst="rect">
-            <a:avLst/>
-          </a:prstGeom>
-        </p:spPr>
-        <p:txBody>
-          <a:bodyPr xmlns:a="http://schemas.openxmlformats.org/drawingml/2006/main"/>
-          <a:lstStyle xmlns:a="http://schemas.openxmlformats.org/drawingml/2006/main"/>
-          <a:p xmlns:a="http://schemas.openxmlformats.org/drawingml/2006/main"/>
+          <a:prstGeom prst="rect">
+            <a:avLst/>
+          </a:prstGeom>
+        </p:spPr>
+        <p:txBody>
+          <a:bodyPr/>
+          <a:lstStyle/>
+          <a:p>
+            <a:endParaRPr/>
+          </a:p>
         </p:txBody>
       </p:sp>
     </p:spTree>
   </p:cSld>
   <p:clrMap bg1="lt1" tx1="dk1" bg2="lt2" tx2="dk2" accent1="accent1" accent2="accent2" accent3="accent3" accent4="accent4" accent5="accent5" accent6="accent6" hlink="hlink" folHlink="folHlink"/>
   <p:notesStyle>
-    <a:lvl1pPr xmlns:a="http://schemas.openxmlformats.org/drawingml/2006/main" marL="0" algn="l" defTabSz="914400" rtl="0" eaLnBrk="1" latinLnBrk="0" hangingPunct="1">
+    <a:lvl1pPr marL="0" algn="l" defTabSz="914400" rtl="0" eaLnBrk="1" latinLnBrk="0" hangingPunct="1">
       <a:defRPr sz="1200" kern="1200"/>
     </a:lvl1pPr>
   </p:notesStyle>
 </p:notesMaster>
 </file>
 
-<file path=ppt/notesMasters/theme/theme3.xml><?xml version="1.0" encoding="utf-8"?>
-<a:theme xmlns:a="http://schemas.openxmlformats.org/drawingml/2006/main" name="ChatGPT">
-  <a:themeElements>
-    <a:clrScheme name="ChatGPT">
-      <a:dk1>
-        <a:srgbClr val="000000"/>
-      </a:dk1>
-      <a:lt1>
-        <a:srgbClr val="FFFFFF"/>
-      </a:lt1>
-      <a:dk2>
-        <a:srgbClr val="0E2841"/>
-      </a:dk2>
-      <a:lt2>
-        <a:srgbClr val="E8E8E8"/>
-      </a:lt2>
-      <a:accent1>
-        <a:srgbClr val="156082"/>
-      </a:accent1>
-      <a:accent2>
-        <a:srgbClr val="E97132"/>
-      </a:accent2>
-      <a:accent3>
-        <a:srgbClr val="196B24"/>
-      </a:accent3>
-      <a:accent4>
-        <a:srgbClr val="0F9ED5"/>
-      </a:accent4>
-      <a:accent5>
-        <a:srgbClr val="A02B93"/>
-      </a:accent5>
-      <a:accent6>
-        <a:srgbClr val="4EA72E"/>
-      </a:accent6>
-      <a:hlink>
-        <a:srgbClr val="467886"/>
-      </a:hlink>
-      <a:folHlink>
-        <a:srgbClr val="96607D"/>
-      </a:folHlink>
-    </a:clrScheme>
-    <a:fontScheme name="Office">
-      <a:majorFont>
-        <a:latin typeface="Calibri Light"/>
-        <a:ea typeface="Calibri Light"/>
-        <a:cs typeface="Calibri Light"/>
-      </a:majorFont>
-      <a:minorFont>
-        <a:latin typeface="Calibri"/>
-        <a:ea typeface="Calibri"/>
-        <a:cs typeface="Calibri"/>
-      </a:minorFont>
-    </a:fontScheme>
-    <a:fmtScheme name="ChatGPT">
-      <a:fillStyleLst>
-        <a:solidFill>
-          <a:schemeClr val="phClr"/>
-        </a:solidFill>
-        <a:gradFill>
-          <a:gsLst>
-            <a:gs pos="0">
-              <a:schemeClr val="phClr">
-                <a:tint val="67000"/>
-                <a:lumMod val="110000"/>
-                <a:satMod val="105000"/>
-              </a:schemeClr>
-            </a:gs>
-            <a:gs pos="50000">
-              <a:schemeClr val="phClr">
-                <a:tint val="73000"/>
-                <a:lumMod val="105000"/>
-                <a:satMod val="103000"/>
-              </a:schemeClr>
-            </a:gs>
-            <a:gs pos="100000">
-              <a:schemeClr val="phClr">
-                <a:tint val="81000"/>
-                <a:lumMod val="105000"/>
-                <a:satMod val="109000"/>
-              </a:schemeClr>
-            </a:gs>
-          </a:gsLst>
-          <a:lin ang="5400000" scaled="0"/>
-        </a:gradFill>
-        <a:gradFill>
-          <a:gsLst>
-            <a:gs pos="0">
-              <a:schemeClr val="phClr">
-                <a:tint val="94000"/>
-                <a:lumMod val="102000"/>
-                <a:satMod val="103000"/>
-              </a:schemeClr>
-            </a:gs>
-            <a:gs pos="50000">
-              <a:schemeClr val="phClr">
-                <a:shade val="100000"/>
-                <a:lumMod val="100000"/>
-                <a:satMod val="110000"/>
-              </a:schemeClr>
-            </a:gs>
-            <a:gs pos="100000">
-              <a:schemeClr val="phClr">
-                <a:shade val="78000"/>
-                <a:lumMod val="99000"/>
-                <a:satMod val="120000"/>
-              </a:schemeClr>
-            </a:gs>
-          </a:gsLst>
-          <a:lin ang="5400000" scaled="0"/>
-        </a:gradFill>
-      </a:fillStyleLst>
-      <a:lnStyleLst>
-        <a:ln w="12700">
-          <a:solidFill>
-            <a:schemeClr val="phClr"/>
-          </a:solidFill>
-          <a:prstDash val="solid"/>
-        </a:ln>
-        <a:ln w="19050">
-          <a:solidFill>
-            <a:schemeClr val="phClr"/>
-          </a:solidFill>
-          <a:prstDash val="solid"/>
-        </a:ln>
-        <a:ln w="25400">
-          <a:solidFill>
-            <a:schemeClr val="phClr"/>
-          </a:solidFill>
-          <a:prstDash val="solid"/>
-        </a:ln>
-      </a:lnStyleLst>
-      <a:effectStyleLst>
-        <a:effectStyle>
-          <a:effectLst/>
-        </a:effectStyle>
-        <a:effectStyle>
-          <a:effectLst/>
-        </a:effectStyle>
-        <a:effectStyle>
-          <a:effectLst>
-            <a:outerShdw blurRad="57150" dist="19050" dir="5400000">
-              <a:srgbClr val="000000">
-                <a:alpha val="16000"/>
-              </a:srgbClr>
-            </a:outerShdw>
-          </a:effectLst>
-        </a:effectStyle>
-        <a:effectStyle>
-          <a:effectLst>
-            <a:outerShdw blurRad="19050" dist="9525" dir="5400000">
-              <a:srgbClr val="000000">
-                <a:alpha val="6000"/>
-              </a:srgbClr>
-            </a:outerShdw>
-          </a:effectLst>
-        </a:effectStyle>
-        <a:effectStyle>
-          <a:effectLst>
-            <a:outerShdw blurRad="28575" dist="9525" dir="5400000">
-              <a:srgbClr val="000000">
-                <a:alpha val="8000"/>
-              </a:srgbClr>
-            </a:outerShdw>
-          </a:effectLst>
-        </a:effectStyle>
-        <a:effectStyle>
-          <a:effectLst>
-            <a:outerShdw blurRad="57150" dist="19050" dir="5400000">
-              <a:srgbClr val="000000">
-                <a:alpha val="10000"/>
-              </a:srgbClr>
-            </a:outerShdw>
-          </a:effectLst>
-        </a:effectStyle>
-        <a:effectStyle>
-          <a:effectLst>
-            <a:outerShdw blurRad="114300" dist="38100" dir="5400000">
-              <a:srgbClr val="000000">
-                <a:alpha val="12000"/>
-              </a:srgbClr>
-            </a:outerShdw>
-          </a:effectLst>
-        </a:effectStyle>
-        <a:effectStyle>
-          <a:effectLst>
-            <a:outerShdw blurRad="171450" dist="57150" dir="5400000">
-              <a:srgbClr val="000000">
-                <a:alpha val="16000"/>
-              </a:srgbClr>
-            </a:outerShdw>
-          </a:effectLst>
-        </a:effectStyle>
-        <a:effectStyle>
-          <a:effectLst>
-            <a:outerShdw blurRad="266700" dist="95250" dir="5400000">
-              <a:srgbClr val="000000">
-                <a:alpha val="24000"/>
-              </a:srgbClr>
-            </a:outerShdw>
-          </a:effectLst>
-        </a:effectStyle>
-      </a:effectStyleLst>
-      <a:bgFillStyleLst>
-        <a:solidFill>
-          <a:schemeClr val="phClr"/>
-        </a:solidFill>
-        <a:solidFill>
-          <a:schemeClr val="phClr">
-            <a:tint val="95000"/>
-            <a:satMod val="170000"/>
-          </a:schemeClr>
-        </a:solidFill>
-        <a:gradFill>
-          <a:gsLst>
-            <a:gs pos="0">
-              <a:schemeClr val="phClr">
-                <a:tint val="93000"/>
-                <a:shade val="98000"/>
-                <a:lumMod val="102000"/>
-                <a:satMod val="150000"/>
-              </a:schemeClr>
-            </a:gs>
-            <a:gs pos="50000">
-              <a:schemeClr val="phClr">
-                <a:tint val="98000"/>
-                <a:shade val="90000"/>
-                <a:lumMod val="103000"/>
-                <a:satMod val="130000"/>
-              </a:schemeClr>
-            </a:gs>
-            <a:gs pos="100000">
-              <a:schemeClr val="phClr">
-                <a:shade val="63000"/>
-                <a:satMod val="120000"/>
-              </a:schemeClr>
-            </a:gs>
-          </a:gsLst>
-          <a:lin ang="5400000" scaled="0"/>
-        </a:gradFill>
-      </a:bgFillStyleLst>
-    </a:fmtScheme>
-  </a:themeElements>
-</a:theme>
-</file>
-
 <file path=ppt/notesSlides/notesSlide1.xml><?xml version="1.0" encoding="utf-8"?>
-<p:notes xmlns:p="http://schemas.openxmlformats.org/presentationml/2006/main">
+<p:notes xmlns:a="http://schemas.openxmlformats.org/drawingml/2006/main" xmlns:r="http://schemas.openxmlformats.org/officeDocument/2006/relationships" xmlns:p="http://schemas.openxmlformats.org/presentationml/2006/main">
   <p:cSld>
     <p:spTree>
       <p:nvGrpSpPr>
@@ -513,16 +297,21 @@
         <p:nvPr/>
       </p:nvGrpSpPr>
       <p:grpSpPr>
-        <a:xfrm xmlns:a="http://schemas.openxmlformats.org/drawingml/2006/main"/>
+        <a:xfrm>
+          <a:off x="0" y="0"/>
+          <a:ext cx="0" cy="0"/>
+          <a:chOff x="0" y="0"/>
+          <a:chExt cx="0" cy="0"/>
+        </a:xfrm>
       </p:grpSpPr>
       <p:sp>
         <p:nvSpPr>
           <p:cNvPr id="2" name="Slide Image Placeholder 1"/>
           <p:cNvSpPr>
-            <a:spLocks xmlns:a="http://schemas.openxmlformats.org/drawingml/2006/main" noGrp="1"/>
+            <a:spLocks noGrp="1" noRot="1" noChangeAspect="1"/>
           </p:cNvSpPr>
           <p:nvPr>
-            <p:ph type="sldImg" idx="0"/>
+            <p:ph type="sldImg"/>
           </p:nvPr>
         </p:nvSpPr>
         <p:spPr/>
@@ -531,7 +320,7 @@
         <p:nvSpPr>
           <p:cNvPr id="3" name="Notes Placeholder 2"/>
           <p:cNvSpPr>
-            <a:spLocks xmlns:a="http://schemas.openxmlformats.org/drawingml/2006/main" noGrp="1"/>
+            <a:spLocks noGrp="1"/>
           </p:cNvSpPr>
           <p:nvPr>
             <p:ph type="body" idx="1"/>
@@ -539,16 +328,18 @@
         </p:nvSpPr>
         <p:spPr/>
         <p:txBody>
-          <a:bodyPr xmlns:a="http://schemas.openxmlformats.org/drawingml/2006/main"/>
-          <a:lstStyle xmlns:a="http://schemas.openxmlformats.org/drawingml/2006/main"/>
-          <a:p xmlns:a="http://schemas.openxmlformats.org/drawingml/2006/main"/>
+          <a:bodyPr/>
+          <a:lstStyle/>
+          <a:p>
+            <a:endParaRPr/>
+          </a:p>
         </p:txBody>
       </p:sp>
       <p:sp>
         <p:nvSpPr>
           <p:cNvPr id="4" name="Slide Number Placeholder 3"/>
           <p:cNvSpPr>
-            <a:spLocks xmlns:a="http://schemas.openxmlformats.org/drawingml/2006/main" noGrp="1"/>
+            <a:spLocks noGrp="1"/>
           </p:cNvSpPr>
           <p:nvPr>
             <p:ph type="sldNum" idx="5"/>
@@ -556,21 +347,23 @@
         </p:nvSpPr>
         <p:spPr/>
         <p:txBody>
-          <a:bodyPr xmlns:a="http://schemas.openxmlformats.org/drawingml/2006/main"/>
-          <a:lstStyle xmlns:a="http://schemas.openxmlformats.org/drawingml/2006/main"/>
-          <a:p xmlns:a="http://schemas.openxmlformats.org/drawingml/2006/main"/>
+          <a:bodyPr/>
+          <a:lstStyle/>
+          <a:p>
+            <a:endParaRPr/>
+          </a:p>
         </p:txBody>
       </p:sp>
     </p:spTree>
   </p:cSld>
   <p:clrMapOvr>
-    <a:masterClrMapping xmlns:a="http://schemas.openxmlformats.org/drawingml/2006/main"/>
+    <a:masterClrMapping/>
   </p:clrMapOvr>
 </p:notes>
 </file>
 
 <file path=ppt/notesSlides/notesSlide2.xml><?xml version="1.0" encoding="utf-8"?>
-<p:notes xmlns:p="http://schemas.openxmlformats.org/presentationml/2006/main">
+<p:notes xmlns:a="http://schemas.openxmlformats.org/drawingml/2006/main" xmlns:r="http://schemas.openxmlformats.org/officeDocument/2006/relationships" xmlns:p="http://schemas.openxmlformats.org/presentationml/2006/main">
   <p:cSld>
     <p:spTree>
       <p:nvGrpSpPr>
@@ -579,16 +372,21 @@
         <p:nvPr/>
       </p:nvGrpSpPr>
       <p:grpSpPr>
-        <a:xfrm xmlns:a="http://schemas.openxmlformats.org/drawingml/2006/main"/>
+        <a:xfrm>
+          <a:off x="0" y="0"/>
+          <a:ext cx="0" cy="0"/>
+          <a:chOff x="0" y="0"/>
+          <a:chExt cx="0" cy="0"/>
+        </a:xfrm>
       </p:grpSpPr>
       <p:sp>
         <p:nvSpPr>
           <p:cNvPr id="2" name="Slide Image Placeholder 1"/>
           <p:cNvSpPr>
-            <a:spLocks xmlns:a="http://schemas.openxmlformats.org/drawingml/2006/main" noGrp="1"/>
+            <a:spLocks noGrp="1" noRot="1" noChangeAspect="1"/>
           </p:cNvSpPr>
           <p:nvPr>
-            <p:ph type="sldImg" idx="0"/>
+            <p:ph type="sldImg"/>
           </p:nvPr>
         </p:nvSpPr>
         <p:spPr/>
@@ -597,7 +395,7 @@
         <p:nvSpPr>
           <p:cNvPr id="3" name="Notes Placeholder 2"/>
           <p:cNvSpPr>
-            <a:spLocks xmlns:a="http://schemas.openxmlformats.org/drawingml/2006/main" noGrp="1"/>
+            <a:spLocks noGrp="1"/>
           </p:cNvSpPr>
           <p:nvPr>
             <p:ph type="body" idx="1"/>
@@ -605,16 +403,18 @@
         </p:nvSpPr>
         <p:spPr/>
         <p:txBody>
-          <a:bodyPr xmlns:a="http://schemas.openxmlformats.org/drawingml/2006/main"/>
-          <a:lstStyle xmlns:a="http://schemas.openxmlformats.org/drawingml/2006/main"/>
-          <a:p xmlns:a="http://schemas.openxmlformats.org/drawingml/2006/main"/>
+          <a:bodyPr/>
+          <a:lstStyle/>
+          <a:p>
+            <a:endParaRPr/>
+          </a:p>
         </p:txBody>
       </p:sp>
       <p:sp>
         <p:nvSpPr>
           <p:cNvPr id="4" name="Slide Number Placeholder 3"/>
           <p:cNvSpPr>
-            <a:spLocks xmlns:a="http://schemas.openxmlformats.org/drawingml/2006/main" noGrp="1"/>
+            <a:spLocks noGrp="1"/>
           </p:cNvSpPr>
           <p:nvPr>
             <p:ph type="sldNum" idx="5"/>
@@ -622,21 +422,23 @@
         </p:nvSpPr>
         <p:spPr/>
         <p:txBody>
-          <a:bodyPr xmlns:a="http://schemas.openxmlformats.org/drawingml/2006/main"/>
-          <a:lstStyle xmlns:a="http://schemas.openxmlformats.org/drawingml/2006/main"/>
-          <a:p xmlns:a="http://schemas.openxmlformats.org/drawingml/2006/main"/>
+          <a:bodyPr/>
+          <a:lstStyle/>
+          <a:p>
+            <a:endParaRPr/>
+          </a:p>
         </p:txBody>
       </p:sp>
     </p:spTree>
   </p:cSld>
   <p:clrMapOvr>
-    <a:masterClrMapping xmlns:a="http://schemas.openxmlformats.org/drawingml/2006/main"/>
+    <a:masterClrMapping/>
   </p:clrMapOvr>
 </p:notes>
 </file>
 
 <file path=ppt/notesSlides/notesSlide3.xml><?xml version="1.0" encoding="utf-8"?>
-<p:notes xmlns:p="http://schemas.openxmlformats.org/presentationml/2006/main">
+<p:notes xmlns:a="http://schemas.openxmlformats.org/drawingml/2006/main" xmlns:r="http://schemas.openxmlformats.org/officeDocument/2006/relationships" xmlns:p="http://schemas.openxmlformats.org/presentationml/2006/main">
   <p:cSld>
     <p:spTree>
       <p:nvGrpSpPr>
@@ -645,16 +447,21 @@
         <p:nvPr/>
       </p:nvGrpSpPr>
       <p:grpSpPr>
-        <a:xfrm xmlns:a="http://schemas.openxmlformats.org/drawingml/2006/main"/>
+        <a:xfrm>
+          <a:off x="0" y="0"/>
+          <a:ext cx="0" cy="0"/>
+          <a:chOff x="0" y="0"/>
+          <a:chExt cx="0" cy="0"/>
+        </a:xfrm>
       </p:grpSpPr>
       <p:sp>
         <p:nvSpPr>
           <p:cNvPr id="2" name="Slide Image Placeholder 1"/>
           <p:cNvSpPr>
-            <a:spLocks xmlns:a="http://schemas.openxmlformats.org/drawingml/2006/main" noGrp="1"/>
+            <a:spLocks noGrp="1" noRot="1" noChangeAspect="1"/>
           </p:cNvSpPr>
           <p:nvPr>
-            <p:ph type="sldImg" idx="0"/>
+            <p:ph type="sldImg"/>
           </p:nvPr>
         </p:nvSpPr>
         <p:spPr/>
@@ -663,7 +470,7 @@
         <p:nvSpPr>
           <p:cNvPr id="3" name="Notes Placeholder 2"/>
           <p:cNvSpPr>
-            <a:spLocks xmlns:a="http://schemas.openxmlformats.org/drawingml/2006/main" noGrp="1"/>
+            <a:spLocks noGrp="1"/>
           </p:cNvSpPr>
           <p:nvPr>
             <p:ph type="body" idx="1"/>
@@ -671,16 +478,18 @@
         </p:nvSpPr>
         <p:spPr/>
         <p:txBody>
-          <a:bodyPr xmlns:a="http://schemas.openxmlformats.org/drawingml/2006/main"/>
-          <a:lstStyle xmlns:a="http://schemas.openxmlformats.org/drawingml/2006/main"/>
-          <a:p xmlns:a="http://schemas.openxmlformats.org/drawingml/2006/main"/>
+          <a:bodyPr/>
+          <a:lstStyle/>
+          <a:p>
+            <a:endParaRPr/>
+          </a:p>
         </p:txBody>
       </p:sp>
       <p:sp>
         <p:nvSpPr>
           <p:cNvPr id="4" name="Slide Number Placeholder 3"/>
           <p:cNvSpPr>
-            <a:spLocks xmlns:a="http://schemas.openxmlformats.org/drawingml/2006/main" noGrp="1"/>
+            <a:spLocks noGrp="1"/>
           </p:cNvSpPr>
           <p:nvPr>
             <p:ph type="sldNum" idx="5"/>
@@ -688,21 +497,23 @@
         </p:nvSpPr>
         <p:spPr/>
         <p:txBody>
-          <a:bodyPr xmlns:a="http://schemas.openxmlformats.org/drawingml/2006/main"/>
-          <a:lstStyle xmlns:a="http://schemas.openxmlformats.org/drawingml/2006/main"/>
-          <a:p xmlns:a="http://schemas.openxmlformats.org/drawingml/2006/main"/>
+          <a:bodyPr/>
+          <a:lstStyle/>
+          <a:p>
+            <a:endParaRPr/>
+          </a:p>
         </p:txBody>
       </p:sp>
     </p:spTree>
   </p:cSld>
   <p:clrMapOvr>
-    <a:masterClrMapping xmlns:a="http://schemas.openxmlformats.org/drawingml/2006/main"/>
+    <a:masterClrMapping/>
   </p:clrMapOvr>
 </p:notes>
 </file>
 
 <file path=ppt/notesSlides/notesSlide4.xml><?xml version="1.0" encoding="utf-8"?>
-<p:notes xmlns:p="http://schemas.openxmlformats.org/presentationml/2006/main">
+<p:notes xmlns:a="http://schemas.openxmlformats.org/drawingml/2006/main" xmlns:r="http://schemas.openxmlformats.org/officeDocument/2006/relationships" xmlns:p="http://schemas.openxmlformats.org/presentationml/2006/main">
   <p:cSld>
     <p:spTree>
       <p:nvGrpSpPr>
@@ -711,16 +522,21 @@
         <p:nvPr/>
       </p:nvGrpSpPr>
       <p:grpSpPr>
-        <a:xfrm xmlns:a="http://schemas.openxmlformats.org/drawingml/2006/main"/>
+        <a:xfrm>
+          <a:off x="0" y="0"/>
+          <a:ext cx="0" cy="0"/>
+          <a:chOff x="0" y="0"/>
+          <a:chExt cx="0" cy="0"/>
+        </a:xfrm>
       </p:grpSpPr>
       <p:sp>
         <p:nvSpPr>
           <p:cNvPr id="2" name="Slide Image Placeholder 1"/>
           <p:cNvSpPr>
-            <a:spLocks xmlns:a="http://schemas.openxmlformats.org/drawingml/2006/main" noGrp="1"/>
+            <a:spLocks noGrp="1" noRot="1" noChangeAspect="1"/>
           </p:cNvSpPr>
           <p:nvPr>
-            <p:ph type="sldImg" idx="0"/>
+            <p:ph type="sldImg"/>
           </p:nvPr>
         </p:nvSpPr>
         <p:spPr/>
@@ -729,7 +545,7 @@
         <p:nvSpPr>
           <p:cNvPr id="3" name="Notes Placeholder 2"/>
           <p:cNvSpPr>
-            <a:spLocks xmlns:a="http://schemas.openxmlformats.org/drawingml/2006/main" noGrp="1"/>
+            <a:spLocks noGrp="1"/>
           </p:cNvSpPr>
           <p:nvPr>
             <p:ph type="body" idx="1"/>
@@ -737,16 +553,18 @@
         </p:nvSpPr>
         <p:spPr/>
         <p:txBody>
-          <a:bodyPr xmlns:a="http://schemas.openxmlformats.org/drawingml/2006/main"/>
-          <a:lstStyle xmlns:a="http://schemas.openxmlformats.org/drawingml/2006/main"/>
-          <a:p xmlns:a="http://schemas.openxmlformats.org/drawingml/2006/main"/>
+          <a:bodyPr/>
+          <a:lstStyle/>
+          <a:p>
+            <a:endParaRPr/>
+          </a:p>
         </p:txBody>
       </p:sp>
       <p:sp>
         <p:nvSpPr>
           <p:cNvPr id="4" name="Slide Number Placeholder 3"/>
           <p:cNvSpPr>
-            <a:spLocks xmlns:a="http://schemas.openxmlformats.org/drawingml/2006/main" noGrp="1"/>
+            <a:spLocks noGrp="1"/>
           </p:cNvSpPr>
           <p:nvPr>
             <p:ph type="sldNum" idx="5"/>
@@ -754,21 +572,23 @@
         </p:nvSpPr>
         <p:spPr/>
         <p:txBody>
-          <a:bodyPr xmlns:a="http://schemas.openxmlformats.org/drawingml/2006/main"/>
-          <a:lstStyle xmlns:a="http://schemas.openxmlformats.org/drawingml/2006/main"/>
-          <a:p xmlns:a="http://schemas.openxmlformats.org/drawingml/2006/main"/>
+          <a:bodyPr/>
+          <a:lstStyle/>
+          <a:p>
+            <a:endParaRPr/>
+          </a:p>
         </p:txBody>
       </p:sp>
     </p:spTree>
   </p:cSld>
   <p:clrMapOvr>
-    <a:masterClrMapping xmlns:a="http://schemas.openxmlformats.org/drawingml/2006/main"/>
+    <a:masterClrMapping/>
   </p:clrMapOvr>
 </p:notes>
 </file>
 
 <file path=ppt/notesSlides/notesSlide5.xml><?xml version="1.0" encoding="utf-8"?>
-<p:notes xmlns:p="http://schemas.openxmlformats.org/presentationml/2006/main">
+<p:notes xmlns:a="http://schemas.openxmlformats.org/drawingml/2006/main" xmlns:r="http://schemas.openxmlformats.org/officeDocument/2006/relationships" xmlns:p="http://schemas.openxmlformats.org/presentationml/2006/main">
   <p:cSld>
     <p:spTree>
       <p:nvGrpSpPr>
@@ -777,16 +597,21 @@
         <p:nvPr/>
       </p:nvGrpSpPr>
       <p:grpSpPr>
-        <a:xfrm xmlns:a="http://schemas.openxmlformats.org/drawingml/2006/main"/>
+        <a:xfrm>
+          <a:off x="0" y="0"/>
+          <a:ext cx="0" cy="0"/>
+          <a:chOff x="0" y="0"/>
+          <a:chExt cx="0" cy="0"/>
+        </a:xfrm>
       </p:grpSpPr>
       <p:sp>
         <p:nvSpPr>
           <p:cNvPr id="2" name="Slide Image Placeholder 1"/>
           <p:cNvSpPr>
-            <a:spLocks xmlns:a="http://schemas.openxmlformats.org/drawingml/2006/main" noGrp="1"/>
+            <a:spLocks noGrp="1" noRot="1" noChangeAspect="1"/>
           </p:cNvSpPr>
           <p:nvPr>
-            <p:ph type="sldImg" idx="0"/>
+            <p:ph type="sldImg"/>
           </p:nvPr>
         </p:nvSpPr>
         <p:spPr/>
@@ -795,7 +620,7 @@
         <p:nvSpPr>
           <p:cNvPr id="3" name="Notes Placeholder 2"/>
           <p:cNvSpPr>
-            <a:spLocks xmlns:a="http://schemas.openxmlformats.org/drawingml/2006/main" noGrp="1"/>
+            <a:spLocks noGrp="1"/>
           </p:cNvSpPr>
           <p:nvPr>
             <p:ph type="body" idx="1"/>
@@ -803,16 +628,18 @@
         </p:nvSpPr>
         <p:spPr/>
         <p:txBody>
-          <a:bodyPr xmlns:a="http://schemas.openxmlformats.org/drawingml/2006/main"/>
-          <a:lstStyle xmlns:a="http://schemas.openxmlformats.org/drawingml/2006/main"/>
-          <a:p xmlns:a="http://schemas.openxmlformats.org/drawingml/2006/main"/>
+          <a:bodyPr/>
+          <a:lstStyle/>
+          <a:p>
+            <a:endParaRPr/>
+          </a:p>
         </p:txBody>
       </p:sp>
       <p:sp>
         <p:nvSpPr>
           <p:cNvPr id="4" name="Slide Number Placeholder 3"/>
           <p:cNvSpPr>
-            <a:spLocks xmlns:a="http://schemas.openxmlformats.org/drawingml/2006/main" noGrp="1"/>
+            <a:spLocks noGrp="1"/>
           </p:cNvSpPr>
           <p:nvPr>
             <p:ph type="sldNum" idx="5"/>
@@ -820,21 +647,23 @@
         </p:nvSpPr>
         <p:spPr/>
         <p:txBody>
-          <a:bodyPr xmlns:a="http://schemas.openxmlformats.org/drawingml/2006/main"/>
-          <a:lstStyle xmlns:a="http://schemas.openxmlformats.org/drawingml/2006/main"/>
-          <a:p xmlns:a="http://schemas.openxmlformats.org/drawingml/2006/main"/>
+          <a:bodyPr/>
+          <a:lstStyle/>
+          <a:p>
+            <a:endParaRPr/>
+          </a:p>
         </p:txBody>
       </p:sp>
     </p:spTree>
   </p:cSld>
   <p:clrMapOvr>
-    <a:masterClrMapping xmlns:a="http://schemas.openxmlformats.org/drawingml/2006/main"/>
+    <a:masterClrMapping/>
   </p:clrMapOvr>
 </p:notes>
 </file>
 
 <file path=ppt/notesSlides/notesSlide6.xml><?xml version="1.0" encoding="utf-8"?>
-<p:notes xmlns:p="http://schemas.openxmlformats.org/presentationml/2006/main">
+<p:notes xmlns:a="http://schemas.openxmlformats.org/drawingml/2006/main" xmlns:r="http://schemas.openxmlformats.org/officeDocument/2006/relationships" xmlns:p="http://schemas.openxmlformats.org/presentationml/2006/main">
   <p:cSld>
     <p:spTree>
       <p:nvGrpSpPr>
@@ -843,16 +672,21 @@
         <p:nvPr/>
       </p:nvGrpSpPr>
       <p:grpSpPr>
-        <a:xfrm xmlns:a="http://schemas.openxmlformats.org/drawingml/2006/main"/>
+        <a:xfrm>
+          <a:off x="0" y="0"/>
+          <a:ext cx="0" cy="0"/>
+          <a:chOff x="0" y="0"/>
+          <a:chExt cx="0" cy="0"/>
+        </a:xfrm>
       </p:grpSpPr>
       <p:sp>
         <p:nvSpPr>
           <p:cNvPr id="2" name="Slide Image Placeholder 1"/>
           <p:cNvSpPr>
-            <a:spLocks xmlns:a="http://schemas.openxmlformats.org/drawingml/2006/main" noGrp="1"/>
+            <a:spLocks noGrp="1" noRot="1" noChangeAspect="1"/>
           </p:cNvSpPr>
           <p:nvPr>
-            <p:ph type="sldImg" idx="0"/>
+            <p:ph type="sldImg"/>
           </p:nvPr>
         </p:nvSpPr>
         <p:spPr/>
@@ -861,7 +695,7 @@
         <p:nvSpPr>
           <p:cNvPr id="3" name="Notes Placeholder 2"/>
           <p:cNvSpPr>
-            <a:spLocks xmlns:a="http://schemas.openxmlformats.org/drawingml/2006/main" noGrp="1"/>
+            <a:spLocks noGrp="1"/>
           </p:cNvSpPr>
           <p:nvPr>
             <p:ph type="body" idx="1"/>
@@ -869,16 +703,18 @@
         </p:nvSpPr>
         <p:spPr/>
         <p:txBody>
-          <a:bodyPr xmlns:a="http://schemas.openxmlformats.org/drawingml/2006/main"/>
-          <a:lstStyle xmlns:a="http://schemas.openxmlformats.org/drawingml/2006/main"/>
-          <a:p xmlns:a="http://schemas.openxmlformats.org/drawingml/2006/main"/>
+          <a:bodyPr/>
+          <a:lstStyle/>
+          <a:p>
+            <a:endParaRPr/>
+          </a:p>
         </p:txBody>
       </p:sp>
       <p:sp>
         <p:nvSpPr>
           <p:cNvPr id="4" name="Slide Number Placeholder 3"/>
           <p:cNvSpPr>
-            <a:spLocks xmlns:a="http://schemas.openxmlformats.org/drawingml/2006/main" noGrp="1"/>
+            <a:spLocks noGrp="1"/>
           </p:cNvSpPr>
           <p:nvPr>
             <p:ph type="sldNum" idx="5"/>
@@ -886,21 +722,23 @@
         </p:nvSpPr>
         <p:spPr/>
         <p:txBody>
-          <a:bodyPr xmlns:a="http://schemas.openxmlformats.org/drawingml/2006/main"/>
-          <a:lstStyle xmlns:a="http://schemas.openxmlformats.org/drawingml/2006/main"/>
-          <a:p xmlns:a="http://schemas.openxmlformats.org/drawingml/2006/main"/>
+          <a:bodyPr/>
+          <a:lstStyle/>
+          <a:p>
+            <a:endParaRPr/>
+          </a:p>
         </p:txBody>
       </p:sp>
     </p:spTree>
   </p:cSld>
   <p:clrMapOvr>
-    <a:masterClrMapping xmlns:a="http://schemas.openxmlformats.org/drawingml/2006/main"/>
+    <a:masterClrMapping/>
   </p:clrMapOvr>
 </p:notes>
 </file>
 
 <file path=ppt/notesSlides/notesSlide7.xml><?xml version="1.0" encoding="utf-8"?>
-<p:notes xmlns:p="http://schemas.openxmlformats.org/presentationml/2006/main">
+<p:notes xmlns:a="http://schemas.openxmlformats.org/drawingml/2006/main" xmlns:r="http://schemas.openxmlformats.org/officeDocument/2006/relationships" xmlns:p="http://schemas.openxmlformats.org/presentationml/2006/main">
   <p:cSld>
     <p:spTree>
       <p:nvGrpSpPr>
@@ -909,16 +747,21 @@
         <p:nvPr/>
       </p:nvGrpSpPr>
       <p:grpSpPr>
-        <a:xfrm xmlns:a="http://schemas.openxmlformats.org/drawingml/2006/main"/>
+        <a:xfrm>
+          <a:off x="0" y="0"/>
+          <a:ext cx="0" cy="0"/>
+          <a:chOff x="0" y="0"/>
+          <a:chExt cx="0" cy="0"/>
+        </a:xfrm>
       </p:grpSpPr>
       <p:sp>
         <p:nvSpPr>
           <p:cNvPr id="2" name="Slide Image Placeholder 1"/>
           <p:cNvSpPr>
-            <a:spLocks xmlns:a="http://schemas.openxmlformats.org/drawingml/2006/main" noGrp="1"/>
+            <a:spLocks noGrp="1" noRot="1" noChangeAspect="1"/>
           </p:cNvSpPr>
           <p:nvPr>
-            <p:ph type="sldImg" idx="0"/>
+            <p:ph type="sldImg"/>
           </p:nvPr>
         </p:nvSpPr>
         <p:spPr/>
@@ -927,7 +770,7 @@
         <p:nvSpPr>
           <p:cNvPr id="3" name="Notes Placeholder 2"/>
           <p:cNvSpPr>
-            <a:spLocks xmlns:a="http://schemas.openxmlformats.org/drawingml/2006/main" noGrp="1"/>
+            <a:spLocks noGrp="1"/>
           </p:cNvSpPr>
           <p:nvPr>
             <p:ph type="body" idx="1"/>
@@ -935,16 +778,18 @@
         </p:nvSpPr>
         <p:spPr/>
         <p:txBody>
-          <a:bodyPr xmlns:a="http://schemas.openxmlformats.org/drawingml/2006/main"/>
-          <a:lstStyle xmlns:a="http://schemas.openxmlformats.org/drawingml/2006/main"/>
-          <a:p xmlns:a="http://schemas.openxmlformats.org/drawingml/2006/main"/>
+          <a:bodyPr/>
+          <a:lstStyle/>
+          <a:p>
+            <a:endParaRPr/>
+          </a:p>
         </p:txBody>
       </p:sp>
       <p:sp>
         <p:nvSpPr>
           <p:cNvPr id="4" name="Slide Number Placeholder 3"/>
           <p:cNvSpPr>
-            <a:spLocks xmlns:a="http://schemas.openxmlformats.org/drawingml/2006/main" noGrp="1"/>
+            <a:spLocks noGrp="1"/>
           </p:cNvSpPr>
           <p:nvPr>
             <p:ph type="sldNum" idx="5"/>
@@ -952,21 +797,23 @@
         </p:nvSpPr>
         <p:spPr/>
         <p:txBody>
-          <a:bodyPr xmlns:a="http://schemas.openxmlformats.org/drawingml/2006/main"/>
-          <a:lstStyle xmlns:a="http://schemas.openxmlformats.org/drawingml/2006/main"/>
-          <a:p xmlns:a="http://schemas.openxmlformats.org/drawingml/2006/main"/>
+          <a:bodyPr/>
+          <a:lstStyle/>
+          <a:p>
+            <a:endParaRPr/>
+          </a:p>
         </p:txBody>
       </p:sp>
     </p:spTree>
   </p:cSld>
   <p:clrMapOvr>
-    <a:masterClrMapping xmlns:a="http://schemas.openxmlformats.org/drawingml/2006/main"/>
+    <a:masterClrMapping/>
   </p:clrMapOvr>
 </p:notes>
 </file>
 
 <file path=ppt/slideLayouts/slideLayout1.xml><?xml version="1.0" encoding="utf-8"?>
-<p:sldLayout xmlns:p="http://schemas.openxmlformats.org/presentationml/2006/main" type="title">
+<p:sldLayout xmlns:a="http://schemas.openxmlformats.org/drawingml/2006/main" xmlns:r="http://schemas.openxmlformats.org/officeDocument/2006/relationships" xmlns:p="http://schemas.openxmlformats.org/presentationml/2006/main" type="title">
   <p:cSld name="Title Slide">
     <p:spTree>
       <p:nvGrpSpPr>
@@ -975,19 +822,27 @@
         <p:nvPr/>
       </p:nvGrpSpPr>
       <p:grpSpPr>
-        <a:xfrm xmlns:a="http://schemas.openxmlformats.org/drawingml/2006/main"/>
+        <a:xfrm>
+          <a:off x="0" y="0"/>
+          <a:ext cx="0" cy="0"/>
+          <a:chOff x="0" y="0"/>
+          <a:chExt cx="0" cy="0"/>
+        </a:xfrm>
       </p:grpSpPr>
     </p:spTree>
   </p:cSld>
+  <p:clrMapOvr>
+    <a:masterClrMapping/>
+  </p:clrMapOvr>
 </p:sldLayout>
 </file>
 
 <file path=ppt/slideMasters/slideMaster1.xml><?xml version="1.0" encoding="utf-8"?>
-<p:sldMaster xmlns:p="http://schemas.openxmlformats.org/presentationml/2006/main">
+<p:sldMaster xmlns:a="http://schemas.openxmlformats.org/drawingml/2006/main" xmlns:r="http://schemas.openxmlformats.org/officeDocument/2006/relationships" xmlns:p="http://schemas.openxmlformats.org/presentationml/2006/main">
   <p:cSld name="Master">
     <p:bg>
       <p:bgRef idx="1001">
-        <a:schemeClr xmlns:a="http://schemas.openxmlformats.org/drawingml/2006/main" val="bg1"/>
+        <a:schemeClr val="bg1"/>
       </p:bgRef>
     </p:bg>
     <p:spTree>
@@ -997,17 +852,22 @@
         <p:nvPr/>
       </p:nvGrpSpPr>
       <p:grpSpPr>
-        <a:xfrm xmlns:a="http://schemas.openxmlformats.org/drawingml/2006/main"/>
+        <a:xfrm>
+          <a:off x="0" y="0"/>
+          <a:ext cx="0" cy="0"/>
+          <a:chOff x="0" y="0"/>
+          <a:chExt cx="0" cy="0"/>
+        </a:xfrm>
       </p:grpSpPr>
     </p:spTree>
   </p:cSld>
   <p:clrMap bg1="lt1" tx1="dk1" bg2="lt2" tx2="dk2" accent1="accent1" accent2="accent2" accent3="accent3" accent4="accent4" accent5="accent5" accent6="accent6" hlink="hlink" folHlink="folHlink"/>
   <p:sldLayoutIdLst>
-    <p:sldLayoutId xmlns:r="http://schemas.openxmlformats.org/officeDocument/2006/relationships" id="2147483649" r:id="Ra718b83fd49a4a5a"/>
+    <p:sldLayoutId id="2147483649" r:id="rId1"/>
   </p:sldLayoutIdLst>
   <p:txStyles>
     <p:titleStyle>
-      <a:lvl1pPr xmlns:a="http://schemas.openxmlformats.org/drawingml/2006/main" algn="l">
+      <a:lvl1pPr algn="l">
         <a:lnSpc>
           <a:spcPct val="90000"/>
         </a:lnSpc>
@@ -1026,7 +886,7 @@
       </a:lvl1pPr>
     </p:titleStyle>
     <p:bodyStyle>
-      <a:lvl1pPr xmlns:a="http://schemas.openxmlformats.org/drawingml/2006/main" marL="228600" indent="-228600" algn="l">
+      <a:lvl1pPr marL="228600" indent="-228600" algn="l">
         <a:lnSpc>
           <a:spcPct val="90000"/>
         </a:lnSpc>
@@ -1043,7 +903,7 @@
           <a:cs typeface="+mn-lt"/>
         </a:defRPr>
       </a:lvl1pPr>
-      <a:lvl2pPr xmlns:a="http://schemas.openxmlformats.org/drawingml/2006/main" marL="685800" indent="-228600" algn="l">
+      <a:lvl2pPr marL="685800" indent="-228600" algn="l">
         <a:lnSpc>
           <a:spcPct val="90000"/>
         </a:lnSpc>
@@ -1060,7 +920,7 @@
           <a:cs typeface="+mn-lt"/>
         </a:defRPr>
       </a:lvl2pPr>
-      <a:lvl3pPr xmlns:a="http://schemas.openxmlformats.org/drawingml/2006/main" marL="1143000" indent="-228600" algn="l">
+      <a:lvl3pPr marL="1143000" indent="-228600" algn="l">
         <a:lnSpc>
           <a:spcPct val="90000"/>
         </a:lnSpc>
@@ -1077,7 +937,7 @@
           <a:cs typeface="+mn-lt"/>
         </a:defRPr>
       </a:lvl3pPr>
-      <a:lvl4pPr xmlns:a="http://schemas.openxmlformats.org/drawingml/2006/main" marL="1600200" indent="-228600" algn="l">
+      <a:lvl4pPr marL="1600200" indent="-228600" algn="l">
         <a:lnSpc>
           <a:spcPct val="90000"/>
         </a:lnSpc>
@@ -1094,7 +954,7 @@
           <a:cs typeface="+mn-lt"/>
         </a:defRPr>
       </a:lvl4pPr>
-      <a:lvl5pPr xmlns:a="http://schemas.openxmlformats.org/drawingml/2006/main" marL="2057400" indent="-228600" algn="l">
+      <a:lvl5pPr marL="2057400" indent="-228600" algn="l">
         <a:lnSpc>
           <a:spcPct val="90000"/>
         </a:lnSpc>
@@ -1111,7 +971,7 @@
           <a:cs typeface="+mn-lt"/>
         </a:defRPr>
       </a:lvl5pPr>
-      <a:lvl6pPr xmlns:a="http://schemas.openxmlformats.org/drawingml/2006/main" marL="2514600" indent="-228600" algn="l">
+      <a:lvl6pPr marL="2514600" indent="-228600" algn="l">
         <a:lnSpc>
           <a:spcPct val="90000"/>
         </a:lnSpc>
@@ -1128,7 +988,7 @@
           <a:cs typeface="+mn-lt"/>
         </a:defRPr>
       </a:lvl6pPr>
-      <a:lvl7pPr xmlns:a="http://schemas.openxmlformats.org/drawingml/2006/main" marL="2971800" indent="-228600" algn="l">
+      <a:lvl7pPr marL="2971800" indent="-228600" algn="l">
         <a:lnSpc>
           <a:spcPct val="90000"/>
         </a:lnSpc>
@@ -1145,7 +1005,7 @@
           <a:cs typeface="+mn-lt"/>
         </a:defRPr>
       </a:lvl7pPr>
-      <a:lvl8pPr xmlns:a="http://schemas.openxmlformats.org/drawingml/2006/main" marL="3429000" indent="-228600" algn="l">
+      <a:lvl8pPr marL="3429000" indent="-228600" algn="l">
         <a:lnSpc>
           <a:spcPct val="90000"/>
         </a:lnSpc>
@@ -1162,7 +1022,7 @@
           <a:cs typeface="+mn-lt"/>
         </a:defRPr>
       </a:lvl8pPr>
-      <a:lvl9pPr xmlns:a="http://schemas.openxmlformats.org/drawingml/2006/main" marL="3886200" indent="-228600" algn="l">
+      <a:lvl9pPr marL="3886200" indent="-228600" algn="l">
         <a:lnSpc>
           <a:spcPct val="90000"/>
         </a:lnSpc>
@@ -1181,7 +1041,7 @@
       </a:lvl9pPr>
     </p:bodyStyle>
     <p:otherStyle>
-      <a:lvl1pPr xmlns:a="http://schemas.openxmlformats.org/drawingml/2006/main" marL="0" algn="l">
+      <a:lvl1pPr marL="0" algn="l">
         <a:buNone/>
         <a:defRPr sz="1800">
           <a:solidFill>
@@ -1192,7 +1052,7 @@
           <a:cs typeface="+mn-lt"/>
         </a:defRPr>
       </a:lvl1pPr>
-      <a:lvl2pPr xmlns:a="http://schemas.openxmlformats.org/drawingml/2006/main" marL="457200" algn="l">
+      <a:lvl2pPr marL="457200" algn="l">
         <a:buNone/>
         <a:defRPr sz="1800">
           <a:solidFill>
@@ -1203,7 +1063,7 @@
           <a:cs typeface="+mn-lt"/>
         </a:defRPr>
       </a:lvl2pPr>
-      <a:lvl3pPr xmlns:a="http://schemas.openxmlformats.org/drawingml/2006/main" marL="914400" algn="l">
+      <a:lvl3pPr marL="914400" algn="l">
         <a:buNone/>
         <a:defRPr sz="1800">
           <a:solidFill>
@@ -1214,7 +1074,7 @@
           <a:cs typeface="+mn-lt"/>
         </a:defRPr>
       </a:lvl3pPr>
-      <a:lvl4pPr xmlns:a="http://schemas.openxmlformats.org/drawingml/2006/main" marL="1371600" algn="l">
+      <a:lvl4pPr marL="1371600" algn="l">
         <a:buNone/>
         <a:defRPr sz="1800">
           <a:solidFill>
@@ -1225,7 +1085,7 @@
           <a:cs typeface="+mn-lt"/>
         </a:defRPr>
       </a:lvl4pPr>
-      <a:lvl5pPr xmlns:a="http://schemas.openxmlformats.org/drawingml/2006/main" marL="1828800" algn="l">
+      <a:lvl5pPr marL="1828800" algn="l">
         <a:buNone/>
         <a:defRPr sz="1800">
           <a:solidFill>
@@ -1236,7 +1096,7 @@
           <a:cs typeface="+mn-lt"/>
         </a:defRPr>
       </a:lvl5pPr>
-      <a:lvl6pPr xmlns:a="http://schemas.openxmlformats.org/drawingml/2006/main" marL="2286000" algn="l">
+      <a:lvl6pPr marL="2286000" algn="l">
         <a:buNone/>
         <a:defRPr sz="1800">
           <a:solidFill>
@@ -1247,7 +1107,7 @@
           <a:cs typeface="+mn-lt"/>
         </a:defRPr>
       </a:lvl6pPr>
-      <a:lvl7pPr xmlns:a="http://schemas.openxmlformats.org/drawingml/2006/main" marL="2743200" algn="l">
+      <a:lvl7pPr marL="2743200" algn="l">
         <a:buNone/>
         <a:defRPr sz="1800">
           <a:solidFill>
@@ -1258,7 +1118,7 @@
           <a:cs typeface="+mn-lt"/>
         </a:defRPr>
       </a:lvl7pPr>
-      <a:lvl8pPr xmlns:a="http://schemas.openxmlformats.org/drawingml/2006/main" marL="3200400" algn="l">
+      <a:lvl8pPr marL="3200400" algn="l">
         <a:buNone/>
         <a:defRPr sz="1800">
           <a:solidFill>
@@ -1269,7 +1129,7 @@
           <a:cs typeface="+mn-lt"/>
         </a:defRPr>
       </a:lvl8pPr>
-      <a:lvl9pPr xmlns:a="http://schemas.openxmlformats.org/drawingml/2006/main" marL="3657600" algn="l">
+      <a:lvl9pPr marL="3657600" algn="l">
         <a:buNone/>
         <a:defRPr sz="1800">
           <a:solidFill>
@@ -1285,259 +1145,15 @@
 </p:sldMaster>
 </file>
 
-<file path=ppt/slideMasters/theme/theme2.xml><?xml version="1.0" encoding="utf-8"?>
-<a:theme xmlns:a="http://schemas.openxmlformats.org/drawingml/2006/main" name="ChatGPT">
-  <a:themeElements>
-    <a:clrScheme name="ChatGPT">
-      <a:dk1>
-        <a:srgbClr val="000000"/>
-      </a:dk1>
-      <a:lt1>
-        <a:srgbClr val="FFFFFF"/>
-      </a:lt1>
-      <a:dk2>
-        <a:srgbClr val="0E2841"/>
-      </a:dk2>
-      <a:lt2>
-        <a:srgbClr val="E8E8E8"/>
-      </a:lt2>
-      <a:accent1>
-        <a:srgbClr val="156082"/>
-      </a:accent1>
-      <a:accent2>
-        <a:srgbClr val="E97132"/>
-      </a:accent2>
-      <a:accent3>
-        <a:srgbClr val="196B24"/>
-      </a:accent3>
-      <a:accent4>
-        <a:srgbClr val="0F9ED5"/>
-      </a:accent4>
-      <a:accent5>
-        <a:srgbClr val="A02B93"/>
-      </a:accent5>
-      <a:accent6>
-        <a:srgbClr val="4EA72E"/>
-      </a:accent6>
-      <a:hlink>
-        <a:srgbClr val="467886"/>
-      </a:hlink>
-      <a:folHlink>
-        <a:srgbClr val="96607D"/>
-      </a:folHlink>
-    </a:clrScheme>
-    <a:fontScheme name="Office">
-      <a:majorFont>
-        <a:latin typeface="Calibri Light"/>
-        <a:ea typeface="Calibri Light"/>
-        <a:cs typeface="Calibri Light"/>
-      </a:majorFont>
-      <a:minorFont>
-        <a:latin typeface="Calibri"/>
-        <a:ea typeface="Calibri"/>
-        <a:cs typeface="Calibri"/>
-      </a:minorFont>
-    </a:fontScheme>
-    <a:fmtScheme name="ChatGPT">
-      <a:fillStyleLst>
-        <a:solidFill>
-          <a:schemeClr val="phClr"/>
-        </a:solidFill>
-        <a:gradFill>
-          <a:gsLst>
-            <a:gs pos="0">
-              <a:schemeClr val="phClr">
-                <a:tint val="67000"/>
-                <a:lumMod val="110000"/>
-                <a:satMod val="105000"/>
-              </a:schemeClr>
-            </a:gs>
-            <a:gs pos="50000">
-              <a:schemeClr val="phClr">
-                <a:tint val="73000"/>
-                <a:lumMod val="105000"/>
-                <a:satMod val="103000"/>
-              </a:schemeClr>
-            </a:gs>
-            <a:gs pos="100000">
-              <a:schemeClr val="phClr">
-                <a:tint val="81000"/>
-                <a:lumMod val="105000"/>
-                <a:satMod val="109000"/>
-              </a:schemeClr>
-            </a:gs>
-          </a:gsLst>
-          <a:lin ang="5400000" scaled="0"/>
-        </a:gradFill>
-        <a:gradFill>
-          <a:gsLst>
-            <a:gs pos="0">
-              <a:schemeClr val="phClr">
-                <a:tint val="94000"/>
-                <a:lumMod val="102000"/>
-                <a:satMod val="103000"/>
-              </a:schemeClr>
-            </a:gs>
-            <a:gs pos="50000">
-              <a:schemeClr val="phClr">
-                <a:shade val="100000"/>
-                <a:lumMod val="100000"/>
-                <a:satMod val="110000"/>
-              </a:schemeClr>
-            </a:gs>
-            <a:gs pos="100000">
-              <a:schemeClr val="phClr">
-                <a:shade val="78000"/>
-                <a:lumMod val="99000"/>
-                <a:satMod val="120000"/>
-              </a:schemeClr>
-            </a:gs>
-          </a:gsLst>
-          <a:lin ang="5400000" scaled="0"/>
-        </a:gradFill>
-      </a:fillStyleLst>
-      <a:lnStyleLst>
-        <a:ln w="12700">
-          <a:solidFill>
-            <a:schemeClr val="phClr"/>
-          </a:solidFill>
-          <a:prstDash val="solid"/>
-        </a:ln>
-        <a:ln w="19050">
-          <a:solidFill>
-            <a:schemeClr val="phClr"/>
-          </a:solidFill>
-          <a:prstDash val="solid"/>
-        </a:ln>
-        <a:ln w="25400">
-          <a:solidFill>
-            <a:schemeClr val="phClr"/>
-          </a:solidFill>
-          <a:prstDash val="solid"/>
-        </a:ln>
-      </a:lnStyleLst>
-      <a:effectStyleLst>
-        <a:effectStyle>
-          <a:effectLst/>
-        </a:effectStyle>
-        <a:effectStyle>
-          <a:effectLst/>
-        </a:effectStyle>
-        <a:effectStyle>
-          <a:effectLst>
-            <a:outerShdw blurRad="57150" dist="19050" dir="5400000">
-              <a:srgbClr val="000000">
-                <a:alpha val="16000"/>
-              </a:srgbClr>
-            </a:outerShdw>
-          </a:effectLst>
-        </a:effectStyle>
-        <a:effectStyle>
-          <a:effectLst>
-            <a:outerShdw blurRad="19050" dist="9525" dir="5400000">
-              <a:srgbClr val="000000">
-                <a:alpha val="6000"/>
-              </a:srgbClr>
-            </a:outerShdw>
-          </a:effectLst>
-        </a:effectStyle>
-        <a:effectStyle>
-          <a:effectLst>
-            <a:outerShdw blurRad="28575" dist="9525" dir="5400000">
-              <a:srgbClr val="000000">
-                <a:alpha val="8000"/>
-              </a:srgbClr>
-            </a:outerShdw>
-          </a:effectLst>
-        </a:effectStyle>
-        <a:effectStyle>
-          <a:effectLst>
-            <a:outerShdw blurRad="57150" dist="19050" dir="5400000">
-              <a:srgbClr val="000000">
-                <a:alpha val="10000"/>
-              </a:srgbClr>
-            </a:outerShdw>
-          </a:effectLst>
-        </a:effectStyle>
-        <a:effectStyle>
-          <a:effectLst>
-            <a:outerShdw blurRad="114300" dist="38100" dir="5400000">
-              <a:srgbClr val="000000">
-                <a:alpha val="12000"/>
-              </a:srgbClr>
-            </a:outerShdw>
-          </a:effectLst>
-        </a:effectStyle>
-        <a:effectStyle>
-          <a:effectLst>
-            <a:outerShdw blurRad="171450" dist="57150" dir="5400000">
-              <a:srgbClr val="000000">
-                <a:alpha val="16000"/>
-              </a:srgbClr>
-            </a:outerShdw>
-          </a:effectLst>
-        </a:effectStyle>
-        <a:effectStyle>
-          <a:effectLst>
-            <a:outerShdw blurRad="266700" dist="95250" dir="5400000">
-              <a:srgbClr val="000000">
-                <a:alpha val="24000"/>
-              </a:srgbClr>
-            </a:outerShdw>
-          </a:effectLst>
-        </a:effectStyle>
-      </a:effectStyleLst>
-      <a:bgFillStyleLst>
-        <a:solidFill>
-          <a:schemeClr val="phClr"/>
-        </a:solidFill>
-        <a:solidFill>
-          <a:schemeClr val="phClr">
-            <a:tint val="95000"/>
-            <a:satMod val="170000"/>
-          </a:schemeClr>
-        </a:solidFill>
-        <a:gradFill>
-          <a:gsLst>
-            <a:gs pos="0">
-              <a:schemeClr val="phClr">
-                <a:tint val="93000"/>
-                <a:shade val="98000"/>
-                <a:lumMod val="102000"/>
-                <a:satMod val="150000"/>
-              </a:schemeClr>
-            </a:gs>
-            <a:gs pos="50000">
-              <a:schemeClr val="phClr">
-                <a:tint val="98000"/>
-                <a:shade val="90000"/>
-                <a:lumMod val="103000"/>
-                <a:satMod val="130000"/>
-              </a:schemeClr>
-            </a:gs>
-            <a:gs pos="100000">
-              <a:schemeClr val="phClr">
-                <a:shade val="63000"/>
-                <a:satMod val="120000"/>
-              </a:schemeClr>
-            </a:gs>
-          </a:gsLst>
-          <a:lin ang="5400000" scaled="0"/>
-        </a:gradFill>
-      </a:bgFillStyleLst>
-    </a:fmtScheme>
-  </a:themeElements>
-</a:theme>
-</file>
-
 <file path=ppt/slides/slide1.xml><?xml version="1.0" encoding="utf-8"?>
-<p:sld xmlns:p="http://schemas.openxmlformats.org/presentationml/2006/main">
+<p:sld xmlns:a="http://schemas.openxmlformats.org/drawingml/2006/main" xmlns:r="http://schemas.openxmlformats.org/officeDocument/2006/relationships" xmlns:p="http://schemas.openxmlformats.org/presentationml/2006/main">
   <p:cSld>
     <p:bg>
       <p:bgPr>
-        <a:solidFill xmlns:a="http://schemas.openxmlformats.org/drawingml/2006/main">
+        <a:solidFill>
           <a:srgbClr val="FFFFFF"/>
         </a:solidFill>
+        <a:effectLst/>
       </p:bgPr>
     </p:bg>
     <p:spTree>
@@ -1547,7 +1163,12 @@
         <p:nvPr/>
       </p:nvGrpSpPr>
       <p:grpSpPr>
-        <a:xfrm xmlns:a="http://schemas.openxmlformats.org/drawingml/2006/main"/>
+        <a:xfrm>
+          <a:off x="0" y="0"/>
+          <a:ext cx="0" cy="0"/>
+          <a:chOff x="0" y="0"/>
+          <a:chExt cx="0" cy="0"/>
+        </a:xfrm>
       </p:grpSpPr>
       <p:cxnSp>
         <p:nvCxnSpPr>
@@ -1556,14 +1177,14 @@
           <p:nvPr/>
         </p:nvCxnSpPr>
         <p:spPr>
-          <a:xfrm xmlns:a="http://schemas.openxmlformats.org/drawingml/2006/main">
+          <a:xfrm>
             <a:off x="400050" y="295275"/>
             <a:ext cx="11391900" cy="9525"/>
           </a:xfrm>
-          <a:prstGeom xmlns:a="http://schemas.openxmlformats.org/drawingml/2006/main" prst="straightConnector1">
-            <a:avLst/>
-          </a:prstGeom>
-          <a:ln xmlns:a="http://schemas.openxmlformats.org/drawingml/2006/main" w="9525">
+          <a:prstGeom prst="straightConnector1">
+            <a:avLst/>
+          </a:prstGeom>
+          <a:ln w="9525">
             <a:solidFill>
               <a:srgbClr val="C7D0DA"/>
             </a:solidFill>
@@ -1574,32 +1195,32 @@
       <p:sp>
         <p:nvSpPr>
           <p:cNvPr id="2" name="page-number">
-            <a:extLst xmlns:a="http://schemas.openxmlformats.org/drawingml/2006/main">
+            <a:extLst>
               <a:ext uri="{FF2B5EF4-FFF2-40B4-BE49-F238E27FC236}">
                 <a16:creationId xmlns:a16="http://schemas.microsoft.com/office/drawing/2014/main" id="{D50697A7-0C6A-41F3-8FD3-39D00690D105}"/>
               </a:ext>
             </a:extLst>
           </p:cNvPr>
           <p:cNvSpPr>
-            <a:spLocks xmlns:a="http://schemas.openxmlformats.org/drawingml/2006/main" noGrp="1"/>
-          </p:cNvSpPr>
-          <p:nvPr/>
-        </p:nvSpPr>
-        <p:spPr>
-          <a:xfrm xmlns:a="http://schemas.openxmlformats.org/drawingml/2006/main">
+            <a:spLocks noGrp="1"/>
+          </p:cNvSpPr>
+          <p:nvPr/>
+        </p:nvSpPr>
+        <p:spPr>
+          <a:xfrm>
             <a:off x="11125200" y="6305550"/>
             <a:ext cx="666750" cy="209550"/>
           </a:xfrm>
-          <a:prstGeom xmlns:a="http://schemas.openxmlformats.org/drawingml/2006/main" prst="rect">
-            <a:avLst/>
-          </a:prstGeom>
-        </p:spPr>
-        <p:txBody>
-          <a:bodyPr xmlns:a="http://schemas.openxmlformats.org/drawingml/2006/main" wrap="square" lIns="0" tIns="0" rIns="0" bIns="0" anchor="t">
-            <a:normAutofit fontScale="100000"/>
+          <a:prstGeom prst="rect">
+            <a:avLst/>
+          </a:prstGeom>
+        </p:spPr>
+        <p:txBody>
+          <a:bodyPr wrap="square" lIns="0" tIns="0" rIns="0" bIns="0" anchor="t">
+            <a:normAutofit/>
           </a:bodyPr>
-          <a:lstStyle xmlns:a="http://schemas.openxmlformats.org/drawingml/2006/main"/>
-          <a:p xmlns:a="http://schemas.openxmlformats.org/drawingml/2006/main">
+          <a:lstStyle/>
+          <a:p>
             <a:pPr algn="r">
               <a:buNone/>
               <a:defRPr sz="975" b="0">
@@ -1620,65 +1241,72 @@
       <p:sp>
         <p:nvSpPr>
           <p:cNvPr id="3" name="accent-bar">
-            <a:extLst xmlns:a="http://schemas.openxmlformats.org/drawingml/2006/main">
+            <a:extLst>
               <a:ext uri="{FF2B5EF4-FFF2-40B4-BE49-F238E27FC236}">
                 <a16:creationId xmlns:a16="http://schemas.microsoft.com/office/drawing/2014/main" id="{C48267AB-AD80-4E99-9C51-68ACF1E9AFD6}"/>
               </a:ext>
             </a:extLst>
           </p:cNvPr>
           <p:cNvSpPr>
-            <a:spLocks xmlns:a="http://schemas.openxmlformats.org/drawingml/2006/main" noGrp="1"/>
-          </p:cNvSpPr>
-          <p:nvPr/>
-        </p:nvSpPr>
-        <p:spPr>
-          <a:xfrm xmlns:a="http://schemas.openxmlformats.org/drawingml/2006/main">
+            <a:spLocks noGrp="1"/>
+          </p:cNvSpPr>
+          <p:nvPr/>
+        </p:nvSpPr>
+        <p:spPr>
+          <a:xfrm>
             <a:off x="400050" y="647700"/>
             <a:ext cx="609600" cy="76200"/>
           </a:xfrm>
-          <a:prstGeom xmlns:a="http://schemas.openxmlformats.org/drawingml/2006/main" prst="rect">
-            <a:avLst/>
-          </a:prstGeom>
-          <a:solidFill xmlns:a="http://schemas.openxmlformats.org/drawingml/2006/main">
+          <a:prstGeom prst="rect">
+            <a:avLst/>
+          </a:prstGeom>
+          <a:solidFill>
             <a:srgbClr val="18BCEB"/>
           </a:solidFill>
-          <a:ln xmlns:a="http://schemas.openxmlformats.org/drawingml/2006/main" w="0">
+          <a:ln w="0">
             <a:solidFill>
               <a:srgbClr val="18BCEB"/>
             </a:solidFill>
             <a:prstDash val="solid"/>
           </a:ln>
         </p:spPr>
+        <p:txBody>
+          <a:bodyPr/>
+          <a:lstStyle/>
+          <a:p>
+            <a:endParaRPr lang="en-CN"/>
+          </a:p>
+        </p:txBody>
       </p:sp>
       <p:sp>
         <p:nvSpPr>
           <p:cNvPr id="4" name="cover-eyebrow">
-            <a:extLst xmlns:a="http://schemas.openxmlformats.org/drawingml/2006/main">
+            <a:extLst>
               <a:ext uri="{FF2B5EF4-FFF2-40B4-BE49-F238E27FC236}">
                 <a16:creationId xmlns:a16="http://schemas.microsoft.com/office/drawing/2014/main" id="{110A6850-D826-4F17-B4C1-ADDCF048D0DA}"/>
               </a:ext>
             </a:extLst>
           </p:cNvPr>
           <p:cNvSpPr>
-            <a:spLocks xmlns:a="http://schemas.openxmlformats.org/drawingml/2006/main" noGrp="1"/>
-          </p:cNvSpPr>
-          <p:nvPr/>
-        </p:nvSpPr>
-        <p:spPr>
-          <a:xfrm xmlns:a="http://schemas.openxmlformats.org/drawingml/2006/main">
+            <a:spLocks noGrp="1"/>
+          </p:cNvSpPr>
+          <p:nvPr/>
+        </p:nvSpPr>
+        <p:spPr>
+          <a:xfrm>
             <a:off x="400050" y="895350"/>
             <a:ext cx="5143500" cy="266700"/>
           </a:xfrm>
-          <a:prstGeom xmlns:a="http://schemas.openxmlformats.org/drawingml/2006/main" prst="rect">
-            <a:avLst/>
-          </a:prstGeom>
-        </p:spPr>
-        <p:txBody>
-          <a:bodyPr xmlns:a="http://schemas.openxmlformats.org/drawingml/2006/main" wrap="square" lIns="0" tIns="0" rIns="0" bIns="0" anchor="t">
-            <a:normAutofit fontScale="100000"/>
+          <a:prstGeom prst="rect">
+            <a:avLst/>
+          </a:prstGeom>
+        </p:spPr>
+        <p:txBody>
+          <a:bodyPr wrap="square" lIns="0" tIns="0" rIns="0" bIns="0" anchor="t">
+            <a:normAutofit/>
           </a:bodyPr>
-          <a:lstStyle xmlns:a="http://schemas.openxmlformats.org/drawingml/2006/main"/>
-          <a:p xmlns:a="http://schemas.openxmlformats.org/drawingml/2006/main">
+          <a:lstStyle/>
+          <a:p>
             <a:pPr algn="l">
               <a:buNone/>
               <a:defRPr sz="1200" b="1">
@@ -1699,32 +1327,32 @@
       <p:sp>
         <p:nvSpPr>
           <p:cNvPr id="5" name="cover-title">
-            <a:extLst xmlns:a="http://schemas.openxmlformats.org/drawingml/2006/main">
+            <a:extLst>
               <a:ext uri="{FF2B5EF4-FFF2-40B4-BE49-F238E27FC236}">
                 <a16:creationId xmlns:a16="http://schemas.microsoft.com/office/drawing/2014/main" id="{CCFD7711-B331-4B43-9581-86BE96A898B1}"/>
               </a:ext>
             </a:extLst>
           </p:cNvPr>
           <p:cNvSpPr>
-            <a:spLocks xmlns:a="http://schemas.openxmlformats.org/drawingml/2006/main" noGrp="1"/>
-          </p:cNvSpPr>
-          <p:nvPr/>
-        </p:nvSpPr>
-        <p:spPr>
-          <a:xfrm xmlns:a="http://schemas.openxmlformats.org/drawingml/2006/main">
+            <a:spLocks noGrp="1"/>
+          </p:cNvSpPr>
+          <p:nvPr/>
+        </p:nvSpPr>
+        <p:spPr>
+          <a:xfrm>
             <a:off x="400050" y="1447800"/>
             <a:ext cx="5334000" cy="1562100"/>
           </a:xfrm>
-          <a:prstGeom xmlns:a="http://schemas.openxmlformats.org/drawingml/2006/main" prst="rect">
-            <a:avLst/>
-          </a:prstGeom>
-        </p:spPr>
-        <p:txBody>
-          <a:bodyPr xmlns:a="http://schemas.openxmlformats.org/drawingml/2006/main" wrap="square" lIns="0" tIns="0" rIns="0" bIns="0" anchor="t">
-            <a:normAutofit fontScale="100000"/>
+          <a:prstGeom prst="rect">
+            <a:avLst/>
+          </a:prstGeom>
+        </p:spPr>
+        <p:txBody>
+          <a:bodyPr wrap="square" lIns="0" tIns="0" rIns="0" bIns="0" anchor="t">
+            <a:normAutofit/>
           </a:bodyPr>
-          <a:lstStyle xmlns:a="http://schemas.openxmlformats.org/drawingml/2006/main"/>
-          <a:p xmlns:a="http://schemas.openxmlformats.org/drawingml/2006/main">
+          <a:lstStyle/>
+          <a:p>
             <a:pPr algn="l">
               <a:buNone/>
               <a:defRPr sz="3900" b="1">
@@ -1746,32 +1374,32 @@
       <p:sp>
         <p:nvSpPr>
           <p:cNvPr id="6" name="cover-subtitle">
-            <a:extLst xmlns:a="http://schemas.openxmlformats.org/drawingml/2006/main">
+            <a:extLst>
               <a:ext uri="{FF2B5EF4-FFF2-40B4-BE49-F238E27FC236}">
                 <a16:creationId xmlns:a16="http://schemas.microsoft.com/office/drawing/2014/main" id="{142ADB23-6C3F-458C-A7AC-7A70B3C688B1}"/>
               </a:ext>
             </a:extLst>
           </p:cNvPr>
           <p:cNvSpPr>
-            <a:spLocks xmlns:a="http://schemas.openxmlformats.org/drawingml/2006/main" noGrp="1"/>
-          </p:cNvSpPr>
-          <p:nvPr/>
-        </p:nvSpPr>
-        <p:spPr>
-          <a:xfrm xmlns:a="http://schemas.openxmlformats.org/drawingml/2006/main">
+            <a:spLocks noGrp="1"/>
+          </p:cNvSpPr>
+          <p:nvPr/>
+        </p:nvSpPr>
+        <p:spPr>
+          <a:xfrm>
             <a:off x="400050" y="3219450"/>
             <a:ext cx="4953000" cy="628650"/>
           </a:xfrm>
-          <a:prstGeom xmlns:a="http://schemas.openxmlformats.org/drawingml/2006/main" prst="rect">
-            <a:avLst/>
-          </a:prstGeom>
-        </p:spPr>
-        <p:txBody>
-          <a:bodyPr xmlns:a="http://schemas.openxmlformats.org/drawingml/2006/main" wrap="square" lIns="0" tIns="0" rIns="0" bIns="0" anchor="t">
-            <a:normAutofit fontScale="100000"/>
+          <a:prstGeom prst="rect">
+            <a:avLst/>
+          </a:prstGeom>
+        </p:spPr>
+        <p:txBody>
+          <a:bodyPr wrap="square" lIns="0" tIns="0" rIns="0" bIns="0" anchor="t">
+            <a:normAutofit/>
           </a:bodyPr>
-          <a:lstStyle xmlns:a="http://schemas.openxmlformats.org/drawingml/2006/main"/>
-          <a:p xmlns:a="http://schemas.openxmlformats.org/drawingml/2006/main">
+          <a:lstStyle/>
+          <a:p>
             <a:pPr algn="l">
               <a:buNone/>
               <a:defRPr sz="2025" b="0">
@@ -1792,67 +1420,74 @@
       <p:sp>
         <p:nvSpPr>
           <p:cNvPr id="7" name="cover-info">
-            <a:extLst xmlns:a="http://schemas.openxmlformats.org/drawingml/2006/main">
+            <a:extLst>
               <a:ext uri="{FF2B5EF4-FFF2-40B4-BE49-F238E27FC236}">
                 <a16:creationId xmlns:a16="http://schemas.microsoft.com/office/drawing/2014/main" id="{072F4E86-0F32-47D2-806B-5DBF69327B91}"/>
               </a:ext>
             </a:extLst>
           </p:cNvPr>
           <p:cNvSpPr>
-            <a:spLocks xmlns:a="http://schemas.openxmlformats.org/drawingml/2006/main" noGrp="1"/>
-          </p:cNvSpPr>
-          <p:nvPr/>
-        </p:nvSpPr>
-        <p:spPr>
-          <a:xfrm xmlns:a="http://schemas.openxmlformats.org/drawingml/2006/main">
+            <a:spLocks noGrp="1"/>
+          </p:cNvSpPr>
+          <p:nvPr/>
+        </p:nvSpPr>
+        <p:spPr>
+          <a:xfrm>
             <a:off x="400050" y="4667250"/>
             <a:ext cx="4933950" cy="933450"/>
           </a:xfrm>
-          <a:prstGeom xmlns:a="http://schemas.openxmlformats.org/drawingml/2006/main" prst="roundRect">
+          <a:prstGeom prst="roundRect">
             <a:avLst>
               <a:gd name="adj" fmla="val 8163"/>
             </a:avLst>
           </a:prstGeom>
-          <a:solidFill xmlns:a="http://schemas.openxmlformats.org/drawingml/2006/main">
+          <a:solidFill>
             <a:srgbClr val="EAF8FD"/>
           </a:solidFill>
-          <a:ln xmlns:a="http://schemas.openxmlformats.org/drawingml/2006/main" w="9525">
+          <a:ln w="9525">
             <a:solidFill>
               <a:srgbClr val="BCE5F5"/>
             </a:solidFill>
             <a:prstDash val="solid"/>
           </a:ln>
         </p:spPr>
+        <p:txBody>
+          <a:bodyPr/>
+          <a:lstStyle/>
+          <a:p>
+            <a:endParaRPr lang="en-CN"/>
+          </a:p>
+        </p:txBody>
       </p:sp>
       <p:sp>
         <p:nvSpPr>
           <p:cNvPr id="8" name="cover-info-text">
-            <a:extLst xmlns:a="http://schemas.openxmlformats.org/drawingml/2006/main">
+            <a:extLst>
               <a:ext uri="{FF2B5EF4-FFF2-40B4-BE49-F238E27FC236}">
                 <a16:creationId xmlns:a16="http://schemas.microsoft.com/office/drawing/2014/main" id="{28C118AF-D7E0-4506-872C-77476B1066C4}"/>
               </a:ext>
             </a:extLst>
           </p:cNvPr>
           <p:cNvSpPr>
-            <a:spLocks xmlns:a="http://schemas.openxmlformats.org/drawingml/2006/main" noGrp="1"/>
-          </p:cNvSpPr>
-          <p:nvPr/>
-        </p:nvSpPr>
-        <p:spPr>
-          <a:xfrm xmlns:a="http://schemas.openxmlformats.org/drawingml/2006/main">
+            <a:spLocks noGrp="1"/>
+          </p:cNvSpPr>
+          <p:nvPr/>
+        </p:nvSpPr>
+        <p:spPr>
+          <a:xfrm>
             <a:off x="628650" y="4895850"/>
             <a:ext cx="4286250" cy="514350"/>
           </a:xfrm>
-          <a:prstGeom xmlns:a="http://schemas.openxmlformats.org/drawingml/2006/main" prst="rect">
-            <a:avLst/>
-          </a:prstGeom>
-        </p:spPr>
-        <p:txBody>
-          <a:bodyPr xmlns:a="http://schemas.openxmlformats.org/drawingml/2006/main" wrap="square" lIns="0" tIns="0" rIns="0" bIns="0" anchor="t">
-            <a:normAutofit fontScale="100000"/>
+          <a:prstGeom prst="rect">
+            <a:avLst/>
+          </a:prstGeom>
+        </p:spPr>
+        <p:txBody>
+          <a:bodyPr wrap="square" lIns="0" tIns="0" rIns="0" bIns="0" anchor="t">
+            <a:normAutofit/>
           </a:bodyPr>
-          <a:lstStyle xmlns:a="http://schemas.openxmlformats.org/drawingml/2006/main"/>
-          <a:p xmlns:a="http://schemas.openxmlformats.org/drawingml/2006/main">
+          <a:lstStyle/>
+          <a:p>
             <a:pPr algn="l">
               <a:buNone/>
               <a:defRPr sz="1425" b="0">
@@ -1874,67 +1509,74 @@
       <p:sp>
         <p:nvSpPr>
           <p:cNvPr id="9" name="cover-image-backing">
-            <a:extLst xmlns:a="http://schemas.openxmlformats.org/drawingml/2006/main">
+            <a:extLst>
               <a:ext uri="{FF2B5EF4-FFF2-40B4-BE49-F238E27FC236}">
                 <a16:creationId xmlns:a16="http://schemas.microsoft.com/office/drawing/2014/main" id="{2FD5435B-4194-402C-AC0D-A696E602385C}"/>
               </a:ext>
             </a:extLst>
           </p:cNvPr>
           <p:cNvSpPr>
-            <a:spLocks xmlns:a="http://schemas.openxmlformats.org/drawingml/2006/main" noGrp="1"/>
-          </p:cNvSpPr>
-          <p:nvPr/>
-        </p:nvSpPr>
-        <p:spPr>
-          <a:xfrm xmlns:a="http://schemas.openxmlformats.org/drawingml/2006/main">
+            <a:spLocks noGrp="1"/>
+          </p:cNvSpPr>
+          <p:nvPr/>
+        </p:nvSpPr>
+        <p:spPr>
+          <a:xfrm>
             <a:off x="5953125" y="723900"/>
             <a:ext cx="5838825" cy="4953000"/>
           </a:xfrm>
-          <a:prstGeom xmlns:a="http://schemas.openxmlformats.org/drawingml/2006/main" prst="roundRect">
+          <a:prstGeom prst="roundRect">
             <a:avLst>
               <a:gd name="adj" fmla="val 1538"/>
             </a:avLst>
           </a:prstGeom>
-          <a:solidFill xmlns:a="http://schemas.openxmlformats.org/drawingml/2006/main">
+          <a:solidFill>
             <a:srgbClr val="0C1826"/>
           </a:solidFill>
-          <a:ln xmlns:a="http://schemas.openxmlformats.org/drawingml/2006/main" w="9525">
+          <a:ln w="9525">
             <a:solidFill>
               <a:srgbClr val="0C1826"/>
             </a:solidFill>
             <a:prstDash val="solid"/>
           </a:ln>
         </p:spPr>
+        <p:txBody>
+          <a:bodyPr/>
+          <a:lstStyle/>
+          <a:p>
+            <a:endParaRPr lang="en-CN"/>
+          </a:p>
+        </p:txBody>
       </p:sp>
       <p:sp>
         <p:nvSpPr>
           <p:cNvPr id="10" name="cover-footer">
-            <a:extLst xmlns:a="http://schemas.openxmlformats.org/drawingml/2006/main">
+            <a:extLst>
               <a:ext uri="{FF2B5EF4-FFF2-40B4-BE49-F238E27FC236}">
                 <a16:creationId xmlns:a16="http://schemas.microsoft.com/office/drawing/2014/main" id="{4DFB5612-D478-4E5D-B63D-D4A867E94931}"/>
               </a:ext>
             </a:extLst>
           </p:cNvPr>
           <p:cNvSpPr>
-            <a:spLocks xmlns:a="http://schemas.openxmlformats.org/drawingml/2006/main" noGrp="1"/>
-          </p:cNvSpPr>
-          <p:nvPr/>
-        </p:nvSpPr>
-        <p:spPr>
-          <a:xfrm xmlns:a="http://schemas.openxmlformats.org/drawingml/2006/main">
+            <a:spLocks noGrp="1"/>
+          </p:cNvSpPr>
+          <p:nvPr/>
+        </p:nvSpPr>
+        <p:spPr>
+          <a:xfrm>
             <a:off x="400050" y="6019800"/>
             <a:ext cx="4953000" cy="266700"/>
           </a:xfrm>
-          <a:prstGeom xmlns:a="http://schemas.openxmlformats.org/drawingml/2006/main" prst="rect">
-            <a:avLst/>
-          </a:prstGeom>
-        </p:spPr>
-        <p:txBody>
-          <a:bodyPr xmlns:a="http://schemas.openxmlformats.org/drawingml/2006/main" wrap="square" lIns="0" tIns="0" rIns="0" bIns="0" anchor="t">
-            <a:normAutofit fontScale="100000"/>
+          <a:prstGeom prst="rect">
+            <a:avLst/>
+          </a:prstGeom>
+        </p:spPr>
+        <p:txBody>
+          <a:bodyPr wrap="square" lIns="0" tIns="0" rIns="0" bIns="0" anchor="t">
+            <a:normAutofit/>
           </a:bodyPr>
-          <a:lstStyle xmlns:a="http://schemas.openxmlformats.org/drawingml/2006/main"/>
-          <a:p xmlns:a="http://schemas.openxmlformats.org/drawingml/2006/main">
+          <a:lstStyle/>
+          <a:p>
             <a:pPr algn="l">
               <a:buNone/>
               <a:defRPr sz="1200" b="0">
@@ -1947,29 +1589,51 @@
               </a:defRPr>
             </a:pPr>
             <a:r>
-              <a:t>搭把手战队（进程使命）· 泽文 / 邵志航</a:t>
-            </a:r>
+              <a:rPr dirty="0" err="1"/>
+              <a:t>搭把手战队（进程使命</a:t>
+            </a:r>
+            <a:r>
+              <a:rPr dirty="0"/>
+              <a:t>）· </a:t>
+            </a:r>
+            <a:r>
+              <a:rPr dirty="0" err="1"/>
+              <a:t>泽文</a:t>
+            </a:r>
+            <a:r>
+              <a:rPr lang="zh-CN" altLang="en-US" dirty="0"/>
+              <a:t>（刘超）</a:t>
+            </a:r>
+            <a:r>
+              <a:rPr dirty="0"/>
+              <a:t> / </a:t>
+            </a:r>
+            <a:r>
+              <a:rPr dirty="0" err="1"/>
+              <a:t>邵志航</a:t>
+            </a:r>
+            <a:endParaRPr dirty="0"/>
           </a:p>
         </p:txBody>
       </p:sp>
       <p:pic>
         <p:nvPicPr>
-          <p:cNvPr id="26" name=""/>
+          <p:cNvPr id="26" name="Picture 25"/>
           <p:cNvPicPr>
-            <a:picLocks xmlns:a="http://schemas.openxmlformats.org/drawingml/2006/main" noChangeAspect="1"/>
+            <a:picLocks noChangeAspect="1"/>
           </p:cNvPicPr>
           <p:nvPr/>
         </p:nvPicPr>
         <p:blipFill>
-          <a:blip xmlns:r="http://schemas.openxmlformats.org/officeDocument/2006/relationships" xmlns:a="http://schemas.openxmlformats.org/drawingml/2006/main" r:embed="R4e71d57c90494d2f"/>
-          <a:stretch xmlns:a="http://schemas.openxmlformats.org/drawingml/2006/main"/>
+          <a:blip r:embed="rId3"/>
+          <a:stretch/>
         </p:blipFill>
         <p:spPr>
-          <a:xfrm xmlns:a="http://schemas.openxmlformats.org/drawingml/2006/main">
+          <a:xfrm>
             <a:off x="5953125" y="1957369"/>
             <a:ext cx="5838825" cy="2486062"/>
           </a:xfrm>
-          <a:prstGeom xmlns:a="http://schemas.openxmlformats.org/drawingml/2006/main" prst="roundRect">
+          <a:prstGeom prst="roundRect">
             <a:avLst>
               <a:gd name="adj" fmla="val 2308"/>
             </a:avLst>
@@ -1983,17 +1647,21 @@
       </p:ext>
     </p:extLst>
   </p:cSld>
+  <p:clrMapOvr>
+    <a:masterClrMapping/>
+  </p:clrMapOvr>
 </p:sld>
 </file>
 
 <file path=ppt/slides/slide2.xml><?xml version="1.0" encoding="utf-8"?>
-<p:sld xmlns:p="http://schemas.openxmlformats.org/presentationml/2006/main">
+<p:sld xmlns:a="http://schemas.openxmlformats.org/drawingml/2006/main" xmlns:r="http://schemas.openxmlformats.org/officeDocument/2006/relationships" xmlns:p="http://schemas.openxmlformats.org/presentationml/2006/main">
   <p:cSld>
     <p:bg>
       <p:bgPr>
-        <a:solidFill xmlns:a="http://schemas.openxmlformats.org/drawingml/2006/main">
+        <a:solidFill>
           <a:srgbClr val="FFFFFF"/>
         </a:solidFill>
+        <a:effectLst/>
       </p:bgPr>
     </p:bg>
     <p:spTree>
@@ -2003,7 +1671,12 @@
         <p:nvPr/>
       </p:nvGrpSpPr>
       <p:grpSpPr>
-        <a:xfrm xmlns:a="http://schemas.openxmlformats.org/drawingml/2006/main"/>
+        <a:xfrm>
+          <a:off x="0" y="0"/>
+          <a:ext cx="0" cy="0"/>
+          <a:chOff x="0" y="0"/>
+          <a:chExt cx="0" cy="0"/>
+        </a:xfrm>
       </p:grpSpPr>
       <p:cxnSp>
         <p:nvCxnSpPr>
@@ -2012,14 +1685,14 @@
           <p:nvPr/>
         </p:nvCxnSpPr>
         <p:spPr>
-          <a:xfrm xmlns:a="http://schemas.openxmlformats.org/drawingml/2006/main">
+          <a:xfrm>
             <a:off x="400050" y="295275"/>
             <a:ext cx="11391900" cy="9525"/>
           </a:xfrm>
-          <a:prstGeom xmlns:a="http://schemas.openxmlformats.org/drawingml/2006/main" prst="straightConnector1">
-            <a:avLst/>
-          </a:prstGeom>
-          <a:ln xmlns:a="http://schemas.openxmlformats.org/drawingml/2006/main" w="9525">
+          <a:prstGeom prst="straightConnector1">
+            <a:avLst/>
+          </a:prstGeom>
+          <a:ln w="9525">
             <a:solidFill>
               <a:srgbClr val="C7D0DA"/>
             </a:solidFill>
@@ -2030,32 +1703,32 @@
       <p:sp>
         <p:nvSpPr>
           <p:cNvPr id="2" name="page-number">
-            <a:extLst xmlns:a="http://schemas.openxmlformats.org/drawingml/2006/main">
+            <a:extLst>
               <a:ext uri="{FF2B5EF4-FFF2-40B4-BE49-F238E27FC236}">
                 <a16:creationId xmlns:a16="http://schemas.microsoft.com/office/drawing/2014/main" id="{20BD7492-6299-4488-8468-C3F858B6DBC6}"/>
               </a:ext>
             </a:extLst>
           </p:cNvPr>
           <p:cNvSpPr>
-            <a:spLocks xmlns:a="http://schemas.openxmlformats.org/drawingml/2006/main" noGrp="1"/>
-          </p:cNvSpPr>
-          <p:nvPr/>
-        </p:nvSpPr>
-        <p:spPr>
-          <a:xfrm xmlns:a="http://schemas.openxmlformats.org/drawingml/2006/main">
+            <a:spLocks noGrp="1"/>
+          </p:cNvSpPr>
+          <p:nvPr/>
+        </p:nvSpPr>
+        <p:spPr>
+          <a:xfrm>
             <a:off x="11125200" y="6305550"/>
             <a:ext cx="666750" cy="209550"/>
           </a:xfrm>
-          <a:prstGeom xmlns:a="http://schemas.openxmlformats.org/drawingml/2006/main" prst="rect">
-            <a:avLst/>
-          </a:prstGeom>
-        </p:spPr>
-        <p:txBody>
-          <a:bodyPr xmlns:a="http://schemas.openxmlformats.org/drawingml/2006/main" wrap="square" lIns="0" tIns="0" rIns="0" bIns="0" anchor="t">
-            <a:normAutofit fontScale="100000"/>
+          <a:prstGeom prst="rect">
+            <a:avLst/>
+          </a:prstGeom>
+        </p:spPr>
+        <p:txBody>
+          <a:bodyPr wrap="square" lIns="0" tIns="0" rIns="0" bIns="0" anchor="t">
+            <a:normAutofit/>
           </a:bodyPr>
-          <a:lstStyle xmlns:a="http://schemas.openxmlformats.org/drawingml/2006/main"/>
-          <a:p xmlns:a="http://schemas.openxmlformats.org/drawingml/2006/main">
+          <a:lstStyle/>
+          <a:p>
             <a:pPr algn="r">
               <a:buNone/>
               <a:defRPr sz="975" b="0">
@@ -2076,32 +1749,32 @@
       <p:sp>
         <p:nvSpPr>
           <p:cNvPr id="3" name="problem-title">
-            <a:extLst xmlns:a="http://schemas.openxmlformats.org/drawingml/2006/main">
+            <a:extLst>
               <a:ext uri="{FF2B5EF4-FFF2-40B4-BE49-F238E27FC236}">
                 <a16:creationId xmlns:a16="http://schemas.microsoft.com/office/drawing/2014/main" id="{425BC812-08C8-4191-BDF0-B62891EF56A9}"/>
               </a:ext>
             </a:extLst>
           </p:cNvPr>
           <p:cNvSpPr>
-            <a:spLocks xmlns:a="http://schemas.openxmlformats.org/drawingml/2006/main" noGrp="1"/>
-          </p:cNvSpPr>
-          <p:nvPr/>
-        </p:nvSpPr>
-        <p:spPr>
-          <a:xfrm xmlns:a="http://schemas.openxmlformats.org/drawingml/2006/main">
+            <a:spLocks noGrp="1"/>
+          </p:cNvSpPr>
+          <p:nvPr/>
+        </p:nvSpPr>
+        <p:spPr>
+          <a:xfrm>
             <a:off x="400050" y="590550"/>
             <a:ext cx="10287000" cy="552450"/>
           </a:xfrm>
-          <a:prstGeom xmlns:a="http://schemas.openxmlformats.org/drawingml/2006/main" prst="rect">
-            <a:avLst/>
-          </a:prstGeom>
-        </p:spPr>
-        <p:txBody>
-          <a:bodyPr xmlns:a="http://schemas.openxmlformats.org/drawingml/2006/main" wrap="square" lIns="0" tIns="0" rIns="0" bIns="0" anchor="t">
-            <a:normAutofit fontScale="100000"/>
+          <a:prstGeom prst="rect">
+            <a:avLst/>
+          </a:prstGeom>
+        </p:spPr>
+        <p:txBody>
+          <a:bodyPr wrap="square" lIns="0" tIns="0" rIns="0" bIns="0" anchor="t">
+            <a:normAutofit/>
           </a:bodyPr>
-          <a:lstStyle xmlns:a="http://schemas.openxmlformats.org/drawingml/2006/main"/>
-          <a:p xmlns:a="http://schemas.openxmlformats.org/drawingml/2006/main">
+          <a:lstStyle/>
+          <a:p>
             <a:pPr algn="l">
               <a:buNone/>
               <a:defRPr sz="2925" b="1">
@@ -2122,32 +1795,32 @@
       <p:sp>
         <p:nvSpPr>
           <p:cNvPr id="4" name="problem-kicker">
-            <a:extLst xmlns:a="http://schemas.openxmlformats.org/drawingml/2006/main">
+            <a:extLst>
               <a:ext uri="{FF2B5EF4-FFF2-40B4-BE49-F238E27FC236}">
                 <a16:creationId xmlns:a16="http://schemas.microsoft.com/office/drawing/2014/main" id="{E044AAEE-E4C2-4827-A786-F2AFE20214FF}"/>
               </a:ext>
             </a:extLst>
           </p:cNvPr>
           <p:cNvSpPr>
-            <a:spLocks xmlns:a="http://schemas.openxmlformats.org/drawingml/2006/main" noGrp="1"/>
-          </p:cNvSpPr>
-          <p:nvPr/>
-        </p:nvSpPr>
-        <p:spPr>
-          <a:xfrm xmlns:a="http://schemas.openxmlformats.org/drawingml/2006/main">
+            <a:spLocks noGrp="1"/>
+          </p:cNvSpPr>
+          <p:nvPr/>
+        </p:nvSpPr>
+        <p:spPr>
+          <a:xfrm>
             <a:off x="400050" y="1266825"/>
             <a:ext cx="6858000" cy="304800"/>
           </a:xfrm>
-          <a:prstGeom xmlns:a="http://schemas.openxmlformats.org/drawingml/2006/main" prst="rect">
-            <a:avLst/>
-          </a:prstGeom>
-        </p:spPr>
-        <p:txBody>
-          <a:bodyPr xmlns:a="http://schemas.openxmlformats.org/drawingml/2006/main" wrap="square" lIns="0" tIns="0" rIns="0" bIns="0" anchor="t">
-            <a:normAutofit fontScale="100000"/>
+          <a:prstGeom prst="rect">
+            <a:avLst/>
+          </a:prstGeom>
+        </p:spPr>
+        <p:txBody>
+          <a:bodyPr wrap="square" lIns="0" tIns="0" rIns="0" bIns="0" anchor="t">
+            <a:normAutofit/>
           </a:bodyPr>
-          <a:lstStyle xmlns:a="http://schemas.openxmlformats.org/drawingml/2006/main"/>
-          <a:p xmlns:a="http://schemas.openxmlformats.org/drawingml/2006/main">
+          <a:lstStyle/>
+          <a:p>
             <a:pPr algn="l">
               <a:buNone/>
               <a:defRPr sz="1575" b="0">
@@ -2172,14 +1845,14 @@
           <p:nvPr/>
         </p:nvCxnSpPr>
         <p:spPr>
-          <a:xfrm xmlns:a="http://schemas.openxmlformats.org/drawingml/2006/main">
+          <a:xfrm>
             <a:off x="895350" y="2571750"/>
             <a:ext cx="5105400" cy="9525"/>
           </a:xfrm>
-          <a:prstGeom xmlns:a="http://schemas.openxmlformats.org/drawingml/2006/main" prst="straightConnector1">
-            <a:avLst/>
-          </a:prstGeom>
-          <a:ln xmlns:a="http://schemas.openxmlformats.org/drawingml/2006/main" w="19050">
+          <a:prstGeom prst="straightConnector1">
+            <a:avLst/>
+          </a:prstGeom>
+          <a:ln w="19050">
             <a:solidFill>
               <a:srgbClr val="007FCB"/>
             </a:solidFill>
@@ -2194,14 +1867,14 @@
           <p:nvPr/>
         </p:nvCxnSpPr>
         <p:spPr>
-          <a:xfrm xmlns:a="http://schemas.openxmlformats.org/drawingml/2006/main">
+          <a:xfrm>
             <a:off x="2019300" y="2571750"/>
             <a:ext cx="571500" cy="9525"/>
           </a:xfrm>
-          <a:prstGeom xmlns:a="http://schemas.openxmlformats.org/drawingml/2006/main" prst="straightConnector1">
-            <a:avLst/>
-          </a:prstGeom>
-          <a:ln xmlns:a="http://schemas.openxmlformats.org/drawingml/2006/main" w="19050">
+          <a:prstGeom prst="straightConnector1">
+            <a:avLst/>
+          </a:prstGeom>
+          <a:ln w="19050">
             <a:solidFill>
               <a:srgbClr val="007FCB"/>
             </a:solidFill>
@@ -2216,14 +1889,14 @@
           <p:nvPr/>
         </p:nvCxnSpPr>
         <p:spPr>
-          <a:xfrm xmlns:a="http://schemas.openxmlformats.org/drawingml/2006/main">
+          <a:xfrm>
             <a:off x="3714750" y="2571750"/>
             <a:ext cx="571500" cy="9525"/>
           </a:xfrm>
-          <a:prstGeom xmlns:a="http://schemas.openxmlformats.org/drawingml/2006/main" prst="straightConnector1">
-            <a:avLst/>
-          </a:prstGeom>
-          <a:ln xmlns:a="http://schemas.openxmlformats.org/drawingml/2006/main" w="19050">
+          <a:prstGeom prst="straightConnector1">
+            <a:avLst/>
+          </a:prstGeom>
+          <a:ln w="19050">
             <a:solidFill>
               <a:srgbClr val="007FCB"/>
             </a:solidFill>
@@ -2238,14 +1911,14 @@
           <p:nvPr/>
         </p:nvCxnSpPr>
         <p:spPr>
-          <a:xfrm xmlns:a="http://schemas.openxmlformats.org/drawingml/2006/main">
+          <a:xfrm>
             <a:off x="5410200" y="2571750"/>
             <a:ext cx="571500" cy="9525"/>
           </a:xfrm>
-          <a:prstGeom xmlns:a="http://schemas.openxmlformats.org/drawingml/2006/main" prst="straightConnector1">
-            <a:avLst/>
-          </a:prstGeom>
-          <a:ln xmlns:a="http://schemas.openxmlformats.org/drawingml/2006/main" w="19050">
+          <a:prstGeom prst="straightConnector1">
+            <a:avLst/>
+          </a:prstGeom>
+          <a:ln w="19050">
             <a:solidFill>
               <a:srgbClr val="007FCB"/>
             </a:solidFill>
@@ -2256,172 +1929,200 @@
       <p:sp>
         <p:nvSpPr>
           <p:cNvPr id="9" name="flow-1">
-            <a:extLst xmlns:a="http://schemas.openxmlformats.org/drawingml/2006/main">
+            <a:extLst>
               <a:ext uri="{FF2B5EF4-FFF2-40B4-BE49-F238E27FC236}">
                 <a16:creationId xmlns:a16="http://schemas.microsoft.com/office/drawing/2014/main" id="{3B7571DD-8A1C-4405-95BE-421EA26100D7}"/>
               </a:ext>
             </a:extLst>
           </p:cNvPr>
           <p:cNvSpPr>
-            <a:spLocks xmlns:a="http://schemas.openxmlformats.org/drawingml/2006/main" noGrp="1"/>
-          </p:cNvSpPr>
-          <p:nvPr/>
-        </p:nvSpPr>
-        <p:spPr>
-          <a:xfrm xmlns:a="http://schemas.openxmlformats.org/drawingml/2006/main">
+            <a:spLocks noGrp="1"/>
+          </p:cNvSpPr>
+          <p:nvPr/>
+        </p:nvSpPr>
+        <p:spPr>
+          <a:xfrm>
             <a:off x="400050" y="2000250"/>
             <a:ext cx="1333500" cy="1123950"/>
           </a:xfrm>
-          <a:prstGeom xmlns:a="http://schemas.openxmlformats.org/drawingml/2006/main" prst="roundRect">
+          <a:prstGeom prst="roundRect">
             <a:avLst>
               <a:gd name="adj" fmla="val 6780"/>
             </a:avLst>
           </a:prstGeom>
-          <a:solidFill xmlns:a="http://schemas.openxmlformats.org/drawingml/2006/main">
+          <a:solidFill>
             <a:srgbClr val="EAF8FD"/>
           </a:solidFill>
-          <a:ln xmlns:a="http://schemas.openxmlformats.org/drawingml/2006/main" w="9525">
+          <a:ln w="9525">
             <a:solidFill>
               <a:srgbClr val="BCE5F5"/>
             </a:solidFill>
             <a:prstDash val="solid"/>
           </a:ln>
         </p:spPr>
+        <p:txBody>
+          <a:bodyPr/>
+          <a:lstStyle/>
+          <a:p>
+            <a:endParaRPr lang="en-CN"/>
+          </a:p>
+        </p:txBody>
       </p:sp>
       <p:sp>
         <p:nvSpPr>
           <p:cNvPr id="10" name="flow-2">
-            <a:extLst xmlns:a="http://schemas.openxmlformats.org/drawingml/2006/main">
+            <a:extLst>
               <a:ext uri="{FF2B5EF4-FFF2-40B4-BE49-F238E27FC236}">
                 <a16:creationId xmlns:a16="http://schemas.microsoft.com/office/drawing/2014/main" id="{7697FAA4-BD7C-4462-94B1-F003FB1C7DD8}"/>
               </a:ext>
             </a:extLst>
           </p:cNvPr>
           <p:cNvSpPr>
-            <a:spLocks xmlns:a="http://schemas.openxmlformats.org/drawingml/2006/main" noGrp="1"/>
-          </p:cNvSpPr>
-          <p:nvPr/>
-        </p:nvSpPr>
-        <p:spPr>
-          <a:xfrm xmlns:a="http://schemas.openxmlformats.org/drawingml/2006/main">
+            <a:spLocks noGrp="1"/>
+          </p:cNvSpPr>
+          <p:nvPr/>
+        </p:nvSpPr>
+        <p:spPr>
+          <a:xfrm>
             <a:off x="2095500" y="2000250"/>
             <a:ext cx="1333500" cy="1123950"/>
           </a:xfrm>
-          <a:prstGeom xmlns:a="http://schemas.openxmlformats.org/drawingml/2006/main" prst="roundRect">
+          <a:prstGeom prst="roundRect">
             <a:avLst>
               <a:gd name="adj" fmla="val 6780"/>
             </a:avLst>
           </a:prstGeom>
-          <a:solidFill xmlns:a="http://schemas.openxmlformats.org/drawingml/2006/main">
+          <a:solidFill>
             <a:srgbClr val="EAF8FD"/>
           </a:solidFill>
-          <a:ln xmlns:a="http://schemas.openxmlformats.org/drawingml/2006/main" w="9525">
+          <a:ln w="9525">
             <a:solidFill>
               <a:srgbClr val="BCE5F5"/>
             </a:solidFill>
             <a:prstDash val="solid"/>
           </a:ln>
         </p:spPr>
+        <p:txBody>
+          <a:bodyPr/>
+          <a:lstStyle/>
+          <a:p>
+            <a:endParaRPr lang="en-CN"/>
+          </a:p>
+        </p:txBody>
       </p:sp>
       <p:sp>
         <p:nvSpPr>
           <p:cNvPr id="11" name="flow-3">
-            <a:extLst xmlns:a="http://schemas.openxmlformats.org/drawingml/2006/main">
+            <a:extLst>
               <a:ext uri="{FF2B5EF4-FFF2-40B4-BE49-F238E27FC236}">
                 <a16:creationId xmlns:a16="http://schemas.microsoft.com/office/drawing/2014/main" id="{30D8967B-5530-4680-9789-FA16433B2C0E}"/>
               </a:ext>
             </a:extLst>
           </p:cNvPr>
           <p:cNvSpPr>
-            <a:spLocks xmlns:a="http://schemas.openxmlformats.org/drawingml/2006/main" noGrp="1"/>
-          </p:cNvSpPr>
-          <p:nvPr/>
-        </p:nvSpPr>
-        <p:spPr>
-          <a:xfrm xmlns:a="http://schemas.openxmlformats.org/drawingml/2006/main">
+            <a:spLocks noGrp="1"/>
+          </p:cNvSpPr>
+          <p:nvPr/>
+        </p:nvSpPr>
+        <p:spPr>
+          <a:xfrm>
             <a:off x="3790950" y="2000250"/>
             <a:ext cx="1333500" cy="1123950"/>
           </a:xfrm>
-          <a:prstGeom xmlns:a="http://schemas.openxmlformats.org/drawingml/2006/main" prst="roundRect">
+          <a:prstGeom prst="roundRect">
             <a:avLst>
               <a:gd name="adj" fmla="val 6780"/>
             </a:avLst>
           </a:prstGeom>
-          <a:solidFill xmlns:a="http://schemas.openxmlformats.org/drawingml/2006/main">
+          <a:solidFill>
             <a:srgbClr val="EAF8FD"/>
           </a:solidFill>
-          <a:ln xmlns:a="http://schemas.openxmlformats.org/drawingml/2006/main" w="9525">
+          <a:ln w="9525">
             <a:solidFill>
               <a:srgbClr val="BCE5F5"/>
             </a:solidFill>
             <a:prstDash val="solid"/>
           </a:ln>
         </p:spPr>
+        <p:txBody>
+          <a:bodyPr/>
+          <a:lstStyle/>
+          <a:p>
+            <a:endParaRPr lang="en-CN"/>
+          </a:p>
+        </p:txBody>
       </p:sp>
       <p:sp>
         <p:nvSpPr>
           <p:cNvPr id="12" name="flow-4">
-            <a:extLst xmlns:a="http://schemas.openxmlformats.org/drawingml/2006/main">
+            <a:extLst>
               <a:ext uri="{FF2B5EF4-FFF2-40B4-BE49-F238E27FC236}">
                 <a16:creationId xmlns:a16="http://schemas.microsoft.com/office/drawing/2014/main" id="{2AF7C537-BF6D-43C3-A844-D5D1AF28B0DD}"/>
               </a:ext>
             </a:extLst>
           </p:cNvPr>
           <p:cNvSpPr>
-            <a:spLocks xmlns:a="http://schemas.openxmlformats.org/drawingml/2006/main" noGrp="1"/>
-          </p:cNvSpPr>
-          <p:nvPr/>
-        </p:nvSpPr>
-        <p:spPr>
-          <a:xfrm xmlns:a="http://schemas.openxmlformats.org/drawingml/2006/main">
+            <a:spLocks noGrp="1"/>
+          </p:cNvSpPr>
+          <p:nvPr/>
+        </p:nvSpPr>
+        <p:spPr>
+          <a:xfrm>
             <a:off x="5486400" y="2000250"/>
             <a:ext cx="1333500" cy="1123950"/>
           </a:xfrm>
-          <a:prstGeom xmlns:a="http://schemas.openxmlformats.org/drawingml/2006/main" prst="roundRect">
+          <a:prstGeom prst="roundRect">
             <a:avLst>
               <a:gd name="adj" fmla="val 6780"/>
             </a:avLst>
           </a:prstGeom>
-          <a:solidFill xmlns:a="http://schemas.openxmlformats.org/drawingml/2006/main">
+          <a:solidFill>
             <a:srgbClr val="EAF8FD"/>
           </a:solidFill>
-          <a:ln xmlns:a="http://schemas.openxmlformats.org/drawingml/2006/main" w="9525">
+          <a:ln w="9525">
             <a:solidFill>
               <a:srgbClr val="BCE5F5"/>
             </a:solidFill>
             <a:prstDash val="solid"/>
           </a:ln>
         </p:spPr>
+        <p:txBody>
+          <a:bodyPr/>
+          <a:lstStyle/>
+          <a:p>
+            <a:endParaRPr lang="en-CN"/>
+          </a:p>
+        </p:txBody>
       </p:sp>
       <p:sp>
         <p:nvSpPr>
           <p:cNvPr id="13" name="flow-1-text">
-            <a:extLst xmlns:a="http://schemas.openxmlformats.org/drawingml/2006/main">
+            <a:extLst>
               <a:ext uri="{FF2B5EF4-FFF2-40B4-BE49-F238E27FC236}">
                 <a16:creationId xmlns:a16="http://schemas.microsoft.com/office/drawing/2014/main" id="{6ABE49A2-AA37-487F-8EF6-AAA40B446F1F}"/>
               </a:ext>
             </a:extLst>
           </p:cNvPr>
           <p:cNvSpPr>
-            <a:spLocks xmlns:a="http://schemas.openxmlformats.org/drawingml/2006/main" noGrp="1"/>
-          </p:cNvSpPr>
-          <p:nvPr/>
-        </p:nvSpPr>
-        <p:spPr>
-          <a:xfrm xmlns:a="http://schemas.openxmlformats.org/drawingml/2006/main">
+            <a:spLocks noGrp="1"/>
+          </p:cNvSpPr>
+          <p:nvPr/>
+        </p:nvSpPr>
+        <p:spPr>
+          <a:xfrm>
             <a:off x="590550" y="2209800"/>
             <a:ext cx="952500" cy="666750"/>
           </a:xfrm>
-          <a:prstGeom xmlns:a="http://schemas.openxmlformats.org/drawingml/2006/main" prst="rect">
-            <a:avLst/>
-          </a:prstGeom>
-        </p:spPr>
-        <p:txBody>
-          <a:bodyPr xmlns:a="http://schemas.openxmlformats.org/drawingml/2006/main" wrap="square" lIns="0" tIns="0" rIns="0" bIns="0" anchor="t">
-            <a:normAutofit fontScale="100000"/>
+          <a:prstGeom prst="rect">
+            <a:avLst/>
+          </a:prstGeom>
+        </p:spPr>
+        <p:txBody>
+          <a:bodyPr wrap="square" lIns="0" tIns="0" rIns="0" bIns="0" anchor="t">
+            <a:normAutofit/>
           </a:bodyPr>
-          <a:lstStyle xmlns:a="http://schemas.openxmlformats.org/drawingml/2006/main"/>
-          <a:p xmlns:a="http://schemas.openxmlformats.org/drawingml/2006/main">
+          <a:lstStyle/>
+          <a:p>
             <a:pPr algn="l">
               <a:buNone/>
               <a:defRPr sz="1275" b="1">
@@ -2443,32 +2144,32 @@
       <p:sp>
         <p:nvSpPr>
           <p:cNvPr id="14" name="flow-2-text">
-            <a:extLst xmlns:a="http://schemas.openxmlformats.org/drawingml/2006/main">
+            <a:extLst>
               <a:ext uri="{FF2B5EF4-FFF2-40B4-BE49-F238E27FC236}">
                 <a16:creationId xmlns:a16="http://schemas.microsoft.com/office/drawing/2014/main" id="{37A4D4A2-DA57-45FE-B59E-71D95EC9D207}"/>
               </a:ext>
             </a:extLst>
           </p:cNvPr>
           <p:cNvSpPr>
-            <a:spLocks xmlns:a="http://schemas.openxmlformats.org/drawingml/2006/main" noGrp="1"/>
-          </p:cNvSpPr>
-          <p:nvPr/>
-        </p:nvSpPr>
-        <p:spPr>
-          <a:xfrm xmlns:a="http://schemas.openxmlformats.org/drawingml/2006/main">
+            <a:spLocks noGrp="1"/>
+          </p:cNvSpPr>
+          <p:nvPr/>
+        </p:nvSpPr>
+        <p:spPr>
+          <a:xfrm>
             <a:off x="2286000" y="2209800"/>
             <a:ext cx="952500" cy="666750"/>
           </a:xfrm>
-          <a:prstGeom xmlns:a="http://schemas.openxmlformats.org/drawingml/2006/main" prst="rect">
-            <a:avLst/>
-          </a:prstGeom>
-        </p:spPr>
-        <p:txBody>
-          <a:bodyPr xmlns:a="http://schemas.openxmlformats.org/drawingml/2006/main" wrap="square" lIns="0" tIns="0" rIns="0" bIns="0" anchor="t">
-            <a:normAutofit fontScale="100000"/>
+          <a:prstGeom prst="rect">
+            <a:avLst/>
+          </a:prstGeom>
+        </p:spPr>
+        <p:txBody>
+          <a:bodyPr wrap="square" lIns="0" tIns="0" rIns="0" bIns="0" anchor="t">
+            <a:normAutofit/>
           </a:bodyPr>
-          <a:lstStyle xmlns:a="http://schemas.openxmlformats.org/drawingml/2006/main"/>
-          <a:p xmlns:a="http://schemas.openxmlformats.org/drawingml/2006/main">
+          <a:lstStyle/>
+          <a:p>
             <a:pPr algn="l">
               <a:buNone/>
               <a:defRPr sz="1425" b="1">
@@ -2490,32 +2191,32 @@
       <p:sp>
         <p:nvSpPr>
           <p:cNvPr id="15" name="flow-3-text">
-            <a:extLst xmlns:a="http://schemas.openxmlformats.org/drawingml/2006/main">
+            <a:extLst>
               <a:ext uri="{FF2B5EF4-FFF2-40B4-BE49-F238E27FC236}">
                 <a16:creationId xmlns:a16="http://schemas.microsoft.com/office/drawing/2014/main" id="{321D54B3-D066-40B6-9E12-3040C08847B7}"/>
               </a:ext>
             </a:extLst>
           </p:cNvPr>
           <p:cNvSpPr>
-            <a:spLocks xmlns:a="http://schemas.openxmlformats.org/drawingml/2006/main" noGrp="1"/>
-          </p:cNvSpPr>
-          <p:nvPr/>
-        </p:nvSpPr>
-        <p:spPr>
-          <a:xfrm xmlns:a="http://schemas.openxmlformats.org/drawingml/2006/main">
+            <a:spLocks noGrp="1"/>
+          </p:cNvSpPr>
+          <p:nvPr/>
+        </p:nvSpPr>
+        <p:spPr>
+          <a:xfrm>
             <a:off x="3981450" y="2209800"/>
             <a:ext cx="952500" cy="666750"/>
           </a:xfrm>
-          <a:prstGeom xmlns:a="http://schemas.openxmlformats.org/drawingml/2006/main" prst="rect">
-            <a:avLst/>
-          </a:prstGeom>
-        </p:spPr>
-        <p:txBody>
-          <a:bodyPr xmlns:a="http://schemas.openxmlformats.org/drawingml/2006/main" wrap="square" lIns="0" tIns="0" rIns="0" bIns="0" anchor="t">
-            <a:normAutofit fontScale="100000"/>
+          <a:prstGeom prst="rect">
+            <a:avLst/>
+          </a:prstGeom>
+        </p:spPr>
+        <p:txBody>
+          <a:bodyPr wrap="square" lIns="0" tIns="0" rIns="0" bIns="0" anchor="t">
+            <a:normAutofit/>
           </a:bodyPr>
-          <a:lstStyle xmlns:a="http://schemas.openxmlformats.org/drawingml/2006/main"/>
-          <a:p xmlns:a="http://schemas.openxmlformats.org/drawingml/2006/main">
+          <a:lstStyle/>
+          <a:p>
             <a:pPr algn="l">
               <a:buNone/>
               <a:defRPr sz="1425" b="1">
@@ -2537,32 +2238,32 @@
       <p:sp>
         <p:nvSpPr>
           <p:cNvPr id="16" name="flow-4-text">
-            <a:extLst xmlns:a="http://schemas.openxmlformats.org/drawingml/2006/main">
+            <a:extLst>
               <a:ext uri="{FF2B5EF4-FFF2-40B4-BE49-F238E27FC236}">
                 <a16:creationId xmlns:a16="http://schemas.microsoft.com/office/drawing/2014/main" id="{46504CD0-C094-49B7-94D3-19459D3B6B80}"/>
               </a:ext>
             </a:extLst>
           </p:cNvPr>
           <p:cNvSpPr>
-            <a:spLocks xmlns:a="http://schemas.openxmlformats.org/drawingml/2006/main" noGrp="1"/>
-          </p:cNvSpPr>
-          <p:nvPr/>
-        </p:nvSpPr>
-        <p:spPr>
-          <a:xfrm xmlns:a="http://schemas.openxmlformats.org/drawingml/2006/main">
+            <a:spLocks noGrp="1"/>
+          </p:cNvSpPr>
+          <p:nvPr/>
+        </p:nvSpPr>
+        <p:spPr>
+          <a:xfrm>
             <a:off x="5676900" y="2209800"/>
             <a:ext cx="952500" cy="666750"/>
           </a:xfrm>
-          <a:prstGeom xmlns:a="http://schemas.openxmlformats.org/drawingml/2006/main" prst="rect">
-            <a:avLst/>
-          </a:prstGeom>
-        </p:spPr>
-        <p:txBody>
-          <a:bodyPr xmlns:a="http://schemas.openxmlformats.org/drawingml/2006/main" wrap="square" lIns="0" tIns="0" rIns="0" bIns="0" anchor="t">
-            <a:normAutofit fontScale="100000"/>
+          <a:prstGeom prst="rect">
+            <a:avLst/>
+          </a:prstGeom>
+        </p:spPr>
+        <p:txBody>
+          <a:bodyPr wrap="square" lIns="0" tIns="0" rIns="0" bIns="0" anchor="t">
+            <a:normAutofit/>
           </a:bodyPr>
-          <a:lstStyle xmlns:a="http://schemas.openxmlformats.org/drawingml/2006/main"/>
-          <a:p xmlns:a="http://schemas.openxmlformats.org/drawingml/2006/main">
+          <a:lstStyle/>
+          <a:p>
             <a:pPr algn="l">
               <a:buNone/>
               <a:defRPr sz="1425" b="1">
@@ -2584,67 +2285,74 @@
       <p:sp>
         <p:nvSpPr>
           <p:cNvPr id="17" name="attention-panel">
-            <a:extLst xmlns:a="http://schemas.openxmlformats.org/drawingml/2006/main">
+            <a:extLst>
               <a:ext uri="{FF2B5EF4-FFF2-40B4-BE49-F238E27FC236}">
                 <a16:creationId xmlns:a16="http://schemas.microsoft.com/office/drawing/2014/main" id="{D5EA5D3B-F7E7-4B6D-A0DD-354218E1A9E2}"/>
               </a:ext>
             </a:extLst>
           </p:cNvPr>
           <p:cNvSpPr>
-            <a:spLocks xmlns:a="http://schemas.openxmlformats.org/drawingml/2006/main" noGrp="1"/>
-          </p:cNvSpPr>
-          <p:nvPr/>
-        </p:nvSpPr>
-        <p:spPr>
-          <a:xfrm xmlns:a="http://schemas.openxmlformats.org/drawingml/2006/main">
+            <a:spLocks noGrp="1"/>
+          </p:cNvSpPr>
+          <p:nvPr/>
+        </p:nvSpPr>
+        <p:spPr>
+          <a:xfrm>
             <a:off x="7353300" y="1809750"/>
             <a:ext cx="4438650" cy="3352800"/>
           </a:xfrm>
-          <a:prstGeom xmlns:a="http://schemas.openxmlformats.org/drawingml/2006/main" prst="roundRect">
+          <a:prstGeom prst="roundRect">
             <a:avLst>
               <a:gd name="adj" fmla="val 2273"/>
             </a:avLst>
           </a:prstGeom>
-          <a:solidFill xmlns:a="http://schemas.openxmlformats.org/drawingml/2006/main">
+          <a:solidFill>
             <a:srgbClr val="F1F4F7"/>
           </a:solidFill>
-          <a:ln xmlns:a="http://schemas.openxmlformats.org/drawingml/2006/main" w="9525">
+          <a:ln w="9525">
             <a:solidFill>
               <a:srgbClr val="F1F4F7"/>
             </a:solidFill>
             <a:prstDash val="solid"/>
           </a:ln>
         </p:spPr>
+        <p:txBody>
+          <a:bodyPr/>
+          <a:lstStyle/>
+          <a:p>
+            <a:endParaRPr lang="en-CN"/>
+          </a:p>
+        </p:txBody>
       </p:sp>
       <p:sp>
         <p:nvSpPr>
           <p:cNvPr id="18" name="attention-title">
-            <a:extLst xmlns:a="http://schemas.openxmlformats.org/drawingml/2006/main">
+            <a:extLst>
               <a:ext uri="{FF2B5EF4-FFF2-40B4-BE49-F238E27FC236}">
                 <a16:creationId xmlns:a16="http://schemas.microsoft.com/office/drawing/2014/main" id="{9D67021C-E5C1-4180-B906-F58E540D1CB3}"/>
               </a:ext>
             </a:extLst>
           </p:cNvPr>
           <p:cNvSpPr>
-            <a:spLocks xmlns:a="http://schemas.openxmlformats.org/drawingml/2006/main" noGrp="1"/>
-          </p:cNvSpPr>
-          <p:nvPr/>
-        </p:nvSpPr>
-        <p:spPr>
-          <a:xfrm xmlns:a="http://schemas.openxmlformats.org/drawingml/2006/main">
+            <a:spLocks noGrp="1"/>
+          </p:cNvSpPr>
+          <p:nvPr/>
+        </p:nvSpPr>
+        <p:spPr>
+          <a:xfrm>
             <a:off x="7658100" y="2114550"/>
             <a:ext cx="3524250" cy="400050"/>
           </a:xfrm>
-          <a:prstGeom xmlns:a="http://schemas.openxmlformats.org/drawingml/2006/main" prst="rect">
-            <a:avLst/>
-          </a:prstGeom>
-        </p:spPr>
-        <p:txBody>
-          <a:bodyPr xmlns:a="http://schemas.openxmlformats.org/drawingml/2006/main" wrap="square" lIns="0" tIns="0" rIns="0" bIns="0" anchor="t">
-            <a:normAutofit fontScale="100000"/>
+          <a:prstGeom prst="rect">
+            <a:avLst/>
+          </a:prstGeom>
+        </p:spPr>
+        <p:txBody>
+          <a:bodyPr wrap="square" lIns="0" tIns="0" rIns="0" bIns="0" anchor="t">
+            <a:normAutofit/>
           </a:bodyPr>
-          <a:lstStyle xmlns:a="http://schemas.openxmlformats.org/drawingml/2006/main"/>
-          <a:p xmlns:a="http://schemas.openxmlformats.org/drawingml/2006/main">
+          <a:lstStyle/>
+          <a:p>
             <a:pPr algn="l">
               <a:buNone/>
               <a:defRPr sz="1875" b="1">
@@ -2665,32 +2373,32 @@
       <p:sp>
         <p:nvSpPr>
           <p:cNvPr id="19" name="attention-1">
-            <a:extLst xmlns:a="http://schemas.openxmlformats.org/drawingml/2006/main">
+            <a:extLst>
               <a:ext uri="{FF2B5EF4-FFF2-40B4-BE49-F238E27FC236}">
                 <a16:creationId xmlns:a16="http://schemas.microsoft.com/office/drawing/2014/main" id="{0DD21A8A-7F28-465B-814B-5C44606AF92A}"/>
               </a:ext>
             </a:extLst>
           </p:cNvPr>
           <p:cNvSpPr>
-            <a:spLocks xmlns:a="http://schemas.openxmlformats.org/drawingml/2006/main" noGrp="1"/>
-          </p:cNvSpPr>
-          <p:nvPr/>
-        </p:nvSpPr>
-        <p:spPr>
-          <a:xfrm xmlns:a="http://schemas.openxmlformats.org/drawingml/2006/main">
+            <a:spLocks noGrp="1"/>
+          </p:cNvSpPr>
+          <p:nvPr/>
+        </p:nvSpPr>
+        <p:spPr>
+          <a:xfrm>
             <a:off x="7658100" y="2781300"/>
             <a:ext cx="3676650" cy="361950"/>
           </a:xfrm>
-          <a:prstGeom xmlns:a="http://schemas.openxmlformats.org/drawingml/2006/main" prst="rect">
-            <a:avLst/>
-          </a:prstGeom>
-        </p:spPr>
-        <p:txBody>
-          <a:bodyPr xmlns:a="http://schemas.openxmlformats.org/drawingml/2006/main" wrap="square" lIns="0" tIns="0" rIns="0" bIns="0" anchor="t">
-            <a:normAutofit fontScale="100000"/>
+          <a:prstGeom prst="rect">
+            <a:avLst/>
+          </a:prstGeom>
+        </p:spPr>
+        <p:txBody>
+          <a:bodyPr wrap="square" lIns="0" tIns="0" rIns="0" bIns="0" anchor="t">
+            <a:normAutofit/>
           </a:bodyPr>
-          <a:lstStyle xmlns:a="http://schemas.openxmlformats.org/drawingml/2006/main"/>
-          <a:p xmlns:a="http://schemas.openxmlformats.org/drawingml/2006/main">
+          <a:lstStyle/>
+          <a:p>
             <a:pPr algn="l">
               <a:buNone/>
               <a:defRPr sz="1500" b="0">
@@ -2711,32 +2419,32 @@
       <p:sp>
         <p:nvSpPr>
           <p:cNvPr id="20" name="attention-2">
-            <a:extLst xmlns:a="http://schemas.openxmlformats.org/drawingml/2006/main">
+            <a:extLst>
               <a:ext uri="{FF2B5EF4-FFF2-40B4-BE49-F238E27FC236}">
                 <a16:creationId xmlns:a16="http://schemas.microsoft.com/office/drawing/2014/main" id="{03990BDC-B12B-4D78-913A-BC97170B6E47}"/>
               </a:ext>
             </a:extLst>
           </p:cNvPr>
           <p:cNvSpPr>
-            <a:spLocks xmlns:a="http://schemas.openxmlformats.org/drawingml/2006/main" noGrp="1"/>
-          </p:cNvSpPr>
-          <p:nvPr/>
-        </p:nvSpPr>
-        <p:spPr>
-          <a:xfrm xmlns:a="http://schemas.openxmlformats.org/drawingml/2006/main">
+            <a:spLocks noGrp="1"/>
+          </p:cNvSpPr>
+          <p:nvPr/>
+        </p:nvSpPr>
+        <p:spPr>
+          <a:xfrm>
             <a:off x="7658100" y="3390900"/>
             <a:ext cx="3676650" cy="361950"/>
           </a:xfrm>
-          <a:prstGeom xmlns:a="http://schemas.openxmlformats.org/drawingml/2006/main" prst="rect">
-            <a:avLst/>
-          </a:prstGeom>
-        </p:spPr>
-        <p:txBody>
-          <a:bodyPr xmlns:a="http://schemas.openxmlformats.org/drawingml/2006/main" wrap="square" lIns="0" tIns="0" rIns="0" bIns="0" anchor="t">
+          <a:prstGeom prst="rect">
+            <a:avLst/>
+          </a:prstGeom>
+        </p:spPr>
+        <p:txBody>
+          <a:bodyPr wrap="square" lIns="0" tIns="0" rIns="0" bIns="0" anchor="t">
             <a:normAutofit fontScale="96477"/>
           </a:bodyPr>
-          <a:lstStyle xmlns:a="http://schemas.openxmlformats.org/drawingml/2006/main"/>
-          <a:p xmlns:a="http://schemas.openxmlformats.org/drawingml/2006/main">
+          <a:lstStyle/>
+          <a:p>
             <a:pPr algn="l">
               <a:buNone/>
               <a:defRPr sz="1500" b="0">
@@ -2757,32 +2465,32 @@
       <p:sp>
         <p:nvSpPr>
           <p:cNvPr id="21" name="attention-3">
-            <a:extLst xmlns:a="http://schemas.openxmlformats.org/drawingml/2006/main">
+            <a:extLst>
               <a:ext uri="{FF2B5EF4-FFF2-40B4-BE49-F238E27FC236}">
                 <a16:creationId xmlns:a16="http://schemas.microsoft.com/office/drawing/2014/main" id="{BABB92E0-DF28-4E04-8336-AC7D04EB06D4}"/>
               </a:ext>
             </a:extLst>
           </p:cNvPr>
           <p:cNvSpPr>
-            <a:spLocks xmlns:a="http://schemas.openxmlformats.org/drawingml/2006/main" noGrp="1"/>
-          </p:cNvSpPr>
-          <p:nvPr/>
-        </p:nvSpPr>
-        <p:spPr>
-          <a:xfrm xmlns:a="http://schemas.openxmlformats.org/drawingml/2006/main">
+            <a:spLocks noGrp="1"/>
+          </p:cNvSpPr>
+          <p:nvPr/>
+        </p:nvSpPr>
+        <p:spPr>
+          <a:xfrm>
             <a:off x="7658100" y="4000500"/>
             <a:ext cx="3676650" cy="361950"/>
           </a:xfrm>
-          <a:prstGeom xmlns:a="http://schemas.openxmlformats.org/drawingml/2006/main" prst="rect">
-            <a:avLst/>
-          </a:prstGeom>
-        </p:spPr>
-        <p:txBody>
-          <a:bodyPr xmlns:a="http://schemas.openxmlformats.org/drawingml/2006/main" wrap="square" lIns="0" tIns="0" rIns="0" bIns="0" anchor="t">
-            <a:normAutofit fontScale="100000"/>
+          <a:prstGeom prst="rect">
+            <a:avLst/>
+          </a:prstGeom>
+        </p:spPr>
+        <p:txBody>
+          <a:bodyPr wrap="square" lIns="0" tIns="0" rIns="0" bIns="0" anchor="t">
+            <a:normAutofit/>
           </a:bodyPr>
-          <a:lstStyle xmlns:a="http://schemas.openxmlformats.org/drawingml/2006/main"/>
-          <a:p xmlns:a="http://schemas.openxmlformats.org/drawingml/2006/main">
+          <a:lstStyle/>
+          <a:p>
             <a:pPr algn="l">
               <a:buNone/>
               <a:defRPr sz="1500" b="0">
@@ -2803,32 +2511,32 @@
       <p:sp>
         <p:nvSpPr>
           <p:cNvPr id="22" name="problem-bottom">
-            <a:extLst xmlns:a="http://schemas.openxmlformats.org/drawingml/2006/main">
+            <a:extLst>
               <a:ext uri="{FF2B5EF4-FFF2-40B4-BE49-F238E27FC236}">
                 <a16:creationId xmlns:a16="http://schemas.microsoft.com/office/drawing/2014/main" id="{274F9EA2-BF41-4100-AE20-2D5EBB9406F8}"/>
               </a:ext>
             </a:extLst>
           </p:cNvPr>
           <p:cNvSpPr>
-            <a:spLocks xmlns:a="http://schemas.openxmlformats.org/drawingml/2006/main" noGrp="1"/>
-          </p:cNvSpPr>
-          <p:nvPr/>
-        </p:nvSpPr>
-        <p:spPr>
-          <a:xfrm xmlns:a="http://schemas.openxmlformats.org/drawingml/2006/main">
+            <a:spLocks noGrp="1"/>
+          </p:cNvSpPr>
+          <p:nvPr/>
+        </p:nvSpPr>
+        <p:spPr>
+          <a:xfrm>
             <a:off x="400050" y="5619750"/>
             <a:ext cx="10001250" cy="400050"/>
           </a:xfrm>
-          <a:prstGeom xmlns:a="http://schemas.openxmlformats.org/drawingml/2006/main" prst="rect">
-            <a:avLst/>
-          </a:prstGeom>
-        </p:spPr>
-        <p:txBody>
-          <a:bodyPr xmlns:a="http://schemas.openxmlformats.org/drawingml/2006/main" wrap="square" lIns="0" tIns="0" rIns="0" bIns="0" anchor="t">
-            <a:normAutofit fontScale="100000"/>
+          <a:prstGeom prst="rect">
+            <a:avLst/>
+          </a:prstGeom>
+        </p:spPr>
+        <p:txBody>
+          <a:bodyPr wrap="square" lIns="0" tIns="0" rIns="0" bIns="0" anchor="t">
+            <a:normAutofit/>
           </a:bodyPr>
-          <a:lstStyle xmlns:a="http://schemas.openxmlformats.org/drawingml/2006/main"/>
-          <a:p xmlns:a="http://schemas.openxmlformats.org/drawingml/2006/main">
+          <a:lstStyle/>
+          <a:p>
             <a:pPr algn="l">
               <a:buNone/>
               <a:defRPr sz="2100" b="1">
@@ -2853,17 +2561,21 @@
       </p:ext>
     </p:extLst>
   </p:cSld>
+  <p:clrMapOvr>
+    <a:masterClrMapping/>
+  </p:clrMapOvr>
 </p:sld>
 </file>
 
 <file path=ppt/slides/slide3.xml><?xml version="1.0" encoding="utf-8"?>
-<p:sld xmlns:p="http://schemas.openxmlformats.org/presentationml/2006/main">
+<p:sld xmlns:a="http://schemas.openxmlformats.org/drawingml/2006/main" xmlns:r="http://schemas.openxmlformats.org/officeDocument/2006/relationships" xmlns:p="http://schemas.openxmlformats.org/presentationml/2006/main">
   <p:cSld>
     <p:bg>
       <p:bgPr>
-        <a:solidFill xmlns:a="http://schemas.openxmlformats.org/drawingml/2006/main">
+        <a:solidFill>
           <a:srgbClr val="FFFFFF"/>
         </a:solidFill>
+        <a:effectLst/>
       </p:bgPr>
     </p:bg>
     <p:spTree>
@@ -2873,7 +2585,12 @@
         <p:nvPr/>
       </p:nvGrpSpPr>
       <p:grpSpPr>
-        <a:xfrm xmlns:a="http://schemas.openxmlformats.org/drawingml/2006/main"/>
+        <a:xfrm>
+          <a:off x="0" y="0"/>
+          <a:ext cx="0" cy="0"/>
+          <a:chOff x="0" y="0"/>
+          <a:chExt cx="0" cy="0"/>
+        </a:xfrm>
       </p:grpSpPr>
       <p:cxnSp>
         <p:nvCxnSpPr>
@@ -2882,14 +2599,14 @@
           <p:nvPr/>
         </p:nvCxnSpPr>
         <p:spPr>
-          <a:xfrm xmlns:a="http://schemas.openxmlformats.org/drawingml/2006/main">
+          <a:xfrm>
             <a:off x="400050" y="295275"/>
             <a:ext cx="11391900" cy="9525"/>
           </a:xfrm>
-          <a:prstGeom xmlns:a="http://schemas.openxmlformats.org/drawingml/2006/main" prst="straightConnector1">
-            <a:avLst/>
-          </a:prstGeom>
-          <a:ln xmlns:a="http://schemas.openxmlformats.org/drawingml/2006/main" w="9525">
+          <a:prstGeom prst="straightConnector1">
+            <a:avLst/>
+          </a:prstGeom>
+          <a:ln w="9525">
             <a:solidFill>
               <a:srgbClr val="C7D0DA"/>
             </a:solidFill>
@@ -2900,32 +2617,32 @@
       <p:sp>
         <p:nvSpPr>
           <p:cNvPr id="2" name="page-number">
-            <a:extLst xmlns:a="http://schemas.openxmlformats.org/drawingml/2006/main">
+            <a:extLst>
               <a:ext uri="{FF2B5EF4-FFF2-40B4-BE49-F238E27FC236}">
                 <a16:creationId xmlns:a16="http://schemas.microsoft.com/office/drawing/2014/main" id="{CA876E2E-431A-4C3C-91C6-94FF17A72643}"/>
               </a:ext>
             </a:extLst>
           </p:cNvPr>
           <p:cNvSpPr>
-            <a:spLocks xmlns:a="http://schemas.openxmlformats.org/drawingml/2006/main" noGrp="1"/>
-          </p:cNvSpPr>
-          <p:nvPr/>
-        </p:nvSpPr>
-        <p:spPr>
-          <a:xfrm xmlns:a="http://schemas.openxmlformats.org/drawingml/2006/main">
+            <a:spLocks noGrp="1"/>
+          </p:cNvSpPr>
+          <p:nvPr/>
+        </p:nvSpPr>
+        <p:spPr>
+          <a:xfrm>
             <a:off x="11125200" y="6305550"/>
             <a:ext cx="666750" cy="209550"/>
           </a:xfrm>
-          <a:prstGeom xmlns:a="http://schemas.openxmlformats.org/drawingml/2006/main" prst="rect">
-            <a:avLst/>
-          </a:prstGeom>
-        </p:spPr>
-        <p:txBody>
-          <a:bodyPr xmlns:a="http://schemas.openxmlformats.org/drawingml/2006/main" wrap="square" lIns="0" tIns="0" rIns="0" bIns="0" anchor="t">
-            <a:normAutofit fontScale="100000"/>
+          <a:prstGeom prst="rect">
+            <a:avLst/>
+          </a:prstGeom>
+        </p:spPr>
+        <p:txBody>
+          <a:bodyPr wrap="square" lIns="0" tIns="0" rIns="0" bIns="0" anchor="t">
+            <a:normAutofit/>
           </a:bodyPr>
-          <a:lstStyle xmlns:a="http://schemas.openxmlformats.org/drawingml/2006/main"/>
-          <a:p xmlns:a="http://schemas.openxmlformats.org/drawingml/2006/main">
+          <a:lstStyle/>
+          <a:p>
             <a:pPr algn="r">
               <a:buNone/>
               <a:defRPr sz="975" b="0">
@@ -2946,32 +2663,32 @@
       <p:sp>
         <p:nvSpPr>
           <p:cNvPr id="3" name="strategy-title">
-            <a:extLst xmlns:a="http://schemas.openxmlformats.org/drawingml/2006/main">
+            <a:extLst>
               <a:ext uri="{FF2B5EF4-FFF2-40B4-BE49-F238E27FC236}">
                 <a16:creationId xmlns:a16="http://schemas.microsoft.com/office/drawing/2014/main" id="{68E0C996-47C1-434B-B77F-3593D0A47A49}"/>
               </a:ext>
             </a:extLst>
           </p:cNvPr>
           <p:cNvSpPr>
-            <a:spLocks xmlns:a="http://schemas.openxmlformats.org/drawingml/2006/main" noGrp="1"/>
-          </p:cNvSpPr>
-          <p:nvPr/>
-        </p:nvSpPr>
-        <p:spPr>
-          <a:xfrm xmlns:a="http://schemas.openxmlformats.org/drawingml/2006/main">
+            <a:spLocks noGrp="1"/>
+          </p:cNvSpPr>
+          <p:nvPr/>
+        </p:nvSpPr>
+        <p:spPr>
+          <a:xfrm>
             <a:off x="400050" y="590550"/>
             <a:ext cx="10287000" cy="552450"/>
           </a:xfrm>
-          <a:prstGeom xmlns:a="http://schemas.openxmlformats.org/drawingml/2006/main" prst="rect">
-            <a:avLst/>
-          </a:prstGeom>
-        </p:spPr>
-        <p:txBody>
-          <a:bodyPr xmlns:a="http://schemas.openxmlformats.org/drawingml/2006/main" wrap="square" lIns="0" tIns="0" rIns="0" bIns="0" anchor="t">
-            <a:normAutofit fontScale="100000"/>
+          <a:prstGeom prst="rect">
+            <a:avLst/>
+          </a:prstGeom>
+        </p:spPr>
+        <p:txBody>
+          <a:bodyPr wrap="square" lIns="0" tIns="0" rIns="0" bIns="0" anchor="t">
+            <a:normAutofit/>
           </a:bodyPr>
-          <a:lstStyle xmlns:a="http://schemas.openxmlformats.org/drawingml/2006/main"/>
-          <a:p xmlns:a="http://schemas.openxmlformats.org/drawingml/2006/main">
+          <a:lstStyle/>
+          <a:p>
             <a:pPr algn="l">
               <a:buNone/>
               <a:defRPr sz="2925" b="1">
@@ -2992,32 +2709,32 @@
       <p:sp>
         <p:nvSpPr>
           <p:cNvPr id="4" name="strategy-subtitle">
-            <a:extLst xmlns:a="http://schemas.openxmlformats.org/drawingml/2006/main">
+            <a:extLst>
               <a:ext uri="{FF2B5EF4-FFF2-40B4-BE49-F238E27FC236}">
                 <a16:creationId xmlns:a16="http://schemas.microsoft.com/office/drawing/2014/main" id="{862E0EEE-9876-48F3-BD8A-A4C4F4D9B02E}"/>
               </a:ext>
             </a:extLst>
           </p:cNvPr>
           <p:cNvSpPr>
-            <a:spLocks xmlns:a="http://schemas.openxmlformats.org/drawingml/2006/main" noGrp="1"/>
-          </p:cNvSpPr>
-          <p:nvPr/>
-        </p:nvSpPr>
-        <p:spPr>
-          <a:xfrm xmlns:a="http://schemas.openxmlformats.org/drawingml/2006/main">
+            <a:spLocks noGrp="1"/>
+          </p:cNvSpPr>
+          <p:nvPr/>
+        </p:nvSpPr>
+        <p:spPr>
+          <a:xfrm>
             <a:off x="400050" y="1266825"/>
             <a:ext cx="8572500" cy="304800"/>
           </a:xfrm>
-          <a:prstGeom xmlns:a="http://schemas.openxmlformats.org/drawingml/2006/main" prst="rect">
-            <a:avLst/>
-          </a:prstGeom>
-        </p:spPr>
-        <p:txBody>
-          <a:bodyPr xmlns:a="http://schemas.openxmlformats.org/drawingml/2006/main" wrap="square" lIns="0" tIns="0" rIns="0" bIns="0" anchor="t">
-            <a:normAutofit fontScale="100000"/>
+          <a:prstGeom prst="rect">
+            <a:avLst/>
+          </a:prstGeom>
+        </p:spPr>
+        <p:txBody>
+          <a:bodyPr wrap="square" lIns="0" tIns="0" rIns="0" bIns="0" anchor="t">
+            <a:normAutofit/>
           </a:bodyPr>
-          <a:lstStyle xmlns:a="http://schemas.openxmlformats.org/drawingml/2006/main"/>
-          <a:p xmlns:a="http://schemas.openxmlformats.org/drawingml/2006/main">
+          <a:lstStyle/>
+          <a:p>
             <a:pPr algn="l">
               <a:buNone/>
               <a:defRPr sz="1575" b="0">
@@ -3042,14 +2759,14 @@
           <p:nvPr/>
         </p:nvCxnSpPr>
         <p:spPr>
-          <a:xfrm xmlns:a="http://schemas.openxmlformats.org/drawingml/2006/main">
+          <a:xfrm>
             <a:off x="1066800" y="3238500"/>
             <a:ext cx="9429750" cy="9525"/>
           </a:xfrm>
-          <a:prstGeom xmlns:a="http://schemas.openxmlformats.org/drawingml/2006/main" prst="straightConnector1">
-            <a:avLst/>
-          </a:prstGeom>
-          <a:ln xmlns:a="http://schemas.openxmlformats.org/drawingml/2006/main" w="28575">
+          <a:prstGeom prst="straightConnector1">
+            <a:avLst/>
+          </a:prstGeom>
+          <a:ln w="28575">
             <a:solidFill>
               <a:srgbClr val="007FCB"/>
             </a:solidFill>
@@ -3060,131 +2777,152 @@
       <p:sp>
         <p:nvSpPr>
           <p:cNvPr id="6" name="strategy-dot-1">
-            <a:extLst xmlns:a="http://schemas.openxmlformats.org/drawingml/2006/main">
+            <a:extLst>
               <a:ext uri="{FF2B5EF4-FFF2-40B4-BE49-F238E27FC236}">
                 <a16:creationId xmlns:a16="http://schemas.microsoft.com/office/drawing/2014/main" id="{1B0E2854-4B3D-4142-ABE6-BF1DB962A81C}"/>
               </a:ext>
             </a:extLst>
           </p:cNvPr>
           <p:cNvSpPr>
-            <a:spLocks xmlns:a="http://schemas.openxmlformats.org/drawingml/2006/main" noGrp="1"/>
-          </p:cNvSpPr>
-          <p:nvPr/>
-        </p:nvSpPr>
-        <p:spPr>
-          <a:xfrm xmlns:a="http://schemas.openxmlformats.org/drawingml/2006/main">
+            <a:spLocks noGrp="1"/>
+          </p:cNvSpPr>
+          <p:nvPr/>
+        </p:nvSpPr>
+        <p:spPr>
+          <a:xfrm>
             <a:off x="1952625" y="3171825"/>
             <a:ext cx="133350" cy="133350"/>
           </a:xfrm>
-          <a:prstGeom xmlns:a="http://schemas.openxmlformats.org/drawingml/2006/main" prst="ellipse">
-            <a:avLst/>
-          </a:prstGeom>
-          <a:solidFill xmlns:a="http://schemas.openxmlformats.org/drawingml/2006/main">
+          <a:prstGeom prst="ellipse">
+            <a:avLst/>
+          </a:prstGeom>
+          <a:solidFill>
             <a:srgbClr val="007FCB"/>
           </a:solidFill>
-          <a:ln xmlns:a="http://schemas.openxmlformats.org/drawingml/2006/main" w="9525">
+          <a:ln w="9525">
             <a:solidFill>
               <a:srgbClr val="007FCB"/>
             </a:solidFill>
             <a:prstDash val="solid"/>
           </a:ln>
         </p:spPr>
+        <p:txBody>
+          <a:bodyPr/>
+          <a:lstStyle/>
+          <a:p>
+            <a:endParaRPr lang="en-CN"/>
+          </a:p>
+        </p:txBody>
       </p:sp>
       <p:sp>
         <p:nvSpPr>
           <p:cNvPr id="7" name="strategy-dot-2">
-            <a:extLst xmlns:a="http://schemas.openxmlformats.org/drawingml/2006/main">
+            <a:extLst>
               <a:ext uri="{FF2B5EF4-FFF2-40B4-BE49-F238E27FC236}">
                 <a16:creationId xmlns:a16="http://schemas.microsoft.com/office/drawing/2014/main" id="{2B952C73-C654-4D9A-80DC-DFD139AFD6F8}"/>
               </a:ext>
             </a:extLst>
           </p:cNvPr>
           <p:cNvSpPr>
-            <a:spLocks xmlns:a="http://schemas.openxmlformats.org/drawingml/2006/main" noGrp="1"/>
-          </p:cNvSpPr>
-          <p:nvPr/>
-        </p:nvSpPr>
-        <p:spPr>
-          <a:xfrm xmlns:a="http://schemas.openxmlformats.org/drawingml/2006/main">
+            <a:spLocks noGrp="1"/>
+          </p:cNvSpPr>
+          <p:nvPr/>
+        </p:nvSpPr>
+        <p:spPr>
+          <a:xfrm>
             <a:off x="5619750" y="3171825"/>
             <a:ext cx="133350" cy="133350"/>
           </a:xfrm>
-          <a:prstGeom xmlns:a="http://schemas.openxmlformats.org/drawingml/2006/main" prst="ellipse">
-            <a:avLst/>
-          </a:prstGeom>
-          <a:solidFill xmlns:a="http://schemas.openxmlformats.org/drawingml/2006/main">
+          <a:prstGeom prst="ellipse">
+            <a:avLst/>
+          </a:prstGeom>
+          <a:solidFill>
             <a:srgbClr val="007FCB"/>
           </a:solidFill>
-          <a:ln xmlns:a="http://schemas.openxmlformats.org/drawingml/2006/main" w="9525">
+          <a:ln w="9525">
             <a:solidFill>
               <a:srgbClr val="007FCB"/>
             </a:solidFill>
             <a:prstDash val="solid"/>
           </a:ln>
         </p:spPr>
+        <p:txBody>
+          <a:bodyPr/>
+          <a:lstStyle/>
+          <a:p>
+            <a:endParaRPr lang="en-CN"/>
+          </a:p>
+        </p:txBody>
       </p:sp>
       <p:sp>
         <p:nvSpPr>
           <p:cNvPr id="8" name="strategy-dot-3">
-            <a:extLst xmlns:a="http://schemas.openxmlformats.org/drawingml/2006/main">
+            <a:extLst>
               <a:ext uri="{FF2B5EF4-FFF2-40B4-BE49-F238E27FC236}">
                 <a16:creationId xmlns:a16="http://schemas.microsoft.com/office/drawing/2014/main" id="{87DA4A8F-0064-4432-AE8E-907102DBE2C5}"/>
               </a:ext>
             </a:extLst>
           </p:cNvPr>
           <p:cNvSpPr>
-            <a:spLocks xmlns:a="http://schemas.openxmlformats.org/drawingml/2006/main" noGrp="1"/>
-          </p:cNvSpPr>
-          <p:nvPr/>
-        </p:nvSpPr>
-        <p:spPr>
-          <a:xfrm xmlns:a="http://schemas.openxmlformats.org/drawingml/2006/main">
+            <a:spLocks noGrp="1"/>
+          </p:cNvSpPr>
+          <p:nvPr/>
+        </p:nvSpPr>
+        <p:spPr>
+          <a:xfrm>
             <a:off x="9286875" y="3171825"/>
             <a:ext cx="133350" cy="133350"/>
           </a:xfrm>
-          <a:prstGeom xmlns:a="http://schemas.openxmlformats.org/drawingml/2006/main" prst="ellipse">
-            <a:avLst/>
-          </a:prstGeom>
-          <a:solidFill xmlns:a="http://schemas.openxmlformats.org/drawingml/2006/main">
+          <a:prstGeom prst="ellipse">
+            <a:avLst/>
+          </a:prstGeom>
+          <a:solidFill>
             <a:srgbClr val="007FCB"/>
           </a:solidFill>
-          <a:ln xmlns:a="http://schemas.openxmlformats.org/drawingml/2006/main" w="9525">
+          <a:ln w="9525">
             <a:solidFill>
               <a:srgbClr val="007FCB"/>
             </a:solidFill>
             <a:prstDash val="solid"/>
           </a:ln>
         </p:spPr>
+        <p:txBody>
+          <a:bodyPr/>
+          <a:lstStyle/>
+          <a:p>
+            <a:endParaRPr lang="en-CN"/>
+          </a:p>
+        </p:txBody>
       </p:sp>
       <p:sp>
         <p:nvSpPr>
           <p:cNvPr id="9" name="strategy-label-1">
-            <a:extLst xmlns:a="http://schemas.openxmlformats.org/drawingml/2006/main">
+            <a:extLst>
               <a:ext uri="{FF2B5EF4-FFF2-40B4-BE49-F238E27FC236}">
                 <a16:creationId xmlns:a16="http://schemas.microsoft.com/office/drawing/2014/main" id="{9939C2BA-5964-4D5A-A52A-11BB36790A0D}"/>
               </a:ext>
             </a:extLst>
           </p:cNvPr>
           <p:cNvSpPr>
-            <a:spLocks xmlns:a="http://schemas.openxmlformats.org/drawingml/2006/main" noGrp="1"/>
-          </p:cNvSpPr>
-          <p:nvPr/>
-        </p:nvSpPr>
-        <p:spPr>
-          <a:xfrm xmlns:a="http://schemas.openxmlformats.org/drawingml/2006/main">
+            <a:spLocks noGrp="1"/>
+          </p:cNvSpPr>
+          <p:nvPr/>
+        </p:nvSpPr>
+        <p:spPr>
+          <a:xfrm>
             <a:off x="1685925" y="2714625"/>
             <a:ext cx="1238250" cy="266700"/>
           </a:xfrm>
-          <a:prstGeom xmlns:a="http://schemas.openxmlformats.org/drawingml/2006/main" prst="rect">
-            <a:avLst/>
-          </a:prstGeom>
-        </p:spPr>
-        <p:txBody>
-          <a:bodyPr xmlns:a="http://schemas.openxmlformats.org/drawingml/2006/main" wrap="square" lIns="0" tIns="0" rIns="0" bIns="0" anchor="t">
-            <a:normAutofit fontScale="100000"/>
+          <a:prstGeom prst="rect">
+            <a:avLst/>
+          </a:prstGeom>
+        </p:spPr>
+        <p:txBody>
+          <a:bodyPr wrap="square" lIns="0" tIns="0" rIns="0" bIns="0" anchor="t">
+            <a:normAutofit/>
           </a:bodyPr>
-          <a:lstStyle xmlns:a="http://schemas.openxmlformats.org/drawingml/2006/main"/>
-          <a:p xmlns:a="http://schemas.openxmlformats.org/drawingml/2006/main">
+          <a:lstStyle/>
+          <a:p>
             <a:pPr algn="l">
               <a:buNone/>
               <a:defRPr sz="1350" b="1">
@@ -3205,32 +2943,32 @@
       <p:sp>
         <p:nvSpPr>
           <p:cNvPr id="10" name="strategy-label-2">
-            <a:extLst xmlns:a="http://schemas.openxmlformats.org/drawingml/2006/main">
+            <a:extLst>
               <a:ext uri="{FF2B5EF4-FFF2-40B4-BE49-F238E27FC236}">
                 <a16:creationId xmlns:a16="http://schemas.microsoft.com/office/drawing/2014/main" id="{15CDF3EC-7052-4D8B-9090-6149557ABDF9}"/>
               </a:ext>
             </a:extLst>
           </p:cNvPr>
           <p:cNvSpPr>
-            <a:spLocks xmlns:a="http://schemas.openxmlformats.org/drawingml/2006/main" noGrp="1"/>
-          </p:cNvSpPr>
-          <p:nvPr/>
-        </p:nvSpPr>
-        <p:spPr>
-          <a:xfrm xmlns:a="http://schemas.openxmlformats.org/drawingml/2006/main">
+            <a:spLocks noGrp="1"/>
+          </p:cNvSpPr>
+          <p:nvPr/>
+        </p:nvSpPr>
+        <p:spPr>
+          <a:xfrm>
             <a:off x="5353050" y="2714625"/>
             <a:ext cx="1238250" cy="266700"/>
           </a:xfrm>
-          <a:prstGeom xmlns:a="http://schemas.openxmlformats.org/drawingml/2006/main" prst="rect">
-            <a:avLst/>
-          </a:prstGeom>
-        </p:spPr>
-        <p:txBody>
-          <a:bodyPr xmlns:a="http://schemas.openxmlformats.org/drawingml/2006/main" wrap="square" lIns="0" tIns="0" rIns="0" bIns="0" anchor="t">
-            <a:normAutofit fontScale="100000"/>
+          <a:prstGeom prst="rect">
+            <a:avLst/>
+          </a:prstGeom>
+        </p:spPr>
+        <p:txBody>
+          <a:bodyPr wrap="square" lIns="0" tIns="0" rIns="0" bIns="0" anchor="t">
+            <a:normAutofit/>
           </a:bodyPr>
-          <a:lstStyle xmlns:a="http://schemas.openxmlformats.org/drawingml/2006/main"/>
-          <a:p xmlns:a="http://schemas.openxmlformats.org/drawingml/2006/main">
+          <a:lstStyle/>
+          <a:p>
             <a:pPr algn="l">
               <a:buNone/>
               <a:defRPr sz="1350" b="1">
@@ -3251,32 +2989,32 @@
       <p:sp>
         <p:nvSpPr>
           <p:cNvPr id="11" name="strategy-label-3">
-            <a:extLst xmlns:a="http://schemas.openxmlformats.org/drawingml/2006/main">
+            <a:extLst>
               <a:ext uri="{FF2B5EF4-FFF2-40B4-BE49-F238E27FC236}">
                 <a16:creationId xmlns:a16="http://schemas.microsoft.com/office/drawing/2014/main" id="{2D82D75A-01B5-424E-ABAC-59FB839CEFA7}"/>
               </a:ext>
             </a:extLst>
           </p:cNvPr>
           <p:cNvSpPr>
-            <a:spLocks xmlns:a="http://schemas.openxmlformats.org/drawingml/2006/main" noGrp="1"/>
-          </p:cNvSpPr>
-          <p:nvPr/>
-        </p:nvSpPr>
-        <p:spPr>
-          <a:xfrm xmlns:a="http://schemas.openxmlformats.org/drawingml/2006/main">
+            <a:spLocks noGrp="1"/>
+          </p:cNvSpPr>
+          <p:nvPr/>
+        </p:nvSpPr>
+        <p:spPr>
+          <a:xfrm>
             <a:off x="9020175" y="2714625"/>
             <a:ext cx="1238250" cy="266700"/>
           </a:xfrm>
-          <a:prstGeom xmlns:a="http://schemas.openxmlformats.org/drawingml/2006/main" prst="rect">
-            <a:avLst/>
-          </a:prstGeom>
-        </p:spPr>
-        <p:txBody>
-          <a:bodyPr xmlns:a="http://schemas.openxmlformats.org/drawingml/2006/main" wrap="square" lIns="0" tIns="0" rIns="0" bIns="0" anchor="t">
-            <a:normAutofit fontScale="100000"/>
+          <a:prstGeom prst="rect">
+            <a:avLst/>
+          </a:prstGeom>
+        </p:spPr>
+        <p:txBody>
+          <a:bodyPr wrap="square" lIns="0" tIns="0" rIns="0" bIns="0" anchor="t">
+            <a:normAutofit/>
           </a:bodyPr>
-          <a:lstStyle xmlns:a="http://schemas.openxmlformats.org/drawingml/2006/main"/>
-          <a:p xmlns:a="http://schemas.openxmlformats.org/drawingml/2006/main">
+          <a:lstStyle/>
+          <a:p>
             <a:pPr algn="l">
               <a:buNone/>
               <a:defRPr sz="1350" b="1">
@@ -3297,32 +3035,32 @@
       <p:sp>
         <p:nvSpPr>
           <p:cNvPr id="12" name="strategy-1-title">
-            <a:extLst xmlns:a="http://schemas.openxmlformats.org/drawingml/2006/main">
+            <a:extLst>
               <a:ext uri="{FF2B5EF4-FFF2-40B4-BE49-F238E27FC236}">
                 <a16:creationId xmlns:a16="http://schemas.microsoft.com/office/drawing/2014/main" id="{6BA38B75-F003-426E-9671-C03D17D4BAF4}"/>
               </a:ext>
             </a:extLst>
           </p:cNvPr>
           <p:cNvSpPr>
-            <a:spLocks xmlns:a="http://schemas.openxmlformats.org/drawingml/2006/main" noGrp="1"/>
-          </p:cNvSpPr>
-          <p:nvPr/>
-        </p:nvSpPr>
-        <p:spPr>
-          <a:xfrm xmlns:a="http://schemas.openxmlformats.org/drawingml/2006/main">
+            <a:spLocks noGrp="1"/>
+          </p:cNvSpPr>
+          <p:nvPr/>
+        </p:nvSpPr>
+        <p:spPr>
+          <a:xfrm>
             <a:off x="1000125" y="3714750"/>
             <a:ext cx="2190750" cy="323850"/>
           </a:xfrm>
-          <a:prstGeom xmlns:a="http://schemas.openxmlformats.org/drawingml/2006/main" prst="rect">
-            <a:avLst/>
-          </a:prstGeom>
-        </p:spPr>
-        <p:txBody>
-          <a:bodyPr xmlns:a="http://schemas.openxmlformats.org/drawingml/2006/main" wrap="square" lIns="0" tIns="0" rIns="0" bIns="0" anchor="t">
-            <a:normAutofit fontScale="100000"/>
+          <a:prstGeom prst="rect">
+            <a:avLst/>
+          </a:prstGeom>
+        </p:spPr>
+        <p:txBody>
+          <a:bodyPr wrap="square" lIns="0" tIns="0" rIns="0" bIns="0" anchor="t">
+            <a:normAutofit/>
           </a:bodyPr>
-          <a:lstStyle xmlns:a="http://schemas.openxmlformats.org/drawingml/2006/main"/>
-          <a:p xmlns:a="http://schemas.openxmlformats.org/drawingml/2006/main">
+          <a:lstStyle/>
+          <a:p>
             <a:pPr algn="l">
               <a:buNone/>
               <a:defRPr sz="1950" b="1">
@@ -3343,32 +3081,32 @@
       <p:sp>
         <p:nvSpPr>
           <p:cNvPr id="13" name="strategy-1-body">
-            <a:extLst xmlns:a="http://schemas.openxmlformats.org/drawingml/2006/main">
+            <a:extLst>
               <a:ext uri="{FF2B5EF4-FFF2-40B4-BE49-F238E27FC236}">
                 <a16:creationId xmlns:a16="http://schemas.microsoft.com/office/drawing/2014/main" id="{9E6C60B4-B629-4B66-A094-C3AF06991010}"/>
               </a:ext>
             </a:extLst>
           </p:cNvPr>
           <p:cNvSpPr>
-            <a:spLocks xmlns:a="http://schemas.openxmlformats.org/drawingml/2006/main" noGrp="1"/>
-          </p:cNvSpPr>
-          <p:nvPr/>
-        </p:nvSpPr>
-        <p:spPr>
-          <a:xfrm xmlns:a="http://schemas.openxmlformats.org/drawingml/2006/main">
+            <a:spLocks noGrp="1"/>
+          </p:cNvSpPr>
+          <p:nvPr/>
+        </p:nvSpPr>
+        <p:spPr>
+          <a:xfrm>
             <a:off x="1000125" y="4171950"/>
             <a:ext cx="2381250" cy="800100"/>
           </a:xfrm>
-          <a:prstGeom xmlns:a="http://schemas.openxmlformats.org/drawingml/2006/main" prst="rect">
-            <a:avLst/>
-          </a:prstGeom>
-        </p:spPr>
-        <p:txBody>
-          <a:bodyPr xmlns:a="http://schemas.openxmlformats.org/drawingml/2006/main" wrap="square" lIns="0" tIns="0" rIns="0" bIns="0" anchor="t">
-            <a:normAutofit fontScale="100000"/>
+          <a:prstGeom prst="rect">
+            <a:avLst/>
+          </a:prstGeom>
+        </p:spPr>
+        <p:txBody>
+          <a:bodyPr wrap="square" lIns="0" tIns="0" rIns="0" bIns="0" anchor="t">
+            <a:normAutofit/>
           </a:bodyPr>
-          <a:lstStyle xmlns:a="http://schemas.openxmlformats.org/drawingml/2006/main"/>
-          <a:p xmlns:a="http://schemas.openxmlformats.org/drawingml/2006/main">
+          <a:lstStyle/>
+          <a:p>
             <a:pPr algn="l">
               <a:buNone/>
               <a:defRPr sz="1425" b="0">
@@ -3390,32 +3128,32 @@
       <p:sp>
         <p:nvSpPr>
           <p:cNvPr id="14" name="strategy-2-title">
-            <a:extLst xmlns:a="http://schemas.openxmlformats.org/drawingml/2006/main">
+            <a:extLst>
               <a:ext uri="{FF2B5EF4-FFF2-40B4-BE49-F238E27FC236}">
                 <a16:creationId xmlns:a16="http://schemas.microsoft.com/office/drawing/2014/main" id="{6ED3E819-763E-49A4-B803-EFC31EDF182A}"/>
               </a:ext>
             </a:extLst>
           </p:cNvPr>
           <p:cNvSpPr>
-            <a:spLocks xmlns:a="http://schemas.openxmlformats.org/drawingml/2006/main" noGrp="1"/>
-          </p:cNvSpPr>
-          <p:nvPr/>
-        </p:nvSpPr>
-        <p:spPr>
-          <a:xfrm xmlns:a="http://schemas.openxmlformats.org/drawingml/2006/main">
+            <a:spLocks noGrp="1"/>
+          </p:cNvSpPr>
+          <p:nvPr/>
+        </p:nvSpPr>
+        <p:spPr>
+          <a:xfrm>
             <a:off x="4667250" y="3714750"/>
             <a:ext cx="2190750" cy="323850"/>
           </a:xfrm>
-          <a:prstGeom xmlns:a="http://schemas.openxmlformats.org/drawingml/2006/main" prst="rect">
-            <a:avLst/>
-          </a:prstGeom>
-        </p:spPr>
-        <p:txBody>
-          <a:bodyPr xmlns:a="http://schemas.openxmlformats.org/drawingml/2006/main" wrap="square" lIns="0" tIns="0" rIns="0" bIns="0" anchor="t">
-            <a:normAutofit fontScale="100000"/>
+          <a:prstGeom prst="rect">
+            <a:avLst/>
+          </a:prstGeom>
+        </p:spPr>
+        <p:txBody>
+          <a:bodyPr wrap="square" lIns="0" tIns="0" rIns="0" bIns="0" anchor="t">
+            <a:normAutofit/>
           </a:bodyPr>
-          <a:lstStyle xmlns:a="http://schemas.openxmlformats.org/drawingml/2006/main"/>
-          <a:p xmlns:a="http://schemas.openxmlformats.org/drawingml/2006/main">
+          <a:lstStyle/>
+          <a:p>
             <a:pPr algn="l">
               <a:buNone/>
               <a:defRPr sz="1950" b="1">
@@ -3436,32 +3174,32 @@
       <p:sp>
         <p:nvSpPr>
           <p:cNvPr id="15" name="strategy-2-body">
-            <a:extLst xmlns:a="http://schemas.openxmlformats.org/drawingml/2006/main">
+            <a:extLst>
               <a:ext uri="{FF2B5EF4-FFF2-40B4-BE49-F238E27FC236}">
                 <a16:creationId xmlns:a16="http://schemas.microsoft.com/office/drawing/2014/main" id="{7B81368A-B5FA-4E19-8810-3DAFF9251419}"/>
               </a:ext>
             </a:extLst>
           </p:cNvPr>
           <p:cNvSpPr>
-            <a:spLocks xmlns:a="http://schemas.openxmlformats.org/drawingml/2006/main" noGrp="1"/>
-          </p:cNvSpPr>
-          <p:nvPr/>
-        </p:nvSpPr>
-        <p:spPr>
-          <a:xfrm xmlns:a="http://schemas.openxmlformats.org/drawingml/2006/main">
+            <a:spLocks noGrp="1"/>
+          </p:cNvSpPr>
+          <p:nvPr/>
+        </p:nvSpPr>
+        <p:spPr>
+          <a:xfrm>
             <a:off x="4667250" y="4171950"/>
             <a:ext cx="2381250" cy="800100"/>
           </a:xfrm>
-          <a:prstGeom xmlns:a="http://schemas.openxmlformats.org/drawingml/2006/main" prst="rect">
-            <a:avLst/>
-          </a:prstGeom>
-        </p:spPr>
-        <p:txBody>
-          <a:bodyPr xmlns:a="http://schemas.openxmlformats.org/drawingml/2006/main" wrap="square" lIns="0" tIns="0" rIns="0" bIns="0" anchor="t">
-            <a:normAutofit fontScale="100000"/>
+          <a:prstGeom prst="rect">
+            <a:avLst/>
+          </a:prstGeom>
+        </p:spPr>
+        <p:txBody>
+          <a:bodyPr wrap="square" lIns="0" tIns="0" rIns="0" bIns="0" anchor="t">
+            <a:normAutofit/>
           </a:bodyPr>
-          <a:lstStyle xmlns:a="http://schemas.openxmlformats.org/drawingml/2006/main"/>
-          <a:p xmlns:a="http://schemas.openxmlformats.org/drawingml/2006/main">
+          <a:lstStyle/>
+          <a:p>
             <a:pPr algn="l">
               <a:buNone/>
               <a:defRPr sz="1425" b="0">
@@ -3483,32 +3221,32 @@
       <p:sp>
         <p:nvSpPr>
           <p:cNvPr id="16" name="strategy-3-title">
-            <a:extLst xmlns:a="http://schemas.openxmlformats.org/drawingml/2006/main">
+            <a:extLst>
               <a:ext uri="{FF2B5EF4-FFF2-40B4-BE49-F238E27FC236}">
                 <a16:creationId xmlns:a16="http://schemas.microsoft.com/office/drawing/2014/main" id="{9F25116F-A3FE-4F0A-9CC3-FCC93E517E0F}"/>
               </a:ext>
             </a:extLst>
           </p:cNvPr>
           <p:cNvSpPr>
-            <a:spLocks xmlns:a="http://schemas.openxmlformats.org/drawingml/2006/main" noGrp="1"/>
-          </p:cNvSpPr>
-          <p:nvPr/>
-        </p:nvSpPr>
-        <p:spPr>
-          <a:xfrm xmlns:a="http://schemas.openxmlformats.org/drawingml/2006/main">
+            <a:spLocks noGrp="1"/>
+          </p:cNvSpPr>
+          <p:nvPr/>
+        </p:nvSpPr>
+        <p:spPr>
+          <a:xfrm>
             <a:off x="8334375" y="3714750"/>
             <a:ext cx="2381250" cy="323850"/>
           </a:xfrm>
-          <a:prstGeom xmlns:a="http://schemas.openxmlformats.org/drawingml/2006/main" prst="rect">
-            <a:avLst/>
-          </a:prstGeom>
-        </p:spPr>
-        <p:txBody>
-          <a:bodyPr xmlns:a="http://schemas.openxmlformats.org/drawingml/2006/main" wrap="square" lIns="0" tIns="0" rIns="0" bIns="0" anchor="t">
-            <a:normAutofit fontScale="100000"/>
+          <a:prstGeom prst="rect">
+            <a:avLst/>
+          </a:prstGeom>
+        </p:spPr>
+        <p:txBody>
+          <a:bodyPr wrap="square" lIns="0" tIns="0" rIns="0" bIns="0" anchor="t">
+            <a:normAutofit/>
           </a:bodyPr>
-          <a:lstStyle xmlns:a="http://schemas.openxmlformats.org/drawingml/2006/main"/>
-          <a:p xmlns:a="http://schemas.openxmlformats.org/drawingml/2006/main">
+          <a:lstStyle/>
+          <a:p>
             <a:pPr algn="l">
               <a:buNone/>
               <a:defRPr sz="1950" b="1">
@@ -3529,32 +3267,32 @@
       <p:sp>
         <p:nvSpPr>
           <p:cNvPr id="17" name="strategy-3-body">
-            <a:extLst xmlns:a="http://schemas.openxmlformats.org/drawingml/2006/main">
+            <a:extLst>
               <a:ext uri="{FF2B5EF4-FFF2-40B4-BE49-F238E27FC236}">
                 <a16:creationId xmlns:a16="http://schemas.microsoft.com/office/drawing/2014/main" id="{5184DC0D-6E10-4467-BD28-04B51BFA8031}"/>
               </a:ext>
             </a:extLst>
           </p:cNvPr>
           <p:cNvSpPr>
-            <a:spLocks xmlns:a="http://schemas.openxmlformats.org/drawingml/2006/main" noGrp="1"/>
-          </p:cNvSpPr>
-          <p:nvPr/>
-        </p:nvSpPr>
-        <p:spPr>
-          <a:xfrm xmlns:a="http://schemas.openxmlformats.org/drawingml/2006/main">
+            <a:spLocks noGrp="1"/>
+          </p:cNvSpPr>
+          <p:nvPr/>
+        </p:nvSpPr>
+        <p:spPr>
+          <a:xfrm>
             <a:off x="8334375" y="4171950"/>
             <a:ext cx="2571750" cy="800100"/>
           </a:xfrm>
-          <a:prstGeom xmlns:a="http://schemas.openxmlformats.org/drawingml/2006/main" prst="rect">
-            <a:avLst/>
-          </a:prstGeom>
-        </p:spPr>
-        <p:txBody>
-          <a:bodyPr xmlns:a="http://schemas.openxmlformats.org/drawingml/2006/main" wrap="square" lIns="0" tIns="0" rIns="0" bIns="0" anchor="t">
-            <a:normAutofit fontScale="100000"/>
+          <a:prstGeom prst="rect">
+            <a:avLst/>
+          </a:prstGeom>
+        </p:spPr>
+        <p:txBody>
+          <a:bodyPr wrap="square" lIns="0" tIns="0" rIns="0" bIns="0" anchor="t">
+            <a:normAutofit/>
           </a:bodyPr>
-          <a:lstStyle xmlns:a="http://schemas.openxmlformats.org/drawingml/2006/main"/>
-          <a:p xmlns:a="http://schemas.openxmlformats.org/drawingml/2006/main">
+          <a:lstStyle/>
+          <a:p>
             <a:pPr algn="l">
               <a:buNone/>
               <a:defRPr sz="1425" b="0">
@@ -3576,67 +3314,74 @@
       <p:sp>
         <p:nvSpPr>
           <p:cNvPr id="18" name="strategy-claim">
-            <a:extLst xmlns:a="http://schemas.openxmlformats.org/drawingml/2006/main">
+            <a:extLst>
               <a:ext uri="{FF2B5EF4-FFF2-40B4-BE49-F238E27FC236}">
                 <a16:creationId xmlns:a16="http://schemas.microsoft.com/office/drawing/2014/main" id="{B4BAE31A-7614-4210-8B6B-BF7C4636E7F2}"/>
               </a:ext>
             </a:extLst>
           </p:cNvPr>
           <p:cNvSpPr>
-            <a:spLocks xmlns:a="http://schemas.openxmlformats.org/drawingml/2006/main" noGrp="1"/>
-          </p:cNvSpPr>
-          <p:nvPr/>
-        </p:nvSpPr>
-        <p:spPr>
-          <a:xfrm xmlns:a="http://schemas.openxmlformats.org/drawingml/2006/main">
+            <a:spLocks noGrp="1"/>
+          </p:cNvSpPr>
+          <p:nvPr/>
+        </p:nvSpPr>
+        <p:spPr>
+          <a:xfrm>
             <a:off x="400050" y="5476875"/>
             <a:ext cx="11391900" cy="647700"/>
           </a:xfrm>
-          <a:prstGeom xmlns:a="http://schemas.openxmlformats.org/drawingml/2006/main" prst="roundRect">
+          <a:prstGeom prst="roundRect">
             <a:avLst>
               <a:gd name="adj" fmla="val 11765"/>
             </a:avLst>
           </a:prstGeom>
-          <a:solidFill xmlns:a="http://schemas.openxmlformats.org/drawingml/2006/main">
+          <a:solidFill>
             <a:srgbClr val="EAF8FD"/>
           </a:solidFill>
-          <a:ln xmlns:a="http://schemas.openxmlformats.org/drawingml/2006/main" w="9525">
+          <a:ln w="9525">
             <a:solidFill>
               <a:srgbClr val="BCE5F5"/>
             </a:solidFill>
             <a:prstDash val="solid"/>
           </a:ln>
         </p:spPr>
+        <p:txBody>
+          <a:bodyPr/>
+          <a:lstStyle/>
+          <a:p>
+            <a:endParaRPr lang="en-CN"/>
+          </a:p>
+        </p:txBody>
       </p:sp>
       <p:sp>
         <p:nvSpPr>
           <p:cNvPr id="19" name="strategy-claim-text">
-            <a:extLst xmlns:a="http://schemas.openxmlformats.org/drawingml/2006/main">
+            <a:extLst>
               <a:ext uri="{FF2B5EF4-FFF2-40B4-BE49-F238E27FC236}">
                 <a16:creationId xmlns:a16="http://schemas.microsoft.com/office/drawing/2014/main" id="{8A49F9F6-AE7B-42E9-BA84-42093D13AB6D}"/>
               </a:ext>
             </a:extLst>
           </p:cNvPr>
           <p:cNvSpPr>
-            <a:spLocks xmlns:a="http://schemas.openxmlformats.org/drawingml/2006/main" noGrp="1"/>
-          </p:cNvSpPr>
-          <p:nvPr/>
-        </p:nvSpPr>
-        <p:spPr>
-          <a:xfrm xmlns:a="http://schemas.openxmlformats.org/drawingml/2006/main">
+            <a:spLocks noGrp="1"/>
+          </p:cNvSpPr>
+          <p:nvPr/>
+        </p:nvSpPr>
+        <p:spPr>
+          <a:xfrm>
             <a:off x="685800" y="5657850"/>
             <a:ext cx="10477500" cy="285750"/>
           </a:xfrm>
-          <a:prstGeom xmlns:a="http://schemas.openxmlformats.org/drawingml/2006/main" prst="rect">
-            <a:avLst/>
-          </a:prstGeom>
-        </p:spPr>
-        <p:txBody>
-          <a:bodyPr xmlns:a="http://schemas.openxmlformats.org/drawingml/2006/main" wrap="square" lIns="0" tIns="0" rIns="0" bIns="0" anchor="t">
-            <a:normAutofit fontScale="100000"/>
+          <a:prstGeom prst="rect">
+            <a:avLst/>
+          </a:prstGeom>
+        </p:spPr>
+        <p:txBody>
+          <a:bodyPr wrap="square" lIns="0" tIns="0" rIns="0" bIns="0" anchor="t">
+            <a:normAutofit/>
           </a:bodyPr>
-          <a:lstStyle xmlns:a="http://schemas.openxmlformats.org/drawingml/2006/main"/>
-          <a:p xmlns:a="http://schemas.openxmlformats.org/drawingml/2006/main">
+          <a:lstStyle/>
+          <a:p>
             <a:pPr algn="l">
               <a:buNone/>
               <a:defRPr sz="1800" b="1">
@@ -3661,17 +3406,21 @@
       </p:ext>
     </p:extLst>
   </p:cSld>
+  <p:clrMapOvr>
+    <a:masterClrMapping/>
+  </p:clrMapOvr>
 </p:sld>
 </file>
 
 <file path=ppt/slides/slide4.xml><?xml version="1.0" encoding="utf-8"?>
-<p:sld xmlns:p="http://schemas.openxmlformats.org/presentationml/2006/main">
+<p:sld xmlns:a="http://schemas.openxmlformats.org/drawingml/2006/main" xmlns:r="http://schemas.openxmlformats.org/officeDocument/2006/relationships" xmlns:p="http://schemas.openxmlformats.org/presentationml/2006/main">
   <p:cSld>
     <p:bg>
       <p:bgPr>
-        <a:solidFill xmlns:a="http://schemas.openxmlformats.org/drawingml/2006/main">
+        <a:solidFill>
           <a:srgbClr val="FFFFFF"/>
         </a:solidFill>
+        <a:effectLst/>
       </p:bgPr>
     </p:bg>
     <p:spTree>
@@ -3681,7 +3430,12 @@
         <p:nvPr/>
       </p:nvGrpSpPr>
       <p:grpSpPr>
-        <a:xfrm xmlns:a="http://schemas.openxmlformats.org/drawingml/2006/main"/>
+        <a:xfrm>
+          <a:off x="0" y="0"/>
+          <a:ext cx="0" cy="0"/>
+          <a:chOff x="0" y="0"/>
+          <a:chExt cx="0" cy="0"/>
+        </a:xfrm>
       </p:grpSpPr>
       <p:cxnSp>
         <p:nvCxnSpPr>
@@ -3690,14 +3444,14 @@
           <p:nvPr/>
         </p:nvCxnSpPr>
         <p:spPr>
-          <a:xfrm xmlns:a="http://schemas.openxmlformats.org/drawingml/2006/main">
+          <a:xfrm>
             <a:off x="400050" y="295275"/>
             <a:ext cx="11391900" cy="9525"/>
           </a:xfrm>
-          <a:prstGeom xmlns:a="http://schemas.openxmlformats.org/drawingml/2006/main" prst="straightConnector1">
-            <a:avLst/>
-          </a:prstGeom>
-          <a:ln xmlns:a="http://schemas.openxmlformats.org/drawingml/2006/main" w="9525">
+          <a:prstGeom prst="straightConnector1">
+            <a:avLst/>
+          </a:prstGeom>
+          <a:ln w="9525">
             <a:solidFill>
               <a:srgbClr val="C7D0DA"/>
             </a:solidFill>
@@ -3708,32 +3462,32 @@
       <p:sp>
         <p:nvSpPr>
           <p:cNvPr id="2" name="page-number">
-            <a:extLst xmlns:a="http://schemas.openxmlformats.org/drawingml/2006/main">
+            <a:extLst>
               <a:ext uri="{FF2B5EF4-FFF2-40B4-BE49-F238E27FC236}">
                 <a16:creationId xmlns:a16="http://schemas.microsoft.com/office/drawing/2014/main" id="{D7B9FE02-010B-42A1-8029-C4A3CC088AFC}"/>
               </a:ext>
             </a:extLst>
           </p:cNvPr>
           <p:cNvSpPr>
-            <a:spLocks xmlns:a="http://schemas.openxmlformats.org/drawingml/2006/main" noGrp="1"/>
-          </p:cNvSpPr>
-          <p:nvPr/>
-        </p:nvSpPr>
-        <p:spPr>
-          <a:xfrm xmlns:a="http://schemas.openxmlformats.org/drawingml/2006/main">
+            <a:spLocks noGrp="1"/>
+          </p:cNvSpPr>
+          <p:nvPr/>
+        </p:nvSpPr>
+        <p:spPr>
+          <a:xfrm>
             <a:off x="11125200" y="6305550"/>
             <a:ext cx="666750" cy="209550"/>
           </a:xfrm>
-          <a:prstGeom xmlns:a="http://schemas.openxmlformats.org/drawingml/2006/main" prst="rect">
-            <a:avLst/>
-          </a:prstGeom>
-        </p:spPr>
-        <p:txBody>
-          <a:bodyPr xmlns:a="http://schemas.openxmlformats.org/drawingml/2006/main" wrap="square" lIns="0" tIns="0" rIns="0" bIns="0" anchor="t">
-            <a:normAutofit fontScale="100000"/>
+          <a:prstGeom prst="rect">
+            <a:avLst/>
+          </a:prstGeom>
+        </p:spPr>
+        <p:txBody>
+          <a:bodyPr wrap="square" lIns="0" tIns="0" rIns="0" bIns="0" anchor="t">
+            <a:normAutofit/>
           </a:bodyPr>
-          <a:lstStyle xmlns:a="http://schemas.openxmlformats.org/drawingml/2006/main"/>
-          <a:p xmlns:a="http://schemas.openxmlformats.org/drawingml/2006/main">
+          <a:lstStyle/>
+          <a:p>
             <a:pPr algn="r">
               <a:buNone/>
               <a:defRPr sz="975" b="0">
@@ -3754,32 +3508,32 @@
       <p:sp>
         <p:nvSpPr>
           <p:cNvPr id="3" name="architecture-title">
-            <a:extLst xmlns:a="http://schemas.openxmlformats.org/drawingml/2006/main">
+            <a:extLst>
               <a:ext uri="{FF2B5EF4-FFF2-40B4-BE49-F238E27FC236}">
                 <a16:creationId xmlns:a16="http://schemas.microsoft.com/office/drawing/2014/main" id="{C7472CFA-B236-4B51-A1B4-EC3F245E2719}"/>
               </a:ext>
             </a:extLst>
           </p:cNvPr>
           <p:cNvSpPr>
-            <a:spLocks xmlns:a="http://schemas.openxmlformats.org/drawingml/2006/main" noGrp="1"/>
-          </p:cNvSpPr>
-          <p:nvPr/>
-        </p:nvSpPr>
-        <p:spPr>
-          <a:xfrm xmlns:a="http://schemas.openxmlformats.org/drawingml/2006/main">
+            <a:spLocks noGrp="1"/>
+          </p:cNvSpPr>
+          <p:nvPr/>
+        </p:nvSpPr>
+        <p:spPr>
+          <a:xfrm>
             <a:off x="400050" y="590550"/>
             <a:ext cx="10287000" cy="552450"/>
           </a:xfrm>
-          <a:prstGeom xmlns:a="http://schemas.openxmlformats.org/drawingml/2006/main" prst="rect">
-            <a:avLst/>
-          </a:prstGeom>
-        </p:spPr>
-        <p:txBody>
-          <a:bodyPr xmlns:a="http://schemas.openxmlformats.org/drawingml/2006/main" wrap="square" lIns="0" tIns="0" rIns="0" bIns="0" anchor="t">
-            <a:normAutofit fontScale="100000"/>
+          <a:prstGeom prst="rect">
+            <a:avLst/>
+          </a:prstGeom>
+        </p:spPr>
+        <p:txBody>
+          <a:bodyPr wrap="square" lIns="0" tIns="0" rIns="0" bIns="0" anchor="t">
+            <a:normAutofit/>
           </a:bodyPr>
-          <a:lstStyle xmlns:a="http://schemas.openxmlformats.org/drawingml/2006/main"/>
-          <a:p xmlns:a="http://schemas.openxmlformats.org/drawingml/2006/main">
+          <a:lstStyle/>
+          <a:p>
             <a:pPr algn="l">
               <a:buNone/>
               <a:defRPr sz="2925" b="1">
@@ -3800,32 +3554,32 @@
       <p:sp>
         <p:nvSpPr>
           <p:cNvPr id="4" name="architecture-subtitle">
-            <a:extLst xmlns:a="http://schemas.openxmlformats.org/drawingml/2006/main">
+            <a:extLst>
               <a:ext uri="{FF2B5EF4-FFF2-40B4-BE49-F238E27FC236}">
                 <a16:creationId xmlns:a16="http://schemas.microsoft.com/office/drawing/2014/main" id="{B8C1D1B5-4BCB-43DE-811F-473438A4FEF7}"/>
               </a:ext>
             </a:extLst>
           </p:cNvPr>
           <p:cNvSpPr>
-            <a:spLocks xmlns:a="http://schemas.openxmlformats.org/drawingml/2006/main" noGrp="1"/>
-          </p:cNvSpPr>
-          <p:nvPr/>
-        </p:nvSpPr>
-        <p:spPr>
-          <a:xfrm xmlns:a="http://schemas.openxmlformats.org/drawingml/2006/main">
+            <a:spLocks noGrp="1"/>
+          </p:cNvSpPr>
+          <p:nvPr/>
+        </p:nvSpPr>
+        <p:spPr>
+          <a:xfrm>
             <a:off x="400050" y="1266825"/>
             <a:ext cx="8572500" cy="304800"/>
           </a:xfrm>
-          <a:prstGeom xmlns:a="http://schemas.openxmlformats.org/drawingml/2006/main" prst="rect">
-            <a:avLst/>
-          </a:prstGeom>
-        </p:spPr>
-        <p:txBody>
-          <a:bodyPr xmlns:a="http://schemas.openxmlformats.org/drawingml/2006/main" wrap="square" lIns="0" tIns="0" rIns="0" bIns="0" anchor="t">
-            <a:normAutofit fontScale="100000"/>
+          <a:prstGeom prst="rect">
+            <a:avLst/>
+          </a:prstGeom>
+        </p:spPr>
+        <p:txBody>
+          <a:bodyPr wrap="square" lIns="0" tIns="0" rIns="0" bIns="0" anchor="t">
+            <a:normAutofit/>
           </a:bodyPr>
-          <a:lstStyle xmlns:a="http://schemas.openxmlformats.org/drawingml/2006/main"/>
-          <a:p xmlns:a="http://schemas.openxmlformats.org/drawingml/2006/main">
+          <a:lstStyle/>
+          <a:p>
             <a:pPr algn="l">
               <a:buNone/>
               <a:defRPr sz="1575" b="0">
@@ -3850,14 +3604,14 @@
           <p:nvPr/>
         </p:nvCxnSpPr>
         <p:spPr>
-          <a:xfrm xmlns:a="http://schemas.openxmlformats.org/drawingml/2006/main">
+          <a:xfrm>
             <a:off x="2609850" y="2724150"/>
             <a:ext cx="571500" cy="9525"/>
           </a:xfrm>
-          <a:prstGeom xmlns:a="http://schemas.openxmlformats.org/drawingml/2006/main" prst="straightConnector1">
-            <a:avLst/>
-          </a:prstGeom>
-          <a:ln xmlns:a="http://schemas.openxmlformats.org/drawingml/2006/main" w="19050">
+          <a:prstGeom prst="straightConnector1">
+            <a:avLst/>
+          </a:prstGeom>
+          <a:ln w="19050">
             <a:solidFill>
               <a:srgbClr val="007FCB"/>
             </a:solidFill>
@@ -3872,14 +3626,14 @@
           <p:nvPr/>
         </p:nvCxnSpPr>
         <p:spPr>
-          <a:xfrm xmlns:a="http://schemas.openxmlformats.org/drawingml/2006/main">
+          <a:xfrm>
             <a:off x="5410200" y="2724150"/>
             <a:ext cx="571500" cy="9525"/>
           </a:xfrm>
-          <a:prstGeom xmlns:a="http://schemas.openxmlformats.org/drawingml/2006/main" prst="straightConnector1">
-            <a:avLst/>
-          </a:prstGeom>
-          <a:ln xmlns:a="http://schemas.openxmlformats.org/drawingml/2006/main" w="19050">
+          <a:prstGeom prst="straightConnector1">
+            <a:avLst/>
+          </a:prstGeom>
+          <a:ln w="19050">
             <a:solidFill>
               <a:srgbClr val="007FCB"/>
             </a:solidFill>
@@ -3894,14 +3648,14 @@
           <p:nvPr/>
         </p:nvCxnSpPr>
         <p:spPr>
-          <a:xfrm xmlns:a="http://schemas.openxmlformats.org/drawingml/2006/main">
+          <a:xfrm>
             <a:off x="8210550" y="2724150"/>
             <a:ext cx="571500" cy="9525"/>
           </a:xfrm>
-          <a:prstGeom xmlns:a="http://schemas.openxmlformats.org/drawingml/2006/main" prst="straightConnector1">
-            <a:avLst/>
-          </a:prstGeom>
-          <a:ln xmlns:a="http://schemas.openxmlformats.org/drawingml/2006/main" w="19050">
+          <a:prstGeom prst="straightConnector1">
+            <a:avLst/>
+          </a:prstGeom>
+          <a:ln w="19050">
             <a:solidFill>
               <a:srgbClr val="007FCB"/>
             </a:solidFill>
@@ -3912,172 +3666,200 @@
       <p:sp>
         <p:nvSpPr>
           <p:cNvPr id="8" name="arch-1">
-            <a:extLst xmlns:a="http://schemas.openxmlformats.org/drawingml/2006/main">
+            <a:extLst>
               <a:ext uri="{FF2B5EF4-FFF2-40B4-BE49-F238E27FC236}">
                 <a16:creationId xmlns:a16="http://schemas.microsoft.com/office/drawing/2014/main" id="{E31DA79F-3BCD-4D1F-A821-8E432F6E48A7}"/>
               </a:ext>
             </a:extLst>
           </p:cNvPr>
           <p:cNvSpPr>
-            <a:spLocks xmlns:a="http://schemas.openxmlformats.org/drawingml/2006/main" noGrp="1"/>
-          </p:cNvSpPr>
-          <p:nvPr/>
-        </p:nvSpPr>
-        <p:spPr>
-          <a:xfrm xmlns:a="http://schemas.openxmlformats.org/drawingml/2006/main">
+            <a:spLocks noGrp="1"/>
+          </p:cNvSpPr>
+          <p:nvPr/>
+        </p:nvSpPr>
+        <p:spPr>
+          <a:xfrm>
             <a:off x="400050" y="2095500"/>
             <a:ext cx="2095500" cy="1524000"/>
           </a:xfrm>
-          <a:prstGeom xmlns:a="http://schemas.openxmlformats.org/drawingml/2006/main" prst="roundRect">
+          <a:prstGeom prst="roundRect">
             <a:avLst>
               <a:gd name="adj" fmla="val 5000"/>
             </a:avLst>
           </a:prstGeom>
-          <a:solidFill xmlns:a="http://schemas.openxmlformats.org/drawingml/2006/main">
+          <a:solidFill>
             <a:srgbClr val="EAF8FD"/>
           </a:solidFill>
-          <a:ln xmlns:a="http://schemas.openxmlformats.org/drawingml/2006/main" w="9525">
+          <a:ln w="9525">
             <a:solidFill>
               <a:srgbClr val="BCE5F5"/>
             </a:solidFill>
             <a:prstDash val="solid"/>
           </a:ln>
         </p:spPr>
+        <p:txBody>
+          <a:bodyPr/>
+          <a:lstStyle/>
+          <a:p>
+            <a:endParaRPr lang="en-CN"/>
+          </a:p>
+        </p:txBody>
       </p:sp>
       <p:sp>
         <p:nvSpPr>
           <p:cNvPr id="9" name="arch-2">
-            <a:extLst xmlns:a="http://schemas.openxmlformats.org/drawingml/2006/main">
+            <a:extLst>
               <a:ext uri="{FF2B5EF4-FFF2-40B4-BE49-F238E27FC236}">
                 <a16:creationId xmlns:a16="http://schemas.microsoft.com/office/drawing/2014/main" id="{508DBC85-E9D5-417D-8DB4-D3B4D9E3FF9E}"/>
               </a:ext>
             </a:extLst>
           </p:cNvPr>
           <p:cNvSpPr>
-            <a:spLocks xmlns:a="http://schemas.openxmlformats.org/drawingml/2006/main" noGrp="1"/>
-          </p:cNvSpPr>
-          <p:nvPr/>
-        </p:nvSpPr>
-        <p:spPr>
-          <a:xfrm xmlns:a="http://schemas.openxmlformats.org/drawingml/2006/main">
+            <a:spLocks noGrp="1"/>
+          </p:cNvSpPr>
+          <p:nvPr/>
+        </p:nvSpPr>
+        <p:spPr>
+          <a:xfrm>
             <a:off x="3200400" y="2095500"/>
             <a:ext cx="2095500" cy="1524000"/>
           </a:xfrm>
-          <a:prstGeom xmlns:a="http://schemas.openxmlformats.org/drawingml/2006/main" prst="roundRect">
+          <a:prstGeom prst="roundRect">
             <a:avLst>
               <a:gd name="adj" fmla="val 5000"/>
             </a:avLst>
           </a:prstGeom>
-          <a:solidFill xmlns:a="http://schemas.openxmlformats.org/drawingml/2006/main">
+          <a:solidFill>
             <a:srgbClr val="EAF8FD"/>
           </a:solidFill>
-          <a:ln xmlns:a="http://schemas.openxmlformats.org/drawingml/2006/main" w="9525">
+          <a:ln w="9525">
             <a:solidFill>
               <a:srgbClr val="BCE5F5"/>
             </a:solidFill>
             <a:prstDash val="solid"/>
           </a:ln>
         </p:spPr>
+        <p:txBody>
+          <a:bodyPr/>
+          <a:lstStyle/>
+          <a:p>
+            <a:endParaRPr lang="en-CN"/>
+          </a:p>
+        </p:txBody>
       </p:sp>
       <p:sp>
         <p:nvSpPr>
           <p:cNvPr id="10" name="arch-3">
-            <a:extLst xmlns:a="http://schemas.openxmlformats.org/drawingml/2006/main">
+            <a:extLst>
               <a:ext uri="{FF2B5EF4-FFF2-40B4-BE49-F238E27FC236}">
                 <a16:creationId xmlns:a16="http://schemas.microsoft.com/office/drawing/2014/main" id="{696AC88F-0C1A-4020-89BA-5F157D99485F}"/>
               </a:ext>
             </a:extLst>
           </p:cNvPr>
           <p:cNvSpPr>
-            <a:spLocks xmlns:a="http://schemas.openxmlformats.org/drawingml/2006/main" noGrp="1"/>
-          </p:cNvSpPr>
-          <p:nvPr/>
-        </p:nvSpPr>
-        <p:spPr>
-          <a:xfrm xmlns:a="http://schemas.openxmlformats.org/drawingml/2006/main">
+            <a:spLocks noGrp="1"/>
+          </p:cNvSpPr>
+          <p:nvPr/>
+        </p:nvSpPr>
+        <p:spPr>
+          <a:xfrm>
             <a:off x="6000750" y="2095500"/>
             <a:ext cx="2095500" cy="1524000"/>
           </a:xfrm>
-          <a:prstGeom xmlns:a="http://schemas.openxmlformats.org/drawingml/2006/main" prst="roundRect">
+          <a:prstGeom prst="roundRect">
             <a:avLst>
               <a:gd name="adj" fmla="val 5000"/>
             </a:avLst>
           </a:prstGeom>
-          <a:solidFill xmlns:a="http://schemas.openxmlformats.org/drawingml/2006/main">
+          <a:solidFill>
             <a:srgbClr val="EAF8FD"/>
           </a:solidFill>
-          <a:ln xmlns:a="http://schemas.openxmlformats.org/drawingml/2006/main" w="9525">
+          <a:ln w="9525">
             <a:solidFill>
               <a:srgbClr val="BCE5F5"/>
             </a:solidFill>
             <a:prstDash val="solid"/>
           </a:ln>
         </p:spPr>
+        <p:txBody>
+          <a:bodyPr/>
+          <a:lstStyle/>
+          <a:p>
+            <a:endParaRPr lang="en-CN"/>
+          </a:p>
+        </p:txBody>
       </p:sp>
       <p:sp>
         <p:nvSpPr>
           <p:cNvPr id="11" name="arch-4">
-            <a:extLst xmlns:a="http://schemas.openxmlformats.org/drawingml/2006/main">
+            <a:extLst>
               <a:ext uri="{FF2B5EF4-FFF2-40B4-BE49-F238E27FC236}">
                 <a16:creationId xmlns:a16="http://schemas.microsoft.com/office/drawing/2014/main" id="{0FC85A9C-F8BE-43C6-B4B4-BA581CAB0454}"/>
               </a:ext>
             </a:extLst>
           </p:cNvPr>
           <p:cNvSpPr>
-            <a:spLocks xmlns:a="http://schemas.openxmlformats.org/drawingml/2006/main" noGrp="1"/>
-          </p:cNvSpPr>
-          <p:nvPr/>
-        </p:nvSpPr>
-        <p:spPr>
-          <a:xfrm xmlns:a="http://schemas.openxmlformats.org/drawingml/2006/main">
+            <a:spLocks noGrp="1"/>
+          </p:cNvSpPr>
+          <p:nvPr/>
+        </p:nvSpPr>
+        <p:spPr>
+          <a:xfrm>
             <a:off x="8801100" y="2095500"/>
             <a:ext cx="2990850" cy="1524000"/>
           </a:xfrm>
-          <a:prstGeom xmlns:a="http://schemas.openxmlformats.org/drawingml/2006/main" prst="roundRect">
+          <a:prstGeom prst="roundRect">
             <a:avLst>
               <a:gd name="adj" fmla="val 5000"/>
             </a:avLst>
           </a:prstGeom>
-          <a:solidFill xmlns:a="http://schemas.openxmlformats.org/drawingml/2006/main">
+          <a:solidFill>
             <a:srgbClr val="EAF8FD"/>
           </a:solidFill>
-          <a:ln xmlns:a="http://schemas.openxmlformats.org/drawingml/2006/main" w="9525">
+          <a:ln w="9525">
             <a:solidFill>
               <a:srgbClr val="BCE5F5"/>
             </a:solidFill>
             <a:prstDash val="solid"/>
           </a:ln>
         </p:spPr>
+        <p:txBody>
+          <a:bodyPr/>
+          <a:lstStyle/>
+          <a:p>
+            <a:endParaRPr lang="en-CN"/>
+          </a:p>
+        </p:txBody>
       </p:sp>
       <p:sp>
         <p:nvSpPr>
           <p:cNvPr id="12" name="arch-1-title">
-            <a:extLst xmlns:a="http://schemas.openxmlformats.org/drawingml/2006/main">
+            <a:extLst>
               <a:ext uri="{FF2B5EF4-FFF2-40B4-BE49-F238E27FC236}">
                 <a16:creationId xmlns:a16="http://schemas.microsoft.com/office/drawing/2014/main" id="{7EA55D94-24F0-4FBE-BF33-2BEBEB63D088}"/>
               </a:ext>
             </a:extLst>
           </p:cNvPr>
           <p:cNvSpPr>
-            <a:spLocks xmlns:a="http://schemas.openxmlformats.org/drawingml/2006/main" noGrp="1"/>
-          </p:cNvSpPr>
-          <p:nvPr/>
-        </p:nvSpPr>
-        <p:spPr>
-          <a:xfrm xmlns:a="http://schemas.openxmlformats.org/drawingml/2006/main">
+            <a:spLocks noGrp="1"/>
+          </p:cNvSpPr>
+          <p:nvPr/>
+        </p:nvSpPr>
+        <p:spPr>
+          <a:xfrm>
             <a:off x="628650" y="2343150"/>
             <a:ext cx="1524000" cy="285750"/>
           </a:xfrm>
-          <a:prstGeom xmlns:a="http://schemas.openxmlformats.org/drawingml/2006/main" prst="rect">
-            <a:avLst/>
-          </a:prstGeom>
-        </p:spPr>
-        <p:txBody>
-          <a:bodyPr xmlns:a="http://schemas.openxmlformats.org/drawingml/2006/main" wrap="square" lIns="0" tIns="0" rIns="0" bIns="0" anchor="t">
-            <a:normAutofit fontScale="100000"/>
+          <a:prstGeom prst="rect">
+            <a:avLst/>
+          </a:prstGeom>
+        </p:spPr>
+        <p:txBody>
+          <a:bodyPr wrap="square" lIns="0" tIns="0" rIns="0" bIns="0" anchor="t">
+            <a:normAutofit/>
           </a:bodyPr>
-          <a:lstStyle xmlns:a="http://schemas.openxmlformats.org/drawingml/2006/main"/>
-          <a:p xmlns:a="http://schemas.openxmlformats.org/drawingml/2006/main">
+          <a:lstStyle/>
+          <a:p>
             <a:pPr algn="l">
               <a:buNone/>
               <a:defRPr sz="1875" b="1">
@@ -4098,32 +3880,32 @@
       <p:sp>
         <p:nvSpPr>
           <p:cNvPr id="13" name="arch-1-body">
-            <a:extLst xmlns:a="http://schemas.openxmlformats.org/drawingml/2006/main">
+            <a:extLst>
               <a:ext uri="{FF2B5EF4-FFF2-40B4-BE49-F238E27FC236}">
                 <a16:creationId xmlns:a16="http://schemas.microsoft.com/office/drawing/2014/main" id="{1AF8DCA0-1CE5-4D94-9374-C185BDA0E9D8}"/>
               </a:ext>
             </a:extLst>
           </p:cNvPr>
           <p:cNvSpPr>
-            <a:spLocks xmlns:a="http://schemas.openxmlformats.org/drawingml/2006/main" noGrp="1"/>
-          </p:cNvSpPr>
-          <p:nvPr/>
-        </p:nvSpPr>
-        <p:spPr>
-          <a:xfrm xmlns:a="http://schemas.openxmlformats.org/drawingml/2006/main">
+            <a:spLocks noGrp="1"/>
+          </p:cNvSpPr>
+          <p:nvPr/>
+        </p:nvSpPr>
+        <p:spPr>
+          <a:xfrm>
             <a:off x="628650" y="2819400"/>
             <a:ext cx="1524000" cy="533400"/>
           </a:xfrm>
-          <a:prstGeom xmlns:a="http://schemas.openxmlformats.org/drawingml/2006/main" prst="rect">
-            <a:avLst/>
-          </a:prstGeom>
-        </p:spPr>
-        <p:txBody>
-          <a:bodyPr xmlns:a="http://schemas.openxmlformats.org/drawingml/2006/main" wrap="square" lIns="0" tIns="0" rIns="0" bIns="0" anchor="t">
-            <a:normAutofit fontScale="100000"/>
+          <a:prstGeom prst="rect">
+            <a:avLst/>
+          </a:prstGeom>
+        </p:spPr>
+        <p:txBody>
+          <a:bodyPr wrap="square" lIns="0" tIns="0" rIns="0" bIns="0" anchor="t">
+            <a:normAutofit/>
           </a:bodyPr>
-          <a:lstStyle xmlns:a="http://schemas.openxmlformats.org/drawingml/2006/main"/>
-          <a:p xmlns:a="http://schemas.openxmlformats.org/drawingml/2006/main">
+          <a:lstStyle/>
+          <a:p>
             <a:pPr algn="l">
               <a:buNone/>
               <a:defRPr sz="1350" b="0">
@@ -4145,32 +3927,32 @@
       <p:sp>
         <p:nvSpPr>
           <p:cNvPr id="14" name="arch-2-title">
-            <a:extLst xmlns:a="http://schemas.openxmlformats.org/drawingml/2006/main">
+            <a:extLst>
               <a:ext uri="{FF2B5EF4-FFF2-40B4-BE49-F238E27FC236}">
                 <a16:creationId xmlns:a16="http://schemas.microsoft.com/office/drawing/2014/main" id="{CCA59520-9BA5-4940-AA81-18E802041854}"/>
               </a:ext>
             </a:extLst>
           </p:cNvPr>
           <p:cNvSpPr>
-            <a:spLocks xmlns:a="http://schemas.openxmlformats.org/drawingml/2006/main" noGrp="1"/>
-          </p:cNvSpPr>
-          <p:nvPr/>
-        </p:nvSpPr>
-        <p:spPr>
-          <a:xfrm xmlns:a="http://schemas.openxmlformats.org/drawingml/2006/main">
+            <a:spLocks noGrp="1"/>
+          </p:cNvSpPr>
+          <p:nvPr/>
+        </p:nvSpPr>
+        <p:spPr>
+          <a:xfrm>
             <a:off x="3429000" y="2343150"/>
             <a:ext cx="1619250" cy="285750"/>
           </a:xfrm>
-          <a:prstGeom xmlns:a="http://schemas.openxmlformats.org/drawingml/2006/main" prst="rect">
-            <a:avLst/>
-          </a:prstGeom>
-        </p:spPr>
-        <p:txBody>
-          <a:bodyPr xmlns:a="http://schemas.openxmlformats.org/drawingml/2006/main" wrap="square" lIns="0" tIns="0" rIns="0" bIns="0" anchor="t">
-            <a:normAutofit fontScale="100000"/>
+          <a:prstGeom prst="rect">
+            <a:avLst/>
+          </a:prstGeom>
+        </p:spPr>
+        <p:txBody>
+          <a:bodyPr wrap="square" lIns="0" tIns="0" rIns="0" bIns="0" anchor="t">
+            <a:normAutofit/>
           </a:bodyPr>
-          <a:lstStyle xmlns:a="http://schemas.openxmlformats.org/drawingml/2006/main"/>
-          <a:p xmlns:a="http://schemas.openxmlformats.org/drawingml/2006/main">
+          <a:lstStyle/>
+          <a:p>
             <a:pPr algn="l">
               <a:buNone/>
               <a:defRPr sz="1875" b="1">
@@ -4191,32 +3973,32 @@
       <p:sp>
         <p:nvSpPr>
           <p:cNvPr id="15" name="arch-2-body">
-            <a:extLst xmlns:a="http://schemas.openxmlformats.org/drawingml/2006/main">
+            <a:extLst>
               <a:ext uri="{FF2B5EF4-FFF2-40B4-BE49-F238E27FC236}">
                 <a16:creationId xmlns:a16="http://schemas.microsoft.com/office/drawing/2014/main" id="{8C3E6508-1986-42F1-B895-5A436C24B583}"/>
               </a:ext>
             </a:extLst>
           </p:cNvPr>
           <p:cNvSpPr>
-            <a:spLocks xmlns:a="http://schemas.openxmlformats.org/drawingml/2006/main" noGrp="1"/>
-          </p:cNvSpPr>
-          <p:nvPr/>
-        </p:nvSpPr>
-        <p:spPr>
-          <a:xfrm xmlns:a="http://schemas.openxmlformats.org/drawingml/2006/main">
+            <a:spLocks noGrp="1"/>
+          </p:cNvSpPr>
+          <p:nvPr/>
+        </p:nvSpPr>
+        <p:spPr>
+          <a:xfrm>
             <a:off x="3429000" y="2819400"/>
             <a:ext cx="1619250" cy="533400"/>
           </a:xfrm>
-          <a:prstGeom xmlns:a="http://schemas.openxmlformats.org/drawingml/2006/main" prst="rect">
-            <a:avLst/>
-          </a:prstGeom>
-        </p:spPr>
-        <p:txBody>
-          <a:bodyPr xmlns:a="http://schemas.openxmlformats.org/drawingml/2006/main" wrap="square" lIns="0" tIns="0" rIns="0" bIns="0" anchor="t">
+          <a:prstGeom prst="rect">
+            <a:avLst/>
+          </a:prstGeom>
+        </p:spPr>
+        <p:txBody>
+          <a:bodyPr wrap="square" lIns="0" tIns="0" rIns="0" bIns="0" anchor="t">
             <a:normAutofit fontScale="87597"/>
           </a:bodyPr>
-          <a:lstStyle xmlns:a="http://schemas.openxmlformats.org/drawingml/2006/main"/>
-          <a:p xmlns:a="http://schemas.openxmlformats.org/drawingml/2006/main">
+          <a:lstStyle/>
+          <a:p>
             <a:pPr algn="l">
               <a:buNone/>
               <a:defRPr sz="1350" b="0">
@@ -4238,32 +4020,32 @@
       <p:sp>
         <p:nvSpPr>
           <p:cNvPr id="16" name="arch-3-title">
-            <a:extLst xmlns:a="http://schemas.openxmlformats.org/drawingml/2006/main">
+            <a:extLst>
               <a:ext uri="{FF2B5EF4-FFF2-40B4-BE49-F238E27FC236}">
                 <a16:creationId xmlns:a16="http://schemas.microsoft.com/office/drawing/2014/main" id="{C72C8011-5DBB-4867-9BAC-D8448CE4BADD}"/>
               </a:ext>
             </a:extLst>
           </p:cNvPr>
           <p:cNvSpPr>
-            <a:spLocks xmlns:a="http://schemas.openxmlformats.org/drawingml/2006/main" noGrp="1"/>
-          </p:cNvSpPr>
-          <p:nvPr/>
-        </p:nvSpPr>
-        <p:spPr>
-          <a:xfrm xmlns:a="http://schemas.openxmlformats.org/drawingml/2006/main">
+            <a:spLocks noGrp="1"/>
+          </p:cNvSpPr>
+          <p:nvPr/>
+        </p:nvSpPr>
+        <p:spPr>
+          <a:xfrm>
             <a:off x="6229350" y="2343150"/>
             <a:ext cx="1619250" cy="285750"/>
           </a:xfrm>
-          <a:prstGeom xmlns:a="http://schemas.openxmlformats.org/drawingml/2006/main" prst="rect">
-            <a:avLst/>
-          </a:prstGeom>
-        </p:spPr>
-        <p:txBody>
-          <a:bodyPr xmlns:a="http://schemas.openxmlformats.org/drawingml/2006/main" wrap="square" lIns="0" tIns="0" rIns="0" bIns="0" anchor="t">
-            <a:normAutofit fontScale="100000"/>
+          <a:prstGeom prst="rect">
+            <a:avLst/>
+          </a:prstGeom>
+        </p:spPr>
+        <p:txBody>
+          <a:bodyPr wrap="square" lIns="0" tIns="0" rIns="0" bIns="0" anchor="t">
+            <a:normAutofit/>
           </a:bodyPr>
-          <a:lstStyle xmlns:a="http://schemas.openxmlformats.org/drawingml/2006/main"/>
-          <a:p xmlns:a="http://schemas.openxmlformats.org/drawingml/2006/main">
+          <a:lstStyle/>
+          <a:p>
             <a:pPr algn="l">
               <a:buNone/>
               <a:defRPr sz="1875" b="1">
@@ -4284,32 +4066,32 @@
       <p:sp>
         <p:nvSpPr>
           <p:cNvPr id="17" name="arch-3-body">
-            <a:extLst xmlns:a="http://schemas.openxmlformats.org/drawingml/2006/main">
+            <a:extLst>
               <a:ext uri="{FF2B5EF4-FFF2-40B4-BE49-F238E27FC236}">
                 <a16:creationId xmlns:a16="http://schemas.microsoft.com/office/drawing/2014/main" id="{101A969B-CAE5-4ED7-903C-FA5FC8C5CB96}"/>
               </a:ext>
             </a:extLst>
           </p:cNvPr>
           <p:cNvSpPr>
-            <a:spLocks xmlns:a="http://schemas.openxmlformats.org/drawingml/2006/main" noGrp="1"/>
-          </p:cNvSpPr>
-          <p:nvPr/>
-        </p:nvSpPr>
-        <p:spPr>
-          <a:xfrm xmlns:a="http://schemas.openxmlformats.org/drawingml/2006/main">
+            <a:spLocks noGrp="1"/>
+          </p:cNvSpPr>
+          <p:nvPr/>
+        </p:nvSpPr>
+        <p:spPr>
+          <a:xfrm>
             <a:off x="6229350" y="2819400"/>
             <a:ext cx="1619250" cy="533400"/>
           </a:xfrm>
-          <a:prstGeom xmlns:a="http://schemas.openxmlformats.org/drawingml/2006/main" prst="rect">
-            <a:avLst/>
-          </a:prstGeom>
-        </p:spPr>
-        <p:txBody>
-          <a:bodyPr xmlns:a="http://schemas.openxmlformats.org/drawingml/2006/main" wrap="square" lIns="0" tIns="0" rIns="0" bIns="0" anchor="t">
-            <a:normAutofit fontScale="100000"/>
+          <a:prstGeom prst="rect">
+            <a:avLst/>
+          </a:prstGeom>
+        </p:spPr>
+        <p:txBody>
+          <a:bodyPr wrap="square" lIns="0" tIns="0" rIns="0" bIns="0" anchor="t">
+            <a:normAutofit/>
           </a:bodyPr>
-          <a:lstStyle xmlns:a="http://schemas.openxmlformats.org/drawingml/2006/main"/>
-          <a:p xmlns:a="http://schemas.openxmlformats.org/drawingml/2006/main">
+          <a:lstStyle/>
+          <a:p>
             <a:pPr algn="l">
               <a:buNone/>
               <a:defRPr sz="1350" b="0">
@@ -4331,32 +4113,32 @@
       <p:sp>
         <p:nvSpPr>
           <p:cNvPr id="18" name="arch-4-title">
-            <a:extLst xmlns:a="http://schemas.openxmlformats.org/drawingml/2006/main">
+            <a:extLst>
               <a:ext uri="{FF2B5EF4-FFF2-40B4-BE49-F238E27FC236}">
                 <a16:creationId xmlns:a16="http://schemas.microsoft.com/office/drawing/2014/main" id="{8D9F768C-C729-4D23-9294-43016FADF546}"/>
               </a:ext>
             </a:extLst>
           </p:cNvPr>
           <p:cNvSpPr>
-            <a:spLocks xmlns:a="http://schemas.openxmlformats.org/drawingml/2006/main" noGrp="1"/>
-          </p:cNvSpPr>
-          <p:nvPr/>
-        </p:nvSpPr>
-        <p:spPr>
-          <a:xfrm xmlns:a="http://schemas.openxmlformats.org/drawingml/2006/main">
+            <a:spLocks noGrp="1"/>
+          </p:cNvSpPr>
+          <p:nvPr/>
+        </p:nvSpPr>
+        <p:spPr>
+          <a:xfrm>
             <a:off x="9029700" y="2343150"/>
             <a:ext cx="2190750" cy="285750"/>
           </a:xfrm>
-          <a:prstGeom xmlns:a="http://schemas.openxmlformats.org/drawingml/2006/main" prst="rect">
-            <a:avLst/>
-          </a:prstGeom>
-        </p:spPr>
-        <p:txBody>
-          <a:bodyPr xmlns:a="http://schemas.openxmlformats.org/drawingml/2006/main" wrap="square" lIns="0" tIns="0" rIns="0" bIns="0" anchor="t">
-            <a:normAutofit fontScale="100000"/>
+          <a:prstGeom prst="rect">
+            <a:avLst/>
+          </a:prstGeom>
+        </p:spPr>
+        <p:txBody>
+          <a:bodyPr wrap="square" lIns="0" tIns="0" rIns="0" bIns="0" anchor="t">
+            <a:normAutofit/>
           </a:bodyPr>
-          <a:lstStyle xmlns:a="http://schemas.openxmlformats.org/drawingml/2006/main"/>
-          <a:p xmlns:a="http://schemas.openxmlformats.org/drawingml/2006/main">
+          <a:lstStyle/>
+          <a:p>
             <a:pPr algn="l">
               <a:buNone/>
               <a:defRPr sz="1875" b="1">
@@ -4377,32 +4159,32 @@
       <p:sp>
         <p:nvSpPr>
           <p:cNvPr id="19" name="arch-4-body">
-            <a:extLst xmlns:a="http://schemas.openxmlformats.org/drawingml/2006/main">
+            <a:extLst>
               <a:ext uri="{FF2B5EF4-FFF2-40B4-BE49-F238E27FC236}">
                 <a16:creationId xmlns:a16="http://schemas.microsoft.com/office/drawing/2014/main" id="{50178364-CBDA-4516-99C2-1178C4B9034A}"/>
               </a:ext>
             </a:extLst>
           </p:cNvPr>
           <p:cNvSpPr>
-            <a:spLocks xmlns:a="http://schemas.openxmlformats.org/drawingml/2006/main" noGrp="1"/>
-          </p:cNvSpPr>
-          <p:nvPr/>
-        </p:nvSpPr>
-        <p:spPr>
-          <a:xfrm xmlns:a="http://schemas.openxmlformats.org/drawingml/2006/main">
+            <a:spLocks noGrp="1"/>
+          </p:cNvSpPr>
+          <p:nvPr/>
+        </p:nvSpPr>
+        <p:spPr>
+          <a:xfrm>
             <a:off x="9029700" y="2819400"/>
             <a:ext cx="2381250" cy="533400"/>
           </a:xfrm>
-          <a:prstGeom xmlns:a="http://schemas.openxmlformats.org/drawingml/2006/main" prst="rect">
-            <a:avLst/>
-          </a:prstGeom>
-        </p:spPr>
-        <p:txBody>
-          <a:bodyPr xmlns:a="http://schemas.openxmlformats.org/drawingml/2006/main" wrap="square" lIns="0" tIns="0" rIns="0" bIns="0" anchor="t">
-            <a:normAutofit fontScale="100000"/>
+          <a:prstGeom prst="rect">
+            <a:avLst/>
+          </a:prstGeom>
+        </p:spPr>
+        <p:txBody>
+          <a:bodyPr wrap="square" lIns="0" tIns="0" rIns="0" bIns="0" anchor="t">
+            <a:normAutofit/>
           </a:bodyPr>
-          <a:lstStyle xmlns:a="http://schemas.openxmlformats.org/drawingml/2006/main"/>
-          <a:p xmlns:a="http://schemas.openxmlformats.org/drawingml/2006/main">
+          <a:lstStyle/>
+          <a:p>
             <a:pPr algn="l">
               <a:buNone/>
               <a:defRPr sz="1350" b="0">
@@ -4424,67 +4206,74 @@
       <p:sp>
         <p:nvSpPr>
           <p:cNvPr id="20" name="arch-base">
-            <a:extLst xmlns:a="http://schemas.openxmlformats.org/drawingml/2006/main">
+            <a:extLst>
               <a:ext uri="{FF2B5EF4-FFF2-40B4-BE49-F238E27FC236}">
                 <a16:creationId xmlns:a16="http://schemas.microsoft.com/office/drawing/2014/main" id="{C32D307B-343E-4FE6-913A-C4942E8325E5}"/>
               </a:ext>
             </a:extLst>
           </p:cNvPr>
           <p:cNvSpPr>
-            <a:spLocks xmlns:a="http://schemas.openxmlformats.org/drawingml/2006/main" noGrp="1"/>
-          </p:cNvSpPr>
-          <p:nvPr/>
-        </p:nvSpPr>
-        <p:spPr>
-          <a:xfrm xmlns:a="http://schemas.openxmlformats.org/drawingml/2006/main">
+            <a:spLocks noGrp="1"/>
+          </p:cNvSpPr>
+          <p:nvPr/>
+        </p:nvSpPr>
+        <p:spPr>
+          <a:xfrm>
             <a:off x="400050" y="4438650"/>
             <a:ext cx="11391900" cy="914400"/>
           </a:xfrm>
-          <a:prstGeom xmlns:a="http://schemas.openxmlformats.org/drawingml/2006/main" prst="roundRect">
+          <a:prstGeom prst="roundRect">
             <a:avLst>
               <a:gd name="adj" fmla="val 8333"/>
             </a:avLst>
           </a:prstGeom>
-          <a:solidFill xmlns:a="http://schemas.openxmlformats.org/drawingml/2006/main">
+          <a:solidFill>
             <a:srgbClr val="0C1826"/>
           </a:solidFill>
-          <a:ln xmlns:a="http://schemas.openxmlformats.org/drawingml/2006/main" w="9525">
+          <a:ln w="9525">
             <a:solidFill>
               <a:srgbClr val="0C1826"/>
             </a:solidFill>
             <a:prstDash val="solid"/>
           </a:ln>
         </p:spPr>
+        <p:txBody>
+          <a:bodyPr/>
+          <a:lstStyle/>
+          <a:p>
+            <a:endParaRPr lang="en-CN"/>
+          </a:p>
+        </p:txBody>
       </p:sp>
       <p:sp>
         <p:nvSpPr>
           <p:cNvPr id="21" name="arch-base-text">
-            <a:extLst xmlns:a="http://schemas.openxmlformats.org/drawingml/2006/main">
+            <a:extLst>
               <a:ext uri="{FF2B5EF4-FFF2-40B4-BE49-F238E27FC236}">
                 <a16:creationId xmlns:a16="http://schemas.microsoft.com/office/drawing/2014/main" id="{D2F11D3A-12E7-4986-9905-408F566F03EE}"/>
               </a:ext>
             </a:extLst>
           </p:cNvPr>
           <p:cNvSpPr>
-            <a:spLocks xmlns:a="http://schemas.openxmlformats.org/drawingml/2006/main" noGrp="1"/>
-          </p:cNvSpPr>
-          <p:nvPr/>
-        </p:nvSpPr>
-        <p:spPr>
-          <a:xfrm xmlns:a="http://schemas.openxmlformats.org/drawingml/2006/main">
+            <a:spLocks noGrp="1"/>
+          </p:cNvSpPr>
+          <p:nvPr/>
+        </p:nvSpPr>
+        <p:spPr>
+          <a:xfrm>
             <a:off x="704850" y="4695825"/>
             <a:ext cx="10001250" cy="304800"/>
           </a:xfrm>
-          <a:prstGeom xmlns:a="http://schemas.openxmlformats.org/drawingml/2006/main" prst="rect">
-            <a:avLst/>
-          </a:prstGeom>
-        </p:spPr>
-        <p:txBody>
-          <a:bodyPr xmlns:a="http://schemas.openxmlformats.org/drawingml/2006/main" wrap="square" lIns="0" tIns="0" rIns="0" bIns="0" anchor="t">
-            <a:normAutofit fontScale="100000"/>
+          <a:prstGeom prst="rect">
+            <a:avLst/>
+          </a:prstGeom>
+        </p:spPr>
+        <p:txBody>
+          <a:bodyPr wrap="square" lIns="0" tIns="0" rIns="0" bIns="0" anchor="t">
+            <a:normAutofit/>
           </a:bodyPr>
-          <a:lstStyle xmlns:a="http://schemas.openxmlformats.org/drawingml/2006/main"/>
-          <a:p xmlns:a="http://schemas.openxmlformats.org/drawingml/2006/main">
+          <a:lstStyle/>
+          <a:p>
             <a:pPr algn="l">
               <a:buNone/>
               <a:defRPr sz="1950" b="1">
@@ -4505,32 +4294,32 @@
       <p:sp>
         <p:nvSpPr>
           <p:cNvPr id="22" name="arch-footer">
-            <a:extLst xmlns:a="http://schemas.openxmlformats.org/drawingml/2006/main">
+            <a:extLst>
               <a:ext uri="{FF2B5EF4-FFF2-40B4-BE49-F238E27FC236}">
                 <a16:creationId xmlns:a16="http://schemas.microsoft.com/office/drawing/2014/main" id="{7FAA8260-8B1C-466D-BCDD-8A5577D385D4}"/>
               </a:ext>
             </a:extLst>
           </p:cNvPr>
           <p:cNvSpPr>
-            <a:spLocks xmlns:a="http://schemas.openxmlformats.org/drawingml/2006/main" noGrp="1"/>
-          </p:cNvSpPr>
-          <p:nvPr/>
-        </p:nvSpPr>
-        <p:spPr>
-          <a:xfrm xmlns:a="http://schemas.openxmlformats.org/drawingml/2006/main">
+            <a:spLocks noGrp="1"/>
+          </p:cNvSpPr>
+          <p:nvPr/>
+        </p:nvSpPr>
+        <p:spPr>
+          <a:xfrm>
             <a:off x="400050" y="5676900"/>
             <a:ext cx="10477500" cy="323850"/>
           </a:xfrm>
-          <a:prstGeom xmlns:a="http://schemas.openxmlformats.org/drawingml/2006/main" prst="rect">
-            <a:avLst/>
-          </a:prstGeom>
-        </p:spPr>
-        <p:txBody>
-          <a:bodyPr xmlns:a="http://schemas.openxmlformats.org/drawingml/2006/main" wrap="square" lIns="0" tIns="0" rIns="0" bIns="0" anchor="t">
-            <a:normAutofit fontScale="100000"/>
+          <a:prstGeom prst="rect">
+            <a:avLst/>
+          </a:prstGeom>
+        </p:spPr>
+        <p:txBody>
+          <a:bodyPr wrap="square" lIns="0" tIns="0" rIns="0" bIns="0" anchor="t">
+            <a:normAutofit/>
           </a:bodyPr>
-          <a:lstStyle xmlns:a="http://schemas.openxmlformats.org/drawingml/2006/main"/>
-          <a:p xmlns:a="http://schemas.openxmlformats.org/drawingml/2006/main">
+          <a:lstStyle/>
+          <a:p>
             <a:pPr algn="l">
               <a:buNone/>
               <a:defRPr sz="1500" b="0">
@@ -4555,17 +4344,21 @@
       </p:ext>
     </p:extLst>
   </p:cSld>
+  <p:clrMapOvr>
+    <a:masterClrMapping/>
+  </p:clrMapOvr>
 </p:sld>
 </file>
 
 <file path=ppt/slides/slide5.xml><?xml version="1.0" encoding="utf-8"?>
-<p:sld xmlns:p="http://schemas.openxmlformats.org/presentationml/2006/main">
+<p:sld xmlns:a="http://schemas.openxmlformats.org/drawingml/2006/main" xmlns:r="http://schemas.openxmlformats.org/officeDocument/2006/relationships" xmlns:p="http://schemas.openxmlformats.org/presentationml/2006/main">
   <p:cSld>
     <p:bg>
       <p:bgPr>
-        <a:solidFill xmlns:a="http://schemas.openxmlformats.org/drawingml/2006/main">
+        <a:solidFill>
           <a:srgbClr val="FFFFFF"/>
         </a:solidFill>
+        <a:effectLst/>
       </p:bgPr>
     </p:bg>
     <p:spTree>
@@ -4575,7 +4368,12 @@
         <p:nvPr/>
       </p:nvGrpSpPr>
       <p:grpSpPr>
-        <a:xfrm xmlns:a="http://schemas.openxmlformats.org/drawingml/2006/main"/>
+        <a:xfrm>
+          <a:off x="0" y="0"/>
+          <a:ext cx="0" cy="0"/>
+          <a:chOff x="0" y="0"/>
+          <a:chExt cx="0" cy="0"/>
+        </a:xfrm>
       </p:grpSpPr>
       <p:cxnSp>
         <p:nvCxnSpPr>
@@ -4584,14 +4382,14 @@
           <p:nvPr/>
         </p:nvCxnSpPr>
         <p:spPr>
-          <a:xfrm xmlns:a="http://schemas.openxmlformats.org/drawingml/2006/main">
+          <a:xfrm>
             <a:off x="400050" y="295275"/>
             <a:ext cx="11391900" cy="9525"/>
           </a:xfrm>
-          <a:prstGeom xmlns:a="http://schemas.openxmlformats.org/drawingml/2006/main" prst="straightConnector1">
-            <a:avLst/>
-          </a:prstGeom>
-          <a:ln xmlns:a="http://schemas.openxmlformats.org/drawingml/2006/main" w="9525">
+          <a:prstGeom prst="straightConnector1">
+            <a:avLst/>
+          </a:prstGeom>
+          <a:ln w="9525">
             <a:solidFill>
               <a:srgbClr val="C7D0DA"/>
             </a:solidFill>
@@ -4602,32 +4400,32 @@
       <p:sp>
         <p:nvSpPr>
           <p:cNvPr id="2" name="page-number">
-            <a:extLst xmlns:a="http://schemas.openxmlformats.org/drawingml/2006/main">
+            <a:extLst>
               <a:ext uri="{FF2B5EF4-FFF2-40B4-BE49-F238E27FC236}">
                 <a16:creationId xmlns:a16="http://schemas.microsoft.com/office/drawing/2014/main" id="{30C69F98-AA83-456F-A653-6AA3111ECAA5}"/>
               </a:ext>
             </a:extLst>
           </p:cNvPr>
           <p:cNvSpPr>
-            <a:spLocks xmlns:a="http://schemas.openxmlformats.org/drawingml/2006/main" noGrp="1"/>
-          </p:cNvSpPr>
-          <p:nvPr/>
-        </p:nvSpPr>
-        <p:spPr>
-          <a:xfrm xmlns:a="http://schemas.openxmlformats.org/drawingml/2006/main">
+            <a:spLocks noGrp="1"/>
+          </p:cNvSpPr>
+          <p:nvPr/>
+        </p:nvSpPr>
+        <p:spPr>
+          <a:xfrm>
             <a:off x="11125200" y="6305550"/>
             <a:ext cx="666750" cy="209550"/>
           </a:xfrm>
-          <a:prstGeom xmlns:a="http://schemas.openxmlformats.org/drawingml/2006/main" prst="rect">
-            <a:avLst/>
-          </a:prstGeom>
-        </p:spPr>
-        <p:txBody>
-          <a:bodyPr xmlns:a="http://schemas.openxmlformats.org/drawingml/2006/main" wrap="square" lIns="0" tIns="0" rIns="0" bIns="0" anchor="t">
-            <a:normAutofit fontScale="100000"/>
+          <a:prstGeom prst="rect">
+            <a:avLst/>
+          </a:prstGeom>
+        </p:spPr>
+        <p:txBody>
+          <a:bodyPr wrap="square" lIns="0" tIns="0" rIns="0" bIns="0" anchor="t">
+            <a:normAutofit/>
           </a:bodyPr>
-          <a:lstStyle xmlns:a="http://schemas.openxmlformats.org/drawingml/2006/main"/>
-          <a:p xmlns:a="http://schemas.openxmlformats.org/drawingml/2006/main">
+          <a:lstStyle/>
+          <a:p>
             <a:pPr algn="r">
               <a:buNone/>
               <a:defRPr sz="975" b="0">
@@ -4648,32 +4446,32 @@
       <p:sp>
         <p:nvSpPr>
           <p:cNvPr id="3" name="verification-title">
-            <a:extLst xmlns:a="http://schemas.openxmlformats.org/drawingml/2006/main">
+            <a:extLst>
               <a:ext uri="{FF2B5EF4-FFF2-40B4-BE49-F238E27FC236}">
                 <a16:creationId xmlns:a16="http://schemas.microsoft.com/office/drawing/2014/main" id="{3619A76C-48B9-49AE-9CDF-489DDCCEA81C}"/>
               </a:ext>
             </a:extLst>
           </p:cNvPr>
           <p:cNvSpPr>
-            <a:spLocks xmlns:a="http://schemas.openxmlformats.org/drawingml/2006/main" noGrp="1"/>
-          </p:cNvSpPr>
-          <p:nvPr/>
-        </p:nvSpPr>
-        <p:spPr>
-          <a:xfrm xmlns:a="http://schemas.openxmlformats.org/drawingml/2006/main">
+            <a:spLocks noGrp="1"/>
+          </p:cNvSpPr>
+          <p:nvPr/>
+        </p:nvSpPr>
+        <p:spPr>
+          <a:xfrm>
             <a:off x="400050" y="590550"/>
             <a:ext cx="10668000" cy="552450"/>
           </a:xfrm>
-          <a:prstGeom xmlns:a="http://schemas.openxmlformats.org/drawingml/2006/main" prst="rect">
-            <a:avLst/>
-          </a:prstGeom>
-        </p:spPr>
-        <p:txBody>
-          <a:bodyPr xmlns:a="http://schemas.openxmlformats.org/drawingml/2006/main" wrap="square" lIns="0" tIns="0" rIns="0" bIns="0" anchor="t">
-            <a:normAutofit fontScale="100000"/>
+          <a:prstGeom prst="rect">
+            <a:avLst/>
+          </a:prstGeom>
+        </p:spPr>
+        <p:txBody>
+          <a:bodyPr wrap="square" lIns="0" tIns="0" rIns="0" bIns="0" anchor="t">
+            <a:normAutofit/>
           </a:bodyPr>
-          <a:lstStyle xmlns:a="http://schemas.openxmlformats.org/drawingml/2006/main"/>
-          <a:p xmlns:a="http://schemas.openxmlformats.org/drawingml/2006/main">
+          <a:lstStyle/>
+          <a:p>
             <a:pPr algn="l">
               <a:buNone/>
               <a:defRPr sz="2925" b="1">
@@ -4694,32 +4492,32 @@
       <p:sp>
         <p:nvSpPr>
           <p:cNvPr id="4" name="verification-subtitle">
-            <a:extLst xmlns:a="http://schemas.openxmlformats.org/drawingml/2006/main">
+            <a:extLst>
               <a:ext uri="{FF2B5EF4-FFF2-40B4-BE49-F238E27FC236}">
                 <a16:creationId xmlns:a16="http://schemas.microsoft.com/office/drawing/2014/main" id="{C8A4088C-8123-47A7-A165-059F73973DF0}"/>
               </a:ext>
             </a:extLst>
           </p:cNvPr>
           <p:cNvSpPr>
-            <a:spLocks xmlns:a="http://schemas.openxmlformats.org/drawingml/2006/main" noGrp="1"/>
-          </p:cNvSpPr>
-          <p:nvPr/>
-        </p:nvSpPr>
-        <p:spPr>
-          <a:xfrm xmlns:a="http://schemas.openxmlformats.org/drawingml/2006/main">
+            <a:spLocks noGrp="1"/>
+          </p:cNvSpPr>
+          <p:nvPr/>
+        </p:nvSpPr>
+        <p:spPr>
+          <a:xfrm>
             <a:off x="400050" y="1266825"/>
             <a:ext cx="10477500" cy="304800"/>
           </a:xfrm>
-          <a:prstGeom xmlns:a="http://schemas.openxmlformats.org/drawingml/2006/main" prst="rect">
-            <a:avLst/>
-          </a:prstGeom>
-        </p:spPr>
-        <p:txBody>
-          <a:bodyPr xmlns:a="http://schemas.openxmlformats.org/drawingml/2006/main" wrap="square" lIns="0" tIns="0" rIns="0" bIns="0" anchor="t">
-            <a:normAutofit fontScale="100000"/>
+          <a:prstGeom prst="rect">
+            <a:avLst/>
+          </a:prstGeom>
+        </p:spPr>
+        <p:txBody>
+          <a:bodyPr wrap="square" lIns="0" tIns="0" rIns="0" bIns="0" anchor="t">
+            <a:normAutofit/>
           </a:bodyPr>
-          <a:lstStyle xmlns:a="http://schemas.openxmlformats.org/drawingml/2006/main"/>
-          <a:p xmlns:a="http://schemas.openxmlformats.org/drawingml/2006/main">
+          <a:lstStyle/>
+          <a:p>
             <a:pPr algn="l">
               <a:buNone/>
               <a:defRPr sz="1500" b="0">
@@ -4744,17 +4542,35 @@
           <p:nvPr/>
         </p:nvGraphicFramePr>
         <p:xfrm>
-          <a:off xmlns:a="http://schemas.openxmlformats.org/drawingml/2006/main" x="400050" y="1885950"/>
-          <a:ext xmlns:a="http://schemas.openxmlformats.org/drawingml/2006/main" cx="11391900" cy="2209800"/>
+          <a:off x="400050" y="1885950"/>
+          <a:ext cx="11391900" cy="2209800"/>
         </p:xfrm>
-        <a:graphic xmlns:a="http://schemas.openxmlformats.org/drawingml/2006/main">
+        <a:graphic>
           <a:graphicData uri="http://schemas.openxmlformats.org/drawingml/2006/table">
             <a:tbl>
               <a:tblPr/>
               <a:tblGrid>
-                <a:gridCol w="1809750"/>
-                <a:gridCol w="5429250"/>
-                <a:gridCol w="4152900"/>
+                <a:gridCol w="1809750">
+                  <a:extLst>
+                    <a:ext uri="{9D8B030D-6E8A-4147-A177-3AD203B41FA5}">
+                      <a16:colId xmlns:a16="http://schemas.microsoft.com/office/drawing/2014/main" val="20000"/>
+                    </a:ext>
+                  </a:extLst>
+                </a:gridCol>
+                <a:gridCol w="5429250">
+                  <a:extLst>
+                    <a:ext uri="{9D8B030D-6E8A-4147-A177-3AD203B41FA5}">
+                      <a16:colId xmlns:a16="http://schemas.microsoft.com/office/drawing/2014/main" val="20001"/>
+                    </a:ext>
+                  </a:extLst>
+                </a:gridCol>
+                <a:gridCol w="4152900">
+                  <a:extLst>
+                    <a:ext uri="{9D8B030D-6E8A-4147-A177-3AD203B41FA5}">
+                      <a16:colId xmlns:a16="http://schemas.microsoft.com/office/drawing/2014/main" val="20002"/>
+                    </a:ext>
+                  </a:extLst>
+                </a:gridCol>
               </a:tblGrid>
               <a:tr h="441960">
                 <a:tc>
@@ -4767,7 +4583,7 @@
                       </a:r>
                     </a:p>
                   </a:txBody>
-                  <a:tcPr marL="91440" marR="91440" marT="45720" marB="45720"/>
+                  <a:tcPr/>
                 </a:tc>
                 <a:tc>
                   <a:txBody>
@@ -4779,7 +4595,7 @@
                       </a:r>
                     </a:p>
                   </a:txBody>
-                  <a:tcPr marL="91440" marR="91440" marT="45720" marB="45720"/>
+                  <a:tcPr/>
                 </a:tc>
                 <a:tc>
                   <a:txBody>
@@ -4791,8 +4607,13 @@
                       </a:r>
                     </a:p>
                   </a:txBody>
-                  <a:tcPr marL="91440" marR="91440" marT="45720" marB="45720"/>
+                  <a:tcPr/>
                 </a:tc>
+                <a:extLst>
+                  <a:ext uri="{0D108BD9-81ED-4DB2-BD59-A6C34878D82A}">
+                    <a16:rowId xmlns:a16="http://schemas.microsoft.com/office/drawing/2014/main" val="10000"/>
+                  </a:ext>
+                </a:extLst>
               </a:tr>
               <a:tr h="441960">
                 <a:tc>
@@ -4805,7 +4626,7 @@
                       </a:r>
                     </a:p>
                   </a:txBody>
-                  <a:tcPr marL="91440" marR="91440" marT="45720" marB="45720"/>
+                  <a:tcPr/>
                 </a:tc>
                 <a:tc>
                   <a:txBody>
@@ -4817,7 +4638,7 @@
                       </a:r>
                     </a:p>
                   </a:txBody>
-                  <a:tcPr marL="91440" marR="91440" marT="45720" marB="45720"/>
+                  <a:tcPr/>
                 </a:tc>
                 <a:tc>
                   <a:txBody>
@@ -4829,8 +4650,13 @@
                       </a:r>
                     </a:p>
                   </a:txBody>
-                  <a:tcPr marL="91440" marR="91440" marT="45720" marB="45720"/>
+                  <a:tcPr/>
                 </a:tc>
+                <a:extLst>
+                  <a:ext uri="{0D108BD9-81ED-4DB2-BD59-A6C34878D82A}">
+                    <a16:rowId xmlns:a16="http://schemas.microsoft.com/office/drawing/2014/main" val="10001"/>
+                  </a:ext>
+                </a:extLst>
               </a:tr>
               <a:tr h="441960">
                 <a:tc>
@@ -4843,7 +4669,7 @@
                       </a:r>
                     </a:p>
                   </a:txBody>
-                  <a:tcPr marL="91440" marR="91440" marT="45720" marB="45720"/>
+                  <a:tcPr/>
                 </a:tc>
                 <a:tc>
                   <a:txBody>
@@ -4855,7 +4681,7 @@
                       </a:r>
                     </a:p>
                   </a:txBody>
-                  <a:tcPr marL="91440" marR="91440" marT="45720" marB="45720"/>
+                  <a:tcPr/>
                 </a:tc>
                 <a:tc>
                   <a:txBody>
@@ -4867,8 +4693,13 @@
                       </a:r>
                     </a:p>
                   </a:txBody>
-                  <a:tcPr marL="91440" marR="91440" marT="45720" marB="45720"/>
+                  <a:tcPr/>
                 </a:tc>
+                <a:extLst>
+                  <a:ext uri="{0D108BD9-81ED-4DB2-BD59-A6C34878D82A}">
+                    <a16:rowId xmlns:a16="http://schemas.microsoft.com/office/drawing/2014/main" val="10002"/>
+                  </a:ext>
+                </a:extLst>
               </a:tr>
               <a:tr h="441960">
                 <a:tc>
@@ -4881,7 +4712,7 @@
                       </a:r>
                     </a:p>
                   </a:txBody>
-                  <a:tcPr marL="91440" marR="91440" marT="45720" marB="45720"/>
+                  <a:tcPr/>
                 </a:tc>
                 <a:tc>
                   <a:txBody>
@@ -4893,7 +4724,7 @@
                       </a:r>
                     </a:p>
                   </a:txBody>
-                  <a:tcPr marL="91440" marR="91440" marT="45720" marB="45720"/>
+                  <a:tcPr/>
                 </a:tc>
                 <a:tc>
                   <a:txBody>
@@ -4905,8 +4736,13 @@
                       </a:r>
                     </a:p>
                   </a:txBody>
-                  <a:tcPr marL="91440" marR="91440" marT="45720" marB="45720"/>
+                  <a:tcPr/>
                 </a:tc>
+                <a:extLst>
+                  <a:ext uri="{0D108BD9-81ED-4DB2-BD59-A6C34878D82A}">
+                    <a16:rowId xmlns:a16="http://schemas.microsoft.com/office/drawing/2014/main" val="10003"/>
+                  </a:ext>
+                </a:extLst>
               </a:tr>
               <a:tr h="441960">
                 <a:tc>
@@ -4919,7 +4755,7 @@
                       </a:r>
                     </a:p>
                   </a:txBody>
-                  <a:tcPr marL="91440" marR="91440" marT="45720" marB="45720"/>
+                  <a:tcPr/>
                 </a:tc>
                 <a:tc>
                   <a:txBody>
@@ -4931,7 +4767,7 @@
                       </a:r>
                     </a:p>
                   </a:txBody>
-                  <a:tcPr marL="91440" marR="91440" marT="45720" marB="45720"/>
+                  <a:tcPr/>
                 </a:tc>
                 <a:tc>
                   <a:txBody>
@@ -4943,8 +4779,13 @@
                       </a:r>
                     </a:p>
                   </a:txBody>
-                  <a:tcPr marL="91440" marR="91440" marT="45720" marB="45720"/>
+                  <a:tcPr/>
                 </a:tc>
+                <a:extLst>
+                  <a:ext uri="{0D108BD9-81ED-4DB2-BD59-A6C34878D82A}">
+                    <a16:rowId xmlns:a16="http://schemas.microsoft.com/office/drawing/2014/main" val="10004"/>
+                  </a:ext>
+                </a:extLst>
               </a:tr>
             </a:tbl>
           </a:graphicData>
@@ -4953,67 +4794,74 @@
       <p:sp>
         <p:nvSpPr>
           <p:cNvPr id="6" name="terminal">
-            <a:extLst xmlns:a="http://schemas.openxmlformats.org/drawingml/2006/main">
+            <a:extLst>
               <a:ext uri="{FF2B5EF4-FFF2-40B4-BE49-F238E27FC236}">
                 <a16:creationId xmlns:a16="http://schemas.microsoft.com/office/drawing/2014/main" id="{65EB9E6E-ABDA-49CD-B22B-D43AF11B7F09}"/>
               </a:ext>
             </a:extLst>
           </p:cNvPr>
           <p:cNvSpPr>
-            <a:spLocks xmlns:a="http://schemas.openxmlformats.org/drawingml/2006/main" noGrp="1"/>
-          </p:cNvSpPr>
-          <p:nvPr/>
-        </p:nvSpPr>
-        <p:spPr>
-          <a:xfrm xmlns:a="http://schemas.openxmlformats.org/drawingml/2006/main">
+            <a:spLocks noGrp="1"/>
+          </p:cNvSpPr>
+          <p:nvPr/>
+        </p:nvSpPr>
+        <p:spPr>
+          <a:xfrm>
             <a:off x="400050" y="4457700"/>
             <a:ext cx="7429500" cy="1428750"/>
           </a:xfrm>
-          <a:prstGeom xmlns:a="http://schemas.openxmlformats.org/drawingml/2006/main" prst="roundRect">
+          <a:prstGeom prst="roundRect">
             <a:avLst>
               <a:gd name="adj" fmla="val 5333"/>
             </a:avLst>
           </a:prstGeom>
-          <a:solidFill xmlns:a="http://schemas.openxmlformats.org/drawingml/2006/main">
+          <a:solidFill>
             <a:srgbClr val="0C1826"/>
           </a:solidFill>
-          <a:ln xmlns:a="http://schemas.openxmlformats.org/drawingml/2006/main" w="9525">
+          <a:ln w="9525">
             <a:solidFill>
               <a:srgbClr val="0C1826"/>
             </a:solidFill>
             <a:prstDash val="solid"/>
           </a:ln>
         </p:spPr>
+        <p:txBody>
+          <a:bodyPr/>
+          <a:lstStyle/>
+          <a:p>
+            <a:endParaRPr lang="en-CN"/>
+          </a:p>
+        </p:txBody>
       </p:sp>
       <p:sp>
         <p:nvSpPr>
           <p:cNvPr id="7" name="terminal-head">
-            <a:extLst xmlns:a="http://schemas.openxmlformats.org/drawingml/2006/main">
+            <a:extLst>
               <a:ext uri="{FF2B5EF4-FFF2-40B4-BE49-F238E27FC236}">
                 <a16:creationId xmlns:a16="http://schemas.microsoft.com/office/drawing/2014/main" id="{EF622573-62C4-4A7D-B43A-A58B829891CA}"/>
               </a:ext>
             </a:extLst>
           </p:cNvPr>
           <p:cNvSpPr>
-            <a:spLocks xmlns:a="http://schemas.openxmlformats.org/drawingml/2006/main" noGrp="1"/>
-          </p:cNvSpPr>
-          <p:nvPr/>
-        </p:nvSpPr>
-        <p:spPr>
-          <a:xfrm xmlns:a="http://schemas.openxmlformats.org/drawingml/2006/main">
+            <a:spLocks noGrp="1"/>
+          </p:cNvSpPr>
+          <p:nvPr/>
+        </p:nvSpPr>
+        <p:spPr>
+          <a:xfrm>
             <a:off x="666750" y="4667250"/>
             <a:ext cx="2667000" cy="209550"/>
           </a:xfrm>
-          <a:prstGeom xmlns:a="http://schemas.openxmlformats.org/drawingml/2006/main" prst="rect">
-            <a:avLst/>
-          </a:prstGeom>
-        </p:spPr>
-        <p:txBody>
-          <a:bodyPr xmlns:a="http://schemas.openxmlformats.org/drawingml/2006/main" wrap="square" lIns="0" tIns="0" rIns="0" bIns="0" anchor="t">
-            <a:normAutofit fontScale="100000"/>
+          <a:prstGeom prst="rect">
+            <a:avLst/>
+          </a:prstGeom>
+        </p:spPr>
+        <p:txBody>
+          <a:bodyPr wrap="square" lIns="0" tIns="0" rIns="0" bIns="0" anchor="t">
+            <a:normAutofit/>
           </a:bodyPr>
-          <a:lstStyle xmlns:a="http://schemas.openxmlformats.org/drawingml/2006/main"/>
-          <a:p xmlns:a="http://schemas.openxmlformats.org/drawingml/2006/main">
+          <a:lstStyle/>
+          <a:p>
             <a:pPr algn="l">
               <a:buNone/>
               <a:defRPr sz="1125" b="1">
@@ -5034,32 +4882,32 @@
       <p:sp>
         <p:nvSpPr>
           <p:cNvPr id="8" name="terminal-code">
-            <a:extLst xmlns:a="http://schemas.openxmlformats.org/drawingml/2006/main">
+            <a:extLst>
               <a:ext uri="{FF2B5EF4-FFF2-40B4-BE49-F238E27FC236}">
                 <a16:creationId xmlns:a16="http://schemas.microsoft.com/office/drawing/2014/main" id="{B1FDFBAF-E13F-470A-A381-7539DE0F19E5}"/>
               </a:ext>
             </a:extLst>
           </p:cNvPr>
           <p:cNvSpPr>
-            <a:spLocks xmlns:a="http://schemas.openxmlformats.org/drawingml/2006/main" noGrp="1"/>
-          </p:cNvSpPr>
-          <p:nvPr/>
-        </p:nvSpPr>
-        <p:spPr>
-          <a:xfrm xmlns:a="http://schemas.openxmlformats.org/drawingml/2006/main">
+            <a:spLocks noGrp="1"/>
+          </p:cNvSpPr>
+          <p:nvPr/>
+        </p:nvSpPr>
+        <p:spPr>
+          <a:xfrm>
             <a:off x="666750" y="5010150"/>
             <a:ext cx="6667500" cy="685800"/>
           </a:xfrm>
-          <a:prstGeom xmlns:a="http://schemas.openxmlformats.org/drawingml/2006/main" prst="rect">
-            <a:avLst/>
-          </a:prstGeom>
-        </p:spPr>
-        <p:txBody>
-          <a:bodyPr xmlns:a="http://schemas.openxmlformats.org/drawingml/2006/main" wrap="square" lIns="0" tIns="0" rIns="0" bIns="0" anchor="t">
-            <a:normAutofit fontScale="100000"/>
+          <a:prstGeom prst="rect">
+            <a:avLst/>
+          </a:prstGeom>
+        </p:spPr>
+        <p:txBody>
+          <a:bodyPr wrap="square" lIns="0" tIns="0" rIns="0" bIns="0" anchor="t">
+            <a:normAutofit/>
           </a:bodyPr>
-          <a:lstStyle xmlns:a="http://schemas.openxmlformats.org/drawingml/2006/main"/>
-          <a:p xmlns:a="http://schemas.openxmlformats.org/drawingml/2006/main">
+          <a:lstStyle/>
+          <a:p>
             <a:pPr algn="l">
               <a:buNone/>
               <a:defRPr sz="1500" b="0">
@@ -5082,67 +4930,74 @@
       <p:sp>
         <p:nvSpPr>
           <p:cNvPr id="9" name="ci-proof">
-            <a:extLst xmlns:a="http://schemas.openxmlformats.org/drawingml/2006/main">
+            <a:extLst>
               <a:ext uri="{FF2B5EF4-FFF2-40B4-BE49-F238E27FC236}">
                 <a16:creationId xmlns:a16="http://schemas.microsoft.com/office/drawing/2014/main" id="{77545F42-2D07-4291-A449-AFD3D27960C8}"/>
               </a:ext>
             </a:extLst>
           </p:cNvPr>
           <p:cNvSpPr>
-            <a:spLocks xmlns:a="http://schemas.openxmlformats.org/drawingml/2006/main" noGrp="1"/>
-          </p:cNvSpPr>
-          <p:nvPr/>
-        </p:nvSpPr>
-        <p:spPr>
-          <a:xfrm xmlns:a="http://schemas.openxmlformats.org/drawingml/2006/main">
+            <a:spLocks noGrp="1"/>
+          </p:cNvSpPr>
+          <p:nvPr/>
+        </p:nvSpPr>
+        <p:spPr>
+          <a:xfrm>
             <a:off x="8172450" y="4457700"/>
             <a:ext cx="3619500" cy="1428750"/>
           </a:xfrm>
-          <a:prstGeom xmlns:a="http://schemas.openxmlformats.org/drawingml/2006/main" prst="roundRect">
+          <a:prstGeom prst="roundRect">
             <a:avLst>
               <a:gd name="adj" fmla="val 5333"/>
             </a:avLst>
           </a:prstGeom>
-          <a:solidFill xmlns:a="http://schemas.openxmlformats.org/drawingml/2006/main">
+          <a:solidFill>
             <a:srgbClr val="EAF8FD"/>
           </a:solidFill>
-          <a:ln xmlns:a="http://schemas.openxmlformats.org/drawingml/2006/main" w="9525">
+          <a:ln w="9525">
             <a:solidFill>
               <a:srgbClr val="BCE5F5"/>
             </a:solidFill>
             <a:prstDash val="solid"/>
           </a:ln>
         </p:spPr>
+        <p:txBody>
+          <a:bodyPr/>
+          <a:lstStyle/>
+          <a:p>
+            <a:endParaRPr lang="en-CN"/>
+          </a:p>
+        </p:txBody>
       </p:sp>
       <p:sp>
         <p:nvSpPr>
           <p:cNvPr id="10" name="ci-proof-head">
-            <a:extLst xmlns:a="http://schemas.openxmlformats.org/drawingml/2006/main">
+            <a:extLst>
               <a:ext uri="{FF2B5EF4-FFF2-40B4-BE49-F238E27FC236}">
                 <a16:creationId xmlns:a16="http://schemas.microsoft.com/office/drawing/2014/main" id="{7C53A09E-7D84-426C-AE00-8B88CC362BA7}"/>
               </a:ext>
             </a:extLst>
           </p:cNvPr>
           <p:cNvSpPr>
-            <a:spLocks xmlns:a="http://schemas.openxmlformats.org/drawingml/2006/main" noGrp="1"/>
-          </p:cNvSpPr>
-          <p:nvPr/>
-        </p:nvSpPr>
-        <p:spPr>
-          <a:xfrm xmlns:a="http://schemas.openxmlformats.org/drawingml/2006/main">
+            <a:spLocks noGrp="1"/>
+          </p:cNvSpPr>
+          <p:nvPr/>
+        </p:nvSpPr>
+        <p:spPr>
+          <a:xfrm>
             <a:off x="8477250" y="4686300"/>
             <a:ext cx="2762250" cy="266700"/>
           </a:xfrm>
-          <a:prstGeom xmlns:a="http://schemas.openxmlformats.org/drawingml/2006/main" prst="rect">
-            <a:avLst/>
-          </a:prstGeom>
-        </p:spPr>
-        <p:txBody>
-          <a:bodyPr xmlns:a="http://schemas.openxmlformats.org/drawingml/2006/main" wrap="square" lIns="0" tIns="0" rIns="0" bIns="0" anchor="t">
-            <a:normAutofit fontScale="100000"/>
+          <a:prstGeom prst="rect">
+            <a:avLst/>
+          </a:prstGeom>
+        </p:spPr>
+        <p:txBody>
+          <a:bodyPr wrap="square" lIns="0" tIns="0" rIns="0" bIns="0" anchor="t">
+            <a:normAutofit/>
           </a:bodyPr>
-          <a:lstStyle xmlns:a="http://schemas.openxmlformats.org/drawingml/2006/main"/>
-          <a:p xmlns:a="http://schemas.openxmlformats.org/drawingml/2006/main">
+          <a:lstStyle/>
+          <a:p>
             <a:pPr algn="l">
               <a:buNone/>
               <a:defRPr sz="1725" b="1">
@@ -5163,32 +5018,32 @@
       <p:sp>
         <p:nvSpPr>
           <p:cNvPr id="11" name="ci-proof-main">
-            <a:extLst xmlns:a="http://schemas.openxmlformats.org/drawingml/2006/main">
+            <a:extLst>
               <a:ext uri="{FF2B5EF4-FFF2-40B4-BE49-F238E27FC236}">
                 <a16:creationId xmlns:a16="http://schemas.microsoft.com/office/drawing/2014/main" id="{69EC5FF9-2F4F-412E-8E1B-87707E89795C}"/>
               </a:ext>
             </a:extLst>
           </p:cNvPr>
           <p:cNvSpPr>
-            <a:spLocks xmlns:a="http://schemas.openxmlformats.org/drawingml/2006/main" noGrp="1"/>
-          </p:cNvSpPr>
-          <p:nvPr/>
-        </p:nvSpPr>
-        <p:spPr>
-          <a:xfrm xmlns:a="http://schemas.openxmlformats.org/drawingml/2006/main">
+            <a:spLocks noGrp="1"/>
+          </p:cNvSpPr>
+          <p:nvPr/>
+        </p:nvSpPr>
+        <p:spPr>
+          <a:xfrm>
             <a:off x="8477250" y="5067300"/>
             <a:ext cx="2762250" cy="495300"/>
           </a:xfrm>
-          <a:prstGeom xmlns:a="http://schemas.openxmlformats.org/drawingml/2006/main" prst="rect">
-            <a:avLst/>
-          </a:prstGeom>
-        </p:spPr>
-        <p:txBody>
-          <a:bodyPr xmlns:a="http://schemas.openxmlformats.org/drawingml/2006/main" wrap="square" lIns="0" tIns="0" rIns="0" bIns="0" anchor="t">
+          <a:prstGeom prst="rect">
+            <a:avLst/>
+          </a:prstGeom>
+        </p:spPr>
+        <p:txBody>
+          <a:bodyPr wrap="square" lIns="0" tIns="0" rIns="0" bIns="0" anchor="t">
             <a:normAutofit fontScale="80247"/>
           </a:bodyPr>
-          <a:lstStyle xmlns:a="http://schemas.openxmlformats.org/drawingml/2006/main"/>
-          <a:p xmlns:a="http://schemas.openxmlformats.org/drawingml/2006/main">
+          <a:lstStyle/>
+          <a:p>
             <a:pPr algn="l">
               <a:buNone/>
               <a:defRPr sz="2025" b="1">
@@ -5210,32 +5065,32 @@
       <p:sp>
         <p:nvSpPr>
           <p:cNvPr id="12" name="verification-footer">
-            <a:extLst xmlns:a="http://schemas.openxmlformats.org/drawingml/2006/main">
+            <a:extLst>
               <a:ext uri="{FF2B5EF4-FFF2-40B4-BE49-F238E27FC236}">
                 <a16:creationId xmlns:a16="http://schemas.microsoft.com/office/drawing/2014/main" id="{019453AC-81C5-41AA-8414-D3337DF8788B}"/>
               </a:ext>
             </a:extLst>
           </p:cNvPr>
           <p:cNvSpPr>
-            <a:spLocks xmlns:a="http://schemas.openxmlformats.org/drawingml/2006/main" noGrp="1"/>
-          </p:cNvSpPr>
-          <p:nvPr/>
-        </p:nvSpPr>
-        <p:spPr>
-          <a:xfrm xmlns:a="http://schemas.openxmlformats.org/drawingml/2006/main">
+            <a:spLocks noGrp="1"/>
+          </p:cNvSpPr>
+          <p:nvPr/>
+        </p:nvSpPr>
+        <p:spPr>
+          <a:xfrm>
             <a:off x="400050" y="6143625"/>
             <a:ext cx="8191500" cy="190500"/>
           </a:xfrm>
-          <a:prstGeom xmlns:a="http://schemas.openxmlformats.org/drawingml/2006/main" prst="rect">
-            <a:avLst/>
-          </a:prstGeom>
-        </p:spPr>
-        <p:txBody>
-          <a:bodyPr xmlns:a="http://schemas.openxmlformats.org/drawingml/2006/main" wrap="square" lIns="0" tIns="0" rIns="0" bIns="0" anchor="t">
-            <a:normAutofit fontScale="100000"/>
+          <a:prstGeom prst="rect">
+            <a:avLst/>
+          </a:prstGeom>
+        </p:spPr>
+        <p:txBody>
+          <a:bodyPr wrap="square" lIns="0" tIns="0" rIns="0" bIns="0" anchor="t">
+            <a:normAutofit/>
           </a:bodyPr>
-          <a:lstStyle xmlns:a="http://schemas.openxmlformats.org/drawingml/2006/main"/>
-          <a:p xmlns:a="http://schemas.openxmlformats.org/drawingml/2006/main">
+          <a:lstStyle/>
+          <a:p>
             <a:pPr algn="l">
               <a:buNone/>
               <a:defRPr sz="1050" b="0">
@@ -5260,17 +5115,21 @@
       </p:ext>
     </p:extLst>
   </p:cSld>
+  <p:clrMapOvr>
+    <a:masterClrMapping/>
+  </p:clrMapOvr>
 </p:sld>
 </file>
 
 <file path=ppt/slides/slide6.xml><?xml version="1.0" encoding="utf-8"?>
-<p:sld xmlns:p="http://schemas.openxmlformats.org/presentationml/2006/main">
+<p:sld xmlns:a="http://schemas.openxmlformats.org/drawingml/2006/main" xmlns:r="http://schemas.openxmlformats.org/officeDocument/2006/relationships" xmlns:p="http://schemas.openxmlformats.org/presentationml/2006/main">
   <p:cSld>
     <p:bg>
       <p:bgPr>
-        <a:solidFill xmlns:a="http://schemas.openxmlformats.org/drawingml/2006/main">
+        <a:solidFill>
           <a:srgbClr val="FFFFFF"/>
         </a:solidFill>
+        <a:effectLst/>
       </p:bgPr>
     </p:bg>
     <p:spTree>
@@ -5280,7 +5139,12 @@
         <p:nvPr/>
       </p:nvGrpSpPr>
       <p:grpSpPr>
-        <a:xfrm xmlns:a="http://schemas.openxmlformats.org/drawingml/2006/main"/>
+        <a:xfrm>
+          <a:off x="0" y="0"/>
+          <a:ext cx="0" cy="0"/>
+          <a:chOff x="0" y="0"/>
+          <a:chExt cx="0" cy="0"/>
+        </a:xfrm>
       </p:grpSpPr>
       <p:cxnSp>
         <p:nvCxnSpPr>
@@ -5289,14 +5153,14 @@
           <p:nvPr/>
         </p:nvCxnSpPr>
         <p:spPr>
-          <a:xfrm xmlns:a="http://schemas.openxmlformats.org/drawingml/2006/main">
+          <a:xfrm>
             <a:off x="400050" y="295275"/>
             <a:ext cx="11391900" cy="9525"/>
           </a:xfrm>
-          <a:prstGeom xmlns:a="http://schemas.openxmlformats.org/drawingml/2006/main" prst="straightConnector1">
-            <a:avLst/>
-          </a:prstGeom>
-          <a:ln xmlns:a="http://schemas.openxmlformats.org/drawingml/2006/main" w="9525">
+          <a:prstGeom prst="straightConnector1">
+            <a:avLst/>
+          </a:prstGeom>
+          <a:ln w="9525">
             <a:solidFill>
               <a:srgbClr val="C7D0DA"/>
             </a:solidFill>
@@ -5307,32 +5171,32 @@
       <p:sp>
         <p:nvSpPr>
           <p:cNvPr id="2" name="page-number">
-            <a:extLst xmlns:a="http://schemas.openxmlformats.org/drawingml/2006/main">
+            <a:extLst>
               <a:ext uri="{FF2B5EF4-FFF2-40B4-BE49-F238E27FC236}">
                 <a16:creationId xmlns:a16="http://schemas.microsoft.com/office/drawing/2014/main" id="{93E9AF65-67B3-4863-AB3A-074C03C92E23}"/>
               </a:ext>
             </a:extLst>
           </p:cNvPr>
           <p:cNvSpPr>
-            <a:spLocks xmlns:a="http://schemas.openxmlformats.org/drawingml/2006/main" noGrp="1"/>
-          </p:cNvSpPr>
-          <p:nvPr/>
-        </p:nvSpPr>
-        <p:spPr>
-          <a:xfrm xmlns:a="http://schemas.openxmlformats.org/drawingml/2006/main">
+            <a:spLocks noGrp="1"/>
+          </p:cNvSpPr>
+          <p:nvPr/>
+        </p:nvSpPr>
+        <p:spPr>
+          <a:xfrm>
             <a:off x="11125200" y="6305550"/>
             <a:ext cx="666750" cy="209550"/>
           </a:xfrm>
-          <a:prstGeom xmlns:a="http://schemas.openxmlformats.org/drawingml/2006/main" prst="rect">
-            <a:avLst/>
-          </a:prstGeom>
-        </p:spPr>
-        <p:txBody>
-          <a:bodyPr xmlns:a="http://schemas.openxmlformats.org/drawingml/2006/main" wrap="square" lIns="0" tIns="0" rIns="0" bIns="0" anchor="t">
-            <a:normAutofit fontScale="100000"/>
+          <a:prstGeom prst="rect">
+            <a:avLst/>
+          </a:prstGeom>
+        </p:spPr>
+        <p:txBody>
+          <a:bodyPr wrap="square" lIns="0" tIns="0" rIns="0" bIns="0" anchor="t">
+            <a:normAutofit/>
           </a:bodyPr>
-          <a:lstStyle xmlns:a="http://schemas.openxmlformats.org/drawingml/2006/main"/>
-          <a:p xmlns:a="http://schemas.openxmlformats.org/drawingml/2006/main">
+          <a:lstStyle/>
+          <a:p>
             <a:pPr algn="r">
               <a:buNone/>
               <a:defRPr sz="975" b="0">
@@ -5353,32 +5217,32 @@
       <p:sp>
         <p:nvSpPr>
           <p:cNvPr id="3" name="outcome-eyebrow">
-            <a:extLst xmlns:a="http://schemas.openxmlformats.org/drawingml/2006/main">
+            <a:extLst>
               <a:ext uri="{FF2B5EF4-FFF2-40B4-BE49-F238E27FC236}">
                 <a16:creationId xmlns:a16="http://schemas.microsoft.com/office/drawing/2014/main" id="{3B55777F-727E-439B-B5DE-E93ABA671DF1}"/>
               </a:ext>
             </a:extLst>
           </p:cNvPr>
           <p:cNvSpPr>
-            <a:spLocks xmlns:a="http://schemas.openxmlformats.org/drawingml/2006/main" noGrp="1"/>
-          </p:cNvSpPr>
-          <p:nvPr/>
-        </p:nvSpPr>
-        <p:spPr>
-          <a:xfrm xmlns:a="http://schemas.openxmlformats.org/drawingml/2006/main">
+            <a:spLocks noGrp="1"/>
+          </p:cNvSpPr>
+          <p:nvPr/>
+        </p:nvSpPr>
+        <p:spPr>
+          <a:xfrm>
             <a:off x="400050" y="685800"/>
             <a:ext cx="4000500" cy="247650"/>
           </a:xfrm>
-          <a:prstGeom xmlns:a="http://schemas.openxmlformats.org/drawingml/2006/main" prst="rect">
-            <a:avLst/>
-          </a:prstGeom>
-        </p:spPr>
-        <p:txBody>
-          <a:bodyPr xmlns:a="http://schemas.openxmlformats.org/drawingml/2006/main" wrap="square" lIns="0" tIns="0" rIns="0" bIns="0" anchor="t">
-            <a:normAutofit fontScale="100000"/>
+          <a:prstGeom prst="rect">
+            <a:avLst/>
+          </a:prstGeom>
+        </p:spPr>
+        <p:txBody>
+          <a:bodyPr wrap="square" lIns="0" tIns="0" rIns="0" bIns="0" anchor="t">
+            <a:normAutofit/>
           </a:bodyPr>
-          <a:lstStyle xmlns:a="http://schemas.openxmlformats.org/drawingml/2006/main"/>
-          <a:p xmlns:a="http://schemas.openxmlformats.org/drawingml/2006/main">
+          <a:lstStyle/>
+          <a:p>
             <a:pPr algn="l">
               <a:buNone/>
               <a:defRPr sz="1350" b="1">
@@ -5399,32 +5263,32 @@
       <p:sp>
         <p:nvSpPr>
           <p:cNvPr id="4" name="outcome-title">
-            <a:extLst xmlns:a="http://schemas.openxmlformats.org/drawingml/2006/main">
+            <a:extLst>
               <a:ext uri="{FF2B5EF4-FFF2-40B4-BE49-F238E27FC236}">
                 <a16:creationId xmlns:a16="http://schemas.microsoft.com/office/drawing/2014/main" id="{FCB6D125-197F-49AC-930B-39B01EF168D1}"/>
               </a:ext>
             </a:extLst>
           </p:cNvPr>
           <p:cNvSpPr>
-            <a:spLocks xmlns:a="http://schemas.openxmlformats.org/drawingml/2006/main" noGrp="1"/>
-          </p:cNvSpPr>
-          <p:nvPr/>
-        </p:nvSpPr>
-        <p:spPr>
-          <a:xfrm xmlns:a="http://schemas.openxmlformats.org/drawingml/2006/main">
+            <a:spLocks noGrp="1"/>
+          </p:cNvSpPr>
+          <p:nvPr/>
+        </p:nvSpPr>
+        <p:spPr>
+          <a:xfrm>
             <a:off x="400050" y="1352550"/>
             <a:ext cx="9715500" cy="1524000"/>
           </a:xfrm>
-          <a:prstGeom xmlns:a="http://schemas.openxmlformats.org/drawingml/2006/main" prst="rect">
-            <a:avLst/>
-          </a:prstGeom>
-        </p:spPr>
-        <p:txBody>
-          <a:bodyPr xmlns:a="http://schemas.openxmlformats.org/drawingml/2006/main" wrap="square" lIns="0" tIns="0" rIns="0" bIns="0" anchor="t">
-            <a:normAutofit fontScale="100000"/>
+          <a:prstGeom prst="rect">
+            <a:avLst/>
+          </a:prstGeom>
+        </p:spPr>
+        <p:txBody>
+          <a:bodyPr wrap="square" lIns="0" tIns="0" rIns="0" bIns="0" anchor="t">
+            <a:normAutofit/>
           </a:bodyPr>
-          <a:lstStyle xmlns:a="http://schemas.openxmlformats.org/drawingml/2006/main"/>
-          <a:p xmlns:a="http://schemas.openxmlformats.org/drawingml/2006/main">
+          <a:lstStyle/>
+          <a:p>
             <a:pPr algn="l">
               <a:buNone/>
               <a:defRPr sz="3900" b="1">
@@ -5446,137 +5310,158 @@
       <p:sp>
         <p:nvSpPr>
           <p:cNvPr id="5" name="outcome-1">
-            <a:extLst xmlns:a="http://schemas.openxmlformats.org/drawingml/2006/main">
+            <a:extLst>
               <a:ext uri="{FF2B5EF4-FFF2-40B4-BE49-F238E27FC236}">
                 <a16:creationId xmlns:a16="http://schemas.microsoft.com/office/drawing/2014/main" id="{C6691BDC-26A0-4C51-B697-D717353E241B}"/>
               </a:ext>
             </a:extLst>
           </p:cNvPr>
           <p:cNvSpPr>
-            <a:spLocks xmlns:a="http://schemas.openxmlformats.org/drawingml/2006/main" noGrp="1"/>
-          </p:cNvSpPr>
-          <p:nvPr/>
-        </p:nvSpPr>
-        <p:spPr>
-          <a:xfrm xmlns:a="http://schemas.openxmlformats.org/drawingml/2006/main">
+            <a:spLocks noGrp="1"/>
+          </p:cNvSpPr>
+          <p:nvPr/>
+        </p:nvSpPr>
+        <p:spPr>
+          <a:xfrm>
             <a:off x="400050" y="3429000"/>
             <a:ext cx="3238500" cy="1200150"/>
           </a:xfrm>
-          <a:prstGeom xmlns:a="http://schemas.openxmlformats.org/drawingml/2006/main" prst="roundRect">
+          <a:prstGeom prst="roundRect">
             <a:avLst>
               <a:gd name="adj" fmla="val 6349"/>
             </a:avLst>
           </a:prstGeom>
-          <a:solidFill xmlns:a="http://schemas.openxmlformats.org/drawingml/2006/main">
+          <a:solidFill>
             <a:srgbClr val="EAF8FD"/>
           </a:solidFill>
-          <a:ln xmlns:a="http://schemas.openxmlformats.org/drawingml/2006/main" w="9525">
+          <a:ln w="9525">
             <a:solidFill>
               <a:srgbClr val="BCE5F5"/>
             </a:solidFill>
             <a:prstDash val="solid"/>
           </a:ln>
         </p:spPr>
+        <p:txBody>
+          <a:bodyPr/>
+          <a:lstStyle/>
+          <a:p>
+            <a:endParaRPr lang="en-CN"/>
+          </a:p>
+        </p:txBody>
       </p:sp>
       <p:sp>
         <p:nvSpPr>
           <p:cNvPr id="6" name="outcome-2">
-            <a:extLst xmlns:a="http://schemas.openxmlformats.org/drawingml/2006/main">
+            <a:extLst>
               <a:ext uri="{FF2B5EF4-FFF2-40B4-BE49-F238E27FC236}">
                 <a16:creationId xmlns:a16="http://schemas.microsoft.com/office/drawing/2014/main" id="{6154F79F-C759-438E-B3C9-D752898C0739}"/>
               </a:ext>
             </a:extLst>
           </p:cNvPr>
           <p:cNvSpPr>
-            <a:spLocks xmlns:a="http://schemas.openxmlformats.org/drawingml/2006/main" noGrp="1"/>
-          </p:cNvSpPr>
-          <p:nvPr/>
-        </p:nvSpPr>
-        <p:spPr>
-          <a:xfrm xmlns:a="http://schemas.openxmlformats.org/drawingml/2006/main">
+            <a:spLocks noGrp="1"/>
+          </p:cNvSpPr>
+          <p:nvPr/>
+        </p:nvSpPr>
+        <p:spPr>
+          <a:xfrm>
             <a:off x="4286250" y="3429000"/>
             <a:ext cx="3238500" cy="1200150"/>
           </a:xfrm>
-          <a:prstGeom xmlns:a="http://schemas.openxmlformats.org/drawingml/2006/main" prst="roundRect">
+          <a:prstGeom prst="roundRect">
             <a:avLst>
               <a:gd name="adj" fmla="val 6349"/>
             </a:avLst>
           </a:prstGeom>
-          <a:solidFill xmlns:a="http://schemas.openxmlformats.org/drawingml/2006/main">
+          <a:solidFill>
             <a:srgbClr val="EAF8FD"/>
           </a:solidFill>
-          <a:ln xmlns:a="http://schemas.openxmlformats.org/drawingml/2006/main" w="9525">
+          <a:ln w="9525">
             <a:solidFill>
               <a:srgbClr val="BCE5F5"/>
             </a:solidFill>
             <a:prstDash val="solid"/>
           </a:ln>
         </p:spPr>
+        <p:txBody>
+          <a:bodyPr/>
+          <a:lstStyle/>
+          <a:p>
+            <a:endParaRPr lang="en-CN"/>
+          </a:p>
+        </p:txBody>
       </p:sp>
       <p:sp>
         <p:nvSpPr>
           <p:cNvPr id="7" name="outcome-3">
-            <a:extLst xmlns:a="http://schemas.openxmlformats.org/drawingml/2006/main">
+            <a:extLst>
               <a:ext uri="{FF2B5EF4-FFF2-40B4-BE49-F238E27FC236}">
                 <a16:creationId xmlns:a16="http://schemas.microsoft.com/office/drawing/2014/main" id="{6C580A77-DB95-463D-A753-E0100AE31B06}"/>
               </a:ext>
             </a:extLst>
           </p:cNvPr>
           <p:cNvSpPr>
-            <a:spLocks xmlns:a="http://schemas.openxmlformats.org/drawingml/2006/main" noGrp="1"/>
-          </p:cNvSpPr>
-          <p:nvPr/>
-        </p:nvSpPr>
-        <p:spPr>
-          <a:xfrm xmlns:a="http://schemas.openxmlformats.org/drawingml/2006/main">
+            <a:spLocks noGrp="1"/>
+          </p:cNvSpPr>
+          <p:nvPr/>
+        </p:nvSpPr>
+        <p:spPr>
+          <a:xfrm>
             <a:off x="8172450" y="3429000"/>
             <a:ext cx="3619500" cy="1200150"/>
           </a:xfrm>
-          <a:prstGeom xmlns:a="http://schemas.openxmlformats.org/drawingml/2006/main" prst="roundRect">
+          <a:prstGeom prst="roundRect">
             <a:avLst>
               <a:gd name="adj" fmla="val 6349"/>
             </a:avLst>
           </a:prstGeom>
-          <a:solidFill xmlns:a="http://schemas.openxmlformats.org/drawingml/2006/main">
+          <a:solidFill>
             <a:srgbClr val="EAF8FD"/>
           </a:solidFill>
-          <a:ln xmlns:a="http://schemas.openxmlformats.org/drawingml/2006/main" w="9525">
+          <a:ln w="9525">
             <a:solidFill>
               <a:srgbClr val="BCE5F5"/>
             </a:solidFill>
             <a:prstDash val="solid"/>
           </a:ln>
         </p:spPr>
+        <p:txBody>
+          <a:bodyPr/>
+          <a:lstStyle/>
+          <a:p>
+            <a:endParaRPr lang="en-CN"/>
+          </a:p>
+        </p:txBody>
       </p:sp>
       <p:sp>
         <p:nvSpPr>
           <p:cNvPr id="8" name="outcome-1-title">
-            <a:extLst xmlns:a="http://schemas.openxmlformats.org/drawingml/2006/main">
+            <a:extLst>
               <a:ext uri="{FF2B5EF4-FFF2-40B4-BE49-F238E27FC236}">
                 <a16:creationId xmlns:a16="http://schemas.microsoft.com/office/drawing/2014/main" id="{80C4700E-AC6C-4D23-9569-AD604B2C252F}"/>
               </a:ext>
             </a:extLst>
           </p:cNvPr>
           <p:cNvSpPr>
-            <a:spLocks xmlns:a="http://schemas.openxmlformats.org/drawingml/2006/main" noGrp="1"/>
-          </p:cNvSpPr>
-          <p:nvPr/>
-        </p:nvSpPr>
-        <p:spPr>
-          <a:xfrm xmlns:a="http://schemas.openxmlformats.org/drawingml/2006/main">
+            <a:spLocks noGrp="1"/>
+          </p:cNvSpPr>
+          <p:nvPr/>
+        </p:nvSpPr>
+        <p:spPr>
+          <a:xfrm>
             <a:off x="666750" y="3695700"/>
             <a:ext cx="2095500" cy="285750"/>
           </a:xfrm>
-          <a:prstGeom xmlns:a="http://schemas.openxmlformats.org/drawingml/2006/main" prst="rect">
-            <a:avLst/>
-          </a:prstGeom>
-        </p:spPr>
-        <p:txBody>
-          <a:bodyPr xmlns:a="http://schemas.openxmlformats.org/drawingml/2006/main" wrap="square" lIns="0" tIns="0" rIns="0" bIns="0" anchor="t">
-            <a:normAutofit fontScale="100000"/>
+          <a:prstGeom prst="rect">
+            <a:avLst/>
+          </a:prstGeom>
+        </p:spPr>
+        <p:txBody>
+          <a:bodyPr wrap="square" lIns="0" tIns="0" rIns="0" bIns="0" anchor="t">
+            <a:normAutofit/>
           </a:bodyPr>
-          <a:lstStyle xmlns:a="http://schemas.openxmlformats.org/drawingml/2006/main"/>
-          <a:p xmlns:a="http://schemas.openxmlformats.org/drawingml/2006/main">
+          <a:lstStyle/>
+          <a:p>
             <a:pPr algn="l">
               <a:buNone/>
               <a:defRPr sz="1875" b="1">
@@ -5597,32 +5482,32 @@
       <p:sp>
         <p:nvSpPr>
           <p:cNvPr id="9" name="outcome-1-body">
-            <a:extLst xmlns:a="http://schemas.openxmlformats.org/drawingml/2006/main">
+            <a:extLst>
               <a:ext uri="{FF2B5EF4-FFF2-40B4-BE49-F238E27FC236}">
                 <a16:creationId xmlns:a16="http://schemas.microsoft.com/office/drawing/2014/main" id="{D90BB344-6999-45E5-8129-78B8C47BC8F9}"/>
               </a:ext>
             </a:extLst>
           </p:cNvPr>
           <p:cNvSpPr>
-            <a:spLocks xmlns:a="http://schemas.openxmlformats.org/drawingml/2006/main" noGrp="1"/>
-          </p:cNvSpPr>
-          <p:nvPr/>
-        </p:nvSpPr>
-        <p:spPr>
-          <a:xfrm xmlns:a="http://schemas.openxmlformats.org/drawingml/2006/main">
+            <a:spLocks noGrp="1"/>
+          </p:cNvSpPr>
+          <p:nvPr/>
+        </p:nvSpPr>
+        <p:spPr>
+          <a:xfrm>
             <a:off x="666750" y="4114800"/>
             <a:ext cx="2286000" cy="419100"/>
           </a:xfrm>
-          <a:prstGeom xmlns:a="http://schemas.openxmlformats.org/drawingml/2006/main" prst="rect">
-            <a:avLst/>
-          </a:prstGeom>
-        </p:spPr>
-        <p:txBody>
-          <a:bodyPr xmlns:a="http://schemas.openxmlformats.org/drawingml/2006/main" wrap="square" lIns="0" tIns="0" rIns="0" bIns="0" anchor="t">
-            <a:normAutofit fontScale="100000"/>
+          <a:prstGeom prst="rect">
+            <a:avLst/>
+          </a:prstGeom>
+        </p:spPr>
+        <p:txBody>
+          <a:bodyPr wrap="square" lIns="0" tIns="0" rIns="0" bIns="0" anchor="t">
+            <a:normAutofit/>
           </a:bodyPr>
-          <a:lstStyle xmlns:a="http://schemas.openxmlformats.org/drawingml/2006/main"/>
-          <a:p xmlns:a="http://schemas.openxmlformats.org/drawingml/2006/main">
+          <a:lstStyle/>
+          <a:p>
             <a:pPr algn="l">
               <a:buNone/>
               <a:defRPr sz="1350" b="0">
@@ -5644,32 +5529,32 @@
       <p:sp>
         <p:nvSpPr>
           <p:cNvPr id="10" name="outcome-2-title">
-            <a:extLst xmlns:a="http://schemas.openxmlformats.org/drawingml/2006/main">
+            <a:extLst>
               <a:ext uri="{FF2B5EF4-FFF2-40B4-BE49-F238E27FC236}">
                 <a16:creationId xmlns:a16="http://schemas.microsoft.com/office/drawing/2014/main" id="{ACBC020E-4734-4CC7-B592-C8106B5F8F42}"/>
               </a:ext>
             </a:extLst>
           </p:cNvPr>
           <p:cNvSpPr>
-            <a:spLocks xmlns:a="http://schemas.openxmlformats.org/drawingml/2006/main" noGrp="1"/>
-          </p:cNvSpPr>
-          <p:nvPr/>
-        </p:nvSpPr>
-        <p:spPr>
-          <a:xfrm xmlns:a="http://schemas.openxmlformats.org/drawingml/2006/main">
+            <a:spLocks noGrp="1"/>
+          </p:cNvSpPr>
+          <p:nvPr/>
+        </p:nvSpPr>
+        <p:spPr>
+          <a:xfrm>
             <a:off x="4552950" y="3695700"/>
             <a:ext cx="2095500" cy="285750"/>
           </a:xfrm>
-          <a:prstGeom xmlns:a="http://schemas.openxmlformats.org/drawingml/2006/main" prst="rect">
-            <a:avLst/>
-          </a:prstGeom>
-        </p:spPr>
-        <p:txBody>
-          <a:bodyPr xmlns:a="http://schemas.openxmlformats.org/drawingml/2006/main" wrap="square" lIns="0" tIns="0" rIns="0" bIns="0" anchor="t">
-            <a:normAutofit fontScale="100000"/>
+          <a:prstGeom prst="rect">
+            <a:avLst/>
+          </a:prstGeom>
+        </p:spPr>
+        <p:txBody>
+          <a:bodyPr wrap="square" lIns="0" tIns="0" rIns="0" bIns="0" anchor="t">
+            <a:normAutofit/>
           </a:bodyPr>
-          <a:lstStyle xmlns:a="http://schemas.openxmlformats.org/drawingml/2006/main"/>
-          <a:p xmlns:a="http://schemas.openxmlformats.org/drawingml/2006/main">
+          <a:lstStyle/>
+          <a:p>
             <a:pPr algn="l">
               <a:buNone/>
               <a:defRPr sz="1875" b="1">
@@ -5690,32 +5575,32 @@
       <p:sp>
         <p:nvSpPr>
           <p:cNvPr id="11" name="outcome-2-body">
-            <a:extLst xmlns:a="http://schemas.openxmlformats.org/drawingml/2006/main">
+            <a:extLst>
               <a:ext uri="{FF2B5EF4-FFF2-40B4-BE49-F238E27FC236}">
                 <a16:creationId xmlns:a16="http://schemas.microsoft.com/office/drawing/2014/main" id="{FD23955A-86F0-4A26-A98D-9B31B8D7F0A1}"/>
               </a:ext>
             </a:extLst>
           </p:cNvPr>
           <p:cNvSpPr>
-            <a:spLocks xmlns:a="http://schemas.openxmlformats.org/drawingml/2006/main" noGrp="1"/>
-          </p:cNvSpPr>
-          <p:nvPr/>
-        </p:nvSpPr>
-        <p:spPr>
-          <a:xfrm xmlns:a="http://schemas.openxmlformats.org/drawingml/2006/main">
+            <a:spLocks noGrp="1"/>
+          </p:cNvSpPr>
+          <p:nvPr/>
+        </p:nvSpPr>
+        <p:spPr>
+          <a:xfrm>
             <a:off x="4552950" y="4114800"/>
             <a:ext cx="2286000" cy="419100"/>
           </a:xfrm>
-          <a:prstGeom xmlns:a="http://schemas.openxmlformats.org/drawingml/2006/main" prst="rect">
-            <a:avLst/>
-          </a:prstGeom>
-        </p:spPr>
-        <p:txBody>
-          <a:bodyPr xmlns:a="http://schemas.openxmlformats.org/drawingml/2006/main" wrap="square" lIns="0" tIns="0" rIns="0" bIns="0" anchor="t">
-            <a:normAutofit fontScale="100000"/>
+          <a:prstGeom prst="rect">
+            <a:avLst/>
+          </a:prstGeom>
+        </p:spPr>
+        <p:txBody>
+          <a:bodyPr wrap="square" lIns="0" tIns="0" rIns="0" bIns="0" anchor="t">
+            <a:normAutofit/>
           </a:bodyPr>
-          <a:lstStyle xmlns:a="http://schemas.openxmlformats.org/drawingml/2006/main"/>
-          <a:p xmlns:a="http://schemas.openxmlformats.org/drawingml/2006/main">
+          <a:lstStyle/>
+          <a:p>
             <a:pPr algn="l">
               <a:buNone/>
               <a:defRPr sz="1350" b="0">
@@ -5737,32 +5622,32 @@
       <p:sp>
         <p:nvSpPr>
           <p:cNvPr id="12" name="outcome-3-title">
-            <a:extLst xmlns:a="http://schemas.openxmlformats.org/drawingml/2006/main">
+            <a:extLst>
               <a:ext uri="{FF2B5EF4-FFF2-40B4-BE49-F238E27FC236}">
                 <a16:creationId xmlns:a16="http://schemas.microsoft.com/office/drawing/2014/main" id="{4F1917A9-1D4C-403C-8F08-3DA4F4BF8D55}"/>
               </a:ext>
             </a:extLst>
           </p:cNvPr>
           <p:cNvSpPr>
-            <a:spLocks xmlns:a="http://schemas.openxmlformats.org/drawingml/2006/main" noGrp="1"/>
-          </p:cNvSpPr>
-          <p:nvPr/>
-        </p:nvSpPr>
-        <p:spPr>
-          <a:xfrm xmlns:a="http://schemas.openxmlformats.org/drawingml/2006/main">
+            <a:spLocks noGrp="1"/>
+          </p:cNvSpPr>
+          <p:nvPr/>
+        </p:nvSpPr>
+        <p:spPr>
+          <a:xfrm>
             <a:off x="8439150" y="3695700"/>
             <a:ext cx="2476500" cy="285750"/>
           </a:xfrm>
-          <a:prstGeom xmlns:a="http://schemas.openxmlformats.org/drawingml/2006/main" prst="rect">
-            <a:avLst/>
-          </a:prstGeom>
-        </p:spPr>
-        <p:txBody>
-          <a:bodyPr xmlns:a="http://schemas.openxmlformats.org/drawingml/2006/main" wrap="square" lIns="0" tIns="0" rIns="0" bIns="0" anchor="t">
-            <a:normAutofit fontScale="100000"/>
+          <a:prstGeom prst="rect">
+            <a:avLst/>
+          </a:prstGeom>
+        </p:spPr>
+        <p:txBody>
+          <a:bodyPr wrap="square" lIns="0" tIns="0" rIns="0" bIns="0" anchor="t">
+            <a:normAutofit/>
           </a:bodyPr>
-          <a:lstStyle xmlns:a="http://schemas.openxmlformats.org/drawingml/2006/main"/>
-          <a:p xmlns:a="http://schemas.openxmlformats.org/drawingml/2006/main">
+          <a:lstStyle/>
+          <a:p>
             <a:pPr algn="l">
               <a:buNone/>
               <a:defRPr sz="1875" b="1">
@@ -5783,32 +5668,32 @@
       <p:sp>
         <p:nvSpPr>
           <p:cNvPr id="13" name="outcome-3-body">
-            <a:extLst xmlns:a="http://schemas.openxmlformats.org/drawingml/2006/main">
+            <a:extLst>
               <a:ext uri="{FF2B5EF4-FFF2-40B4-BE49-F238E27FC236}">
                 <a16:creationId xmlns:a16="http://schemas.microsoft.com/office/drawing/2014/main" id="{7E9D92E5-584F-4746-ACA4-6FF128E66E49}"/>
               </a:ext>
             </a:extLst>
           </p:cNvPr>
           <p:cNvSpPr>
-            <a:spLocks xmlns:a="http://schemas.openxmlformats.org/drawingml/2006/main" noGrp="1"/>
-          </p:cNvSpPr>
-          <p:nvPr/>
-        </p:nvSpPr>
-        <p:spPr>
-          <a:xfrm xmlns:a="http://schemas.openxmlformats.org/drawingml/2006/main">
+            <a:spLocks noGrp="1"/>
+          </p:cNvSpPr>
+          <p:nvPr/>
+        </p:nvSpPr>
+        <p:spPr>
+          <a:xfrm>
             <a:off x="8439150" y="4114800"/>
             <a:ext cx="2762250" cy="419100"/>
           </a:xfrm>
-          <a:prstGeom xmlns:a="http://schemas.openxmlformats.org/drawingml/2006/main" prst="rect">
-            <a:avLst/>
-          </a:prstGeom>
-        </p:spPr>
-        <p:txBody>
-          <a:bodyPr xmlns:a="http://schemas.openxmlformats.org/drawingml/2006/main" wrap="square" lIns="0" tIns="0" rIns="0" bIns="0" anchor="t">
-            <a:normAutofit fontScale="100000"/>
+          <a:prstGeom prst="rect">
+            <a:avLst/>
+          </a:prstGeom>
+        </p:spPr>
+        <p:txBody>
+          <a:bodyPr wrap="square" lIns="0" tIns="0" rIns="0" bIns="0" anchor="t">
+            <a:normAutofit/>
           </a:bodyPr>
-          <a:lstStyle xmlns:a="http://schemas.openxmlformats.org/drawingml/2006/main"/>
-          <a:p xmlns:a="http://schemas.openxmlformats.org/drawingml/2006/main">
+          <a:lstStyle/>
+          <a:p>
             <a:pPr algn="l">
               <a:buNone/>
               <a:defRPr sz="1350" b="0">
@@ -5830,32 +5715,32 @@
       <p:sp>
         <p:nvSpPr>
           <p:cNvPr id="14" name="outcome-next">
-            <a:extLst xmlns:a="http://schemas.openxmlformats.org/drawingml/2006/main">
+            <a:extLst>
               <a:ext uri="{FF2B5EF4-FFF2-40B4-BE49-F238E27FC236}">
                 <a16:creationId xmlns:a16="http://schemas.microsoft.com/office/drawing/2014/main" id="{7FB47314-017E-4AE0-AAC0-822CEAB9068A}"/>
               </a:ext>
             </a:extLst>
           </p:cNvPr>
           <p:cNvSpPr>
-            <a:spLocks xmlns:a="http://schemas.openxmlformats.org/drawingml/2006/main" noGrp="1"/>
-          </p:cNvSpPr>
-          <p:nvPr/>
-        </p:nvSpPr>
-        <p:spPr>
-          <a:xfrm xmlns:a="http://schemas.openxmlformats.org/drawingml/2006/main">
+            <a:spLocks noGrp="1"/>
+          </p:cNvSpPr>
+          <p:nvPr/>
+        </p:nvSpPr>
+        <p:spPr>
+          <a:xfrm>
             <a:off x="400050" y="5219700"/>
             <a:ext cx="9525000" cy="342900"/>
           </a:xfrm>
-          <a:prstGeom xmlns:a="http://schemas.openxmlformats.org/drawingml/2006/main" prst="rect">
-            <a:avLst/>
-          </a:prstGeom>
-        </p:spPr>
-        <p:txBody>
-          <a:bodyPr xmlns:a="http://schemas.openxmlformats.org/drawingml/2006/main" wrap="square" lIns="0" tIns="0" rIns="0" bIns="0" anchor="t">
-            <a:normAutofit fontScale="100000"/>
+          <a:prstGeom prst="rect">
+            <a:avLst/>
+          </a:prstGeom>
+        </p:spPr>
+        <p:txBody>
+          <a:bodyPr wrap="square" lIns="0" tIns="0" rIns="0" bIns="0" anchor="t">
+            <a:normAutofit/>
           </a:bodyPr>
-          <a:lstStyle xmlns:a="http://schemas.openxmlformats.org/drawingml/2006/main"/>
-          <a:p xmlns:a="http://schemas.openxmlformats.org/drawingml/2006/main">
+          <a:lstStyle/>
+          <a:p>
             <a:pPr algn="l">
               <a:buNone/>
               <a:defRPr sz="2025" b="1">
@@ -5876,32 +5761,32 @@
       <p:sp>
         <p:nvSpPr>
           <p:cNvPr id="15" name="outcome-links">
-            <a:extLst xmlns:a="http://schemas.openxmlformats.org/drawingml/2006/main">
+            <a:extLst>
               <a:ext uri="{FF2B5EF4-FFF2-40B4-BE49-F238E27FC236}">
                 <a16:creationId xmlns:a16="http://schemas.microsoft.com/office/drawing/2014/main" id="{F35DC1F0-003D-4D51-9682-3F03E1BB7389}"/>
               </a:ext>
             </a:extLst>
           </p:cNvPr>
           <p:cNvSpPr>
-            <a:spLocks xmlns:a="http://schemas.openxmlformats.org/drawingml/2006/main" noGrp="1"/>
-          </p:cNvSpPr>
-          <p:nvPr/>
-        </p:nvSpPr>
-        <p:spPr>
-          <a:xfrm xmlns:a="http://schemas.openxmlformats.org/drawingml/2006/main">
+            <a:spLocks noGrp="1"/>
+          </p:cNvSpPr>
+          <p:nvPr/>
+        </p:nvSpPr>
+        <p:spPr>
+          <a:xfrm>
             <a:off x="400050" y="5962650"/>
             <a:ext cx="9810750" cy="228600"/>
           </a:xfrm>
-          <a:prstGeom xmlns:a="http://schemas.openxmlformats.org/drawingml/2006/main" prst="rect">
-            <a:avLst/>
-          </a:prstGeom>
-        </p:spPr>
-        <p:txBody>
-          <a:bodyPr xmlns:a="http://schemas.openxmlformats.org/drawingml/2006/main" wrap="square" lIns="0" tIns="0" rIns="0" bIns="0" anchor="t">
-            <a:normAutofit fontScale="100000"/>
+          <a:prstGeom prst="rect">
+            <a:avLst/>
+          </a:prstGeom>
+        </p:spPr>
+        <p:txBody>
+          <a:bodyPr wrap="square" lIns="0" tIns="0" rIns="0" bIns="0" anchor="t">
+            <a:normAutofit/>
           </a:bodyPr>
-          <a:lstStyle xmlns:a="http://schemas.openxmlformats.org/drawingml/2006/main"/>
-          <a:p xmlns:a="http://schemas.openxmlformats.org/drawingml/2006/main">
+          <a:lstStyle/>
+          <a:p>
             <a:pPr algn="l">
               <a:buNone/>
               <a:defRPr sz="1200" b="0">
@@ -5926,17 +5811,21 @@
       </p:ext>
     </p:extLst>
   </p:cSld>
+  <p:clrMapOvr>
+    <a:masterClrMapping/>
+  </p:clrMapOvr>
 </p:sld>
 </file>
 
 <file path=ppt/slides/slide7.xml><?xml version="1.0" encoding="utf-8"?>
-<p:sld xmlns:p="http://schemas.openxmlformats.org/presentationml/2006/main">
+<p:sld xmlns:a="http://schemas.openxmlformats.org/drawingml/2006/main" xmlns:r="http://schemas.openxmlformats.org/officeDocument/2006/relationships" xmlns:p="http://schemas.openxmlformats.org/presentationml/2006/main">
   <p:cSld>
     <p:bg>
       <p:bgPr>
-        <a:solidFill xmlns:a="http://schemas.openxmlformats.org/drawingml/2006/main">
+        <a:solidFill>
           <a:srgbClr val="FFFFFF"/>
         </a:solidFill>
+        <a:effectLst/>
       </p:bgPr>
     </p:bg>
     <p:spTree>
@@ -5946,7 +5835,12 @@
         <p:nvPr/>
       </p:nvGrpSpPr>
       <p:grpSpPr>
-        <a:xfrm xmlns:a="http://schemas.openxmlformats.org/drawingml/2006/main"/>
+        <a:xfrm>
+          <a:off x="0" y="0"/>
+          <a:ext cx="0" cy="0"/>
+          <a:chOff x="0" y="0"/>
+          <a:chExt cx="0" cy="0"/>
+        </a:xfrm>
       </p:grpSpPr>
       <p:cxnSp>
         <p:nvCxnSpPr>
@@ -5955,14 +5849,14 @@
           <p:nvPr/>
         </p:nvCxnSpPr>
         <p:spPr>
-          <a:xfrm xmlns:a="http://schemas.openxmlformats.org/drawingml/2006/main">
+          <a:xfrm>
             <a:off x="400050" y="295275"/>
             <a:ext cx="11391900" cy="9525"/>
           </a:xfrm>
-          <a:prstGeom xmlns:a="http://schemas.openxmlformats.org/drawingml/2006/main" prst="straightConnector1">
-            <a:avLst/>
-          </a:prstGeom>
-          <a:ln xmlns:a="http://schemas.openxmlformats.org/drawingml/2006/main" w="9525">
+          <a:prstGeom prst="straightConnector1">
+            <a:avLst/>
+          </a:prstGeom>
+          <a:ln w="9525">
             <a:solidFill>
               <a:srgbClr val="C7D0DA"/>
             </a:solidFill>
@@ -5973,32 +5867,32 @@
       <p:sp>
         <p:nvSpPr>
           <p:cNvPr id="2" name="page-number">
-            <a:extLst xmlns:a="http://schemas.openxmlformats.org/drawingml/2006/main">
+            <a:extLst>
               <a:ext uri="{FF2B5EF4-FFF2-40B4-BE49-F238E27FC236}">
                 <a16:creationId xmlns:a16="http://schemas.microsoft.com/office/drawing/2014/main" id="{30C69F98-AA83-456F-A653-6AA3111ECAA5}"/>
               </a:ext>
             </a:extLst>
           </p:cNvPr>
           <p:cNvSpPr>
-            <a:spLocks xmlns:a="http://schemas.openxmlformats.org/drawingml/2006/main" noGrp="1"/>
-          </p:cNvSpPr>
-          <p:nvPr/>
-        </p:nvSpPr>
-        <p:spPr>
-          <a:xfrm xmlns:a="http://schemas.openxmlformats.org/drawingml/2006/main">
+            <a:spLocks noGrp="1"/>
+          </p:cNvSpPr>
+          <p:nvPr/>
+        </p:nvSpPr>
+        <p:spPr>
+          <a:xfrm>
             <a:off x="11125200" y="6305550"/>
             <a:ext cx="666750" cy="209550"/>
           </a:xfrm>
-          <a:prstGeom xmlns:a="http://schemas.openxmlformats.org/drawingml/2006/main" prst="rect">
-            <a:avLst/>
-          </a:prstGeom>
-        </p:spPr>
-        <p:txBody>
-          <a:bodyPr xmlns:a="http://schemas.openxmlformats.org/drawingml/2006/main" wrap="square" lIns="0" tIns="0" rIns="0" bIns="0" anchor="t">
-            <a:normAutofit fontScale="100000"/>
+          <a:prstGeom prst="rect">
+            <a:avLst/>
+          </a:prstGeom>
+        </p:spPr>
+        <p:txBody>
+          <a:bodyPr wrap="square" lIns="0" tIns="0" rIns="0" bIns="0" anchor="t">
+            <a:normAutofit/>
           </a:bodyPr>
-          <a:lstStyle xmlns:a="http://schemas.openxmlformats.org/drawingml/2006/main"/>
-          <a:p xmlns:a="http://schemas.openxmlformats.org/drawingml/2006/main">
+          <a:lstStyle/>
+          <a:p>
             <a:pPr algn="r">
               <a:buNone/>
               <a:defRPr sz="975" b="0">
@@ -6019,32 +5913,32 @@
       <p:sp>
         <p:nvSpPr>
           <p:cNvPr id="3" name="verification-title">
-            <a:extLst xmlns:a="http://schemas.openxmlformats.org/drawingml/2006/main">
+            <a:extLst>
               <a:ext uri="{FF2B5EF4-FFF2-40B4-BE49-F238E27FC236}">
                 <a16:creationId xmlns:a16="http://schemas.microsoft.com/office/drawing/2014/main" id="{3619A76C-48B9-49AE-9CDF-489DDCCEA81C}"/>
               </a:ext>
             </a:extLst>
           </p:cNvPr>
           <p:cNvSpPr>
-            <a:spLocks xmlns:a="http://schemas.openxmlformats.org/drawingml/2006/main" noGrp="1"/>
-          </p:cNvSpPr>
-          <p:nvPr/>
-        </p:nvSpPr>
-        <p:spPr>
-          <a:xfrm xmlns:a="http://schemas.openxmlformats.org/drawingml/2006/main">
+            <a:spLocks noGrp="1"/>
+          </p:cNvSpPr>
+          <p:nvPr/>
+        </p:nvSpPr>
+        <p:spPr>
+          <a:xfrm>
             <a:off x="400050" y="590550"/>
             <a:ext cx="10668000" cy="552450"/>
           </a:xfrm>
-          <a:prstGeom xmlns:a="http://schemas.openxmlformats.org/drawingml/2006/main" prst="rect">
-            <a:avLst/>
-          </a:prstGeom>
-        </p:spPr>
-        <p:txBody>
-          <a:bodyPr xmlns:a="http://schemas.openxmlformats.org/drawingml/2006/main" wrap="square" lIns="0" tIns="0" rIns="0" bIns="0" anchor="t">
-            <a:normAutofit fontScale="100000"/>
+          <a:prstGeom prst="rect">
+            <a:avLst/>
+          </a:prstGeom>
+        </p:spPr>
+        <p:txBody>
+          <a:bodyPr wrap="square" lIns="0" tIns="0" rIns="0" bIns="0" anchor="t">
+            <a:normAutofit/>
           </a:bodyPr>
-          <a:lstStyle xmlns:a="http://schemas.openxmlformats.org/drawingml/2006/main"/>
-          <a:p xmlns:a="http://schemas.openxmlformats.org/drawingml/2006/main">
+          <a:lstStyle/>
+          <a:p>
             <a:pPr algn="l">
               <a:buNone/>
               <a:defRPr sz="2925" b="1">
@@ -6065,32 +5959,32 @@
       <p:sp>
         <p:nvSpPr>
           <p:cNvPr id="4" name="verification-subtitle">
-            <a:extLst xmlns:a="http://schemas.openxmlformats.org/drawingml/2006/main">
+            <a:extLst>
               <a:ext uri="{FF2B5EF4-FFF2-40B4-BE49-F238E27FC236}">
                 <a16:creationId xmlns:a16="http://schemas.microsoft.com/office/drawing/2014/main" id="{C8A4088C-8123-47A7-A165-059F73973DF0}"/>
               </a:ext>
             </a:extLst>
           </p:cNvPr>
           <p:cNvSpPr>
-            <a:spLocks xmlns:a="http://schemas.openxmlformats.org/drawingml/2006/main" noGrp="1"/>
-          </p:cNvSpPr>
-          <p:nvPr/>
-        </p:nvSpPr>
-        <p:spPr>
-          <a:xfrm xmlns:a="http://schemas.openxmlformats.org/drawingml/2006/main">
+            <a:spLocks noGrp="1"/>
+          </p:cNvSpPr>
+          <p:nvPr/>
+        </p:nvSpPr>
+        <p:spPr>
+          <a:xfrm>
             <a:off x="400050" y="1266825"/>
             <a:ext cx="10477500" cy="304800"/>
           </a:xfrm>
-          <a:prstGeom xmlns:a="http://schemas.openxmlformats.org/drawingml/2006/main" prst="rect">
-            <a:avLst/>
-          </a:prstGeom>
-        </p:spPr>
-        <p:txBody>
-          <a:bodyPr xmlns:a="http://schemas.openxmlformats.org/drawingml/2006/main" wrap="square" lIns="0" tIns="0" rIns="0" bIns="0" anchor="t">
-            <a:normAutofit fontScale="100000"/>
+          <a:prstGeom prst="rect">
+            <a:avLst/>
+          </a:prstGeom>
+        </p:spPr>
+        <p:txBody>
+          <a:bodyPr wrap="square" lIns="0" tIns="0" rIns="0" bIns="0" anchor="t">
+            <a:normAutofit/>
           </a:bodyPr>
-          <a:lstStyle xmlns:a="http://schemas.openxmlformats.org/drawingml/2006/main"/>
-          <a:p xmlns:a="http://schemas.openxmlformats.org/drawingml/2006/main">
+          <a:lstStyle/>
+          <a:p>
             <a:pPr algn="l">
               <a:buNone/>
               <a:defRPr sz="1500" b="0">
@@ -6115,17 +6009,35 @@
           <p:nvPr/>
         </p:nvGraphicFramePr>
         <p:xfrm>
-          <a:off xmlns:a="http://schemas.openxmlformats.org/drawingml/2006/main" x="400050" y="1885950"/>
-          <a:ext xmlns:a="http://schemas.openxmlformats.org/drawingml/2006/main" cx="11391900" cy="2209800"/>
+          <a:off x="400050" y="1885950"/>
+          <a:ext cx="11391900" cy="2209800"/>
         </p:xfrm>
-        <a:graphic xmlns:a="http://schemas.openxmlformats.org/drawingml/2006/main">
+        <a:graphic>
           <a:graphicData uri="http://schemas.openxmlformats.org/drawingml/2006/table">
             <a:tbl>
               <a:tblPr/>
               <a:tblGrid>
-                <a:gridCol w="1809750"/>
-                <a:gridCol w="5429250"/>
-                <a:gridCol w="4152900"/>
+                <a:gridCol w="1809750">
+                  <a:extLst>
+                    <a:ext uri="{9D8B030D-6E8A-4147-A177-3AD203B41FA5}">
+                      <a16:colId xmlns:a16="http://schemas.microsoft.com/office/drawing/2014/main" val="20000"/>
+                    </a:ext>
+                  </a:extLst>
+                </a:gridCol>
+                <a:gridCol w="5429250">
+                  <a:extLst>
+                    <a:ext uri="{9D8B030D-6E8A-4147-A177-3AD203B41FA5}">
+                      <a16:colId xmlns:a16="http://schemas.microsoft.com/office/drawing/2014/main" val="20001"/>
+                    </a:ext>
+                  </a:extLst>
+                </a:gridCol>
+                <a:gridCol w="4152900">
+                  <a:extLst>
+                    <a:ext uri="{9D8B030D-6E8A-4147-A177-3AD203B41FA5}">
+                      <a16:colId xmlns:a16="http://schemas.microsoft.com/office/drawing/2014/main" val="20002"/>
+                    </a:ext>
+                  </a:extLst>
+                </a:gridCol>
               </a:tblGrid>
               <a:tr h="441960">
                 <a:tc>
@@ -6138,7 +6050,7 @@
                       </a:r>
                     </a:p>
                   </a:txBody>
-                  <a:tcPr marL="91440" marR="91440" marT="45720" marB="45720"/>
+                  <a:tcPr/>
                 </a:tc>
                 <a:tc>
                   <a:txBody>
@@ -6150,7 +6062,7 @@
                       </a:r>
                     </a:p>
                   </a:txBody>
-                  <a:tcPr marL="91440" marR="91440" marT="45720" marB="45720"/>
+                  <a:tcPr/>
                 </a:tc>
                 <a:tc>
                   <a:txBody>
@@ -6162,8 +6074,13 @@
                       </a:r>
                     </a:p>
                   </a:txBody>
-                  <a:tcPr marL="91440" marR="91440" marT="45720" marB="45720"/>
+                  <a:tcPr/>
                 </a:tc>
+                <a:extLst>
+                  <a:ext uri="{0D108BD9-81ED-4DB2-BD59-A6C34878D82A}">
+                    <a16:rowId xmlns:a16="http://schemas.microsoft.com/office/drawing/2014/main" val="10000"/>
+                  </a:ext>
+                </a:extLst>
               </a:tr>
               <a:tr h="441960">
                 <a:tc>
@@ -6176,7 +6093,7 @@
                       </a:r>
                     </a:p>
                   </a:txBody>
-                  <a:tcPr marL="91440" marR="91440" marT="45720" marB="45720"/>
+                  <a:tcPr/>
                 </a:tc>
                 <a:tc>
                   <a:txBody>
@@ -6188,7 +6105,7 @@
                       </a:r>
                     </a:p>
                   </a:txBody>
-                  <a:tcPr marL="91440" marR="91440" marT="45720" marB="45720"/>
+                  <a:tcPr/>
                 </a:tc>
                 <a:tc>
                   <a:txBody>
@@ -6200,8 +6117,13 @@
                       </a:r>
                     </a:p>
                   </a:txBody>
-                  <a:tcPr marL="91440" marR="91440" marT="45720" marB="45720"/>
+                  <a:tcPr/>
                 </a:tc>
+                <a:extLst>
+                  <a:ext uri="{0D108BD9-81ED-4DB2-BD59-A6C34878D82A}">
+                    <a16:rowId xmlns:a16="http://schemas.microsoft.com/office/drawing/2014/main" val="10001"/>
+                  </a:ext>
+                </a:extLst>
               </a:tr>
               <a:tr h="441960">
                 <a:tc>
@@ -6214,7 +6136,7 @@
                       </a:r>
                     </a:p>
                   </a:txBody>
-                  <a:tcPr marL="91440" marR="91440" marT="45720" marB="45720"/>
+                  <a:tcPr/>
                 </a:tc>
                 <a:tc>
                   <a:txBody>
@@ -6226,7 +6148,7 @@
                       </a:r>
                     </a:p>
                   </a:txBody>
-                  <a:tcPr marL="91440" marR="91440" marT="45720" marB="45720"/>
+                  <a:tcPr/>
                 </a:tc>
                 <a:tc>
                   <a:txBody>
@@ -6238,8 +6160,13 @@
                       </a:r>
                     </a:p>
                   </a:txBody>
-                  <a:tcPr marL="91440" marR="91440" marT="45720" marB="45720"/>
+                  <a:tcPr/>
                 </a:tc>
+                <a:extLst>
+                  <a:ext uri="{0D108BD9-81ED-4DB2-BD59-A6C34878D82A}">
+                    <a16:rowId xmlns:a16="http://schemas.microsoft.com/office/drawing/2014/main" val="10002"/>
+                  </a:ext>
+                </a:extLst>
               </a:tr>
               <a:tr h="441960">
                 <a:tc>
@@ -6252,7 +6179,7 @@
                       </a:r>
                     </a:p>
                   </a:txBody>
-                  <a:tcPr marL="91440" marR="91440" marT="45720" marB="45720"/>
+                  <a:tcPr/>
                 </a:tc>
                 <a:tc>
                   <a:txBody>
@@ -6264,7 +6191,7 @@
                       </a:r>
                     </a:p>
                   </a:txBody>
-                  <a:tcPr marL="91440" marR="91440" marT="45720" marB="45720"/>
+                  <a:tcPr/>
                 </a:tc>
                 <a:tc>
                   <a:txBody>
@@ -6276,8 +6203,13 @@
                       </a:r>
                     </a:p>
                   </a:txBody>
-                  <a:tcPr marL="91440" marR="91440" marT="45720" marB="45720"/>
+                  <a:tcPr/>
                 </a:tc>
+                <a:extLst>
+                  <a:ext uri="{0D108BD9-81ED-4DB2-BD59-A6C34878D82A}">
+                    <a16:rowId xmlns:a16="http://schemas.microsoft.com/office/drawing/2014/main" val="10003"/>
+                  </a:ext>
+                </a:extLst>
               </a:tr>
               <a:tr h="441960">
                 <a:tc>
@@ -6290,7 +6222,7 @@
                       </a:r>
                     </a:p>
                   </a:txBody>
-                  <a:tcPr marL="91440" marR="91440" marT="45720" marB="45720"/>
+                  <a:tcPr/>
                 </a:tc>
                 <a:tc>
                   <a:txBody>
@@ -6302,7 +6234,7 @@
                       </a:r>
                     </a:p>
                   </a:txBody>
-                  <a:tcPr marL="91440" marR="91440" marT="45720" marB="45720"/>
+                  <a:tcPr/>
                 </a:tc>
                 <a:tc>
                   <a:txBody>
@@ -6314,8 +6246,13 @@
                       </a:r>
                     </a:p>
                   </a:txBody>
-                  <a:tcPr marL="91440" marR="91440" marT="45720" marB="45720"/>
+                  <a:tcPr/>
                 </a:tc>
+                <a:extLst>
+                  <a:ext uri="{0D108BD9-81ED-4DB2-BD59-A6C34878D82A}">
+                    <a16:rowId xmlns:a16="http://schemas.microsoft.com/office/drawing/2014/main" val="10004"/>
+                  </a:ext>
+                </a:extLst>
               </a:tr>
             </a:tbl>
           </a:graphicData>
@@ -6324,67 +6261,74 @@
       <p:sp>
         <p:nvSpPr>
           <p:cNvPr id="6" name="terminal">
-            <a:extLst xmlns:a="http://schemas.openxmlformats.org/drawingml/2006/main">
+            <a:extLst>
               <a:ext uri="{FF2B5EF4-FFF2-40B4-BE49-F238E27FC236}">
                 <a16:creationId xmlns:a16="http://schemas.microsoft.com/office/drawing/2014/main" id="{65EB9E6E-ABDA-49CD-B22B-D43AF11B7F09}"/>
               </a:ext>
             </a:extLst>
           </p:cNvPr>
           <p:cNvSpPr>
-            <a:spLocks xmlns:a="http://schemas.openxmlformats.org/drawingml/2006/main" noGrp="1"/>
-          </p:cNvSpPr>
-          <p:nvPr/>
-        </p:nvSpPr>
-        <p:spPr>
-          <a:xfrm xmlns:a="http://schemas.openxmlformats.org/drawingml/2006/main">
+            <a:spLocks noGrp="1"/>
+          </p:cNvSpPr>
+          <p:nvPr/>
+        </p:nvSpPr>
+        <p:spPr>
+          <a:xfrm>
             <a:off x="400050" y="4457700"/>
             <a:ext cx="7429500" cy="1428750"/>
           </a:xfrm>
-          <a:prstGeom xmlns:a="http://schemas.openxmlformats.org/drawingml/2006/main" prst="roundRect">
+          <a:prstGeom prst="roundRect">
             <a:avLst>
               <a:gd name="adj" fmla="val 5333"/>
             </a:avLst>
           </a:prstGeom>
-          <a:solidFill xmlns:a="http://schemas.openxmlformats.org/drawingml/2006/main">
+          <a:solidFill>
             <a:srgbClr val="0C1826"/>
           </a:solidFill>
-          <a:ln xmlns:a="http://schemas.openxmlformats.org/drawingml/2006/main" w="9525">
+          <a:ln w="9525">
             <a:solidFill>
               <a:srgbClr val="0C1826"/>
             </a:solidFill>
             <a:prstDash val="solid"/>
           </a:ln>
         </p:spPr>
+        <p:txBody>
+          <a:bodyPr/>
+          <a:lstStyle/>
+          <a:p>
+            <a:endParaRPr lang="en-CN"/>
+          </a:p>
+        </p:txBody>
       </p:sp>
       <p:sp>
         <p:nvSpPr>
           <p:cNvPr id="7" name="terminal-head">
-            <a:extLst xmlns:a="http://schemas.openxmlformats.org/drawingml/2006/main">
+            <a:extLst>
               <a:ext uri="{FF2B5EF4-FFF2-40B4-BE49-F238E27FC236}">
                 <a16:creationId xmlns:a16="http://schemas.microsoft.com/office/drawing/2014/main" id="{EF622573-62C4-4A7D-B43A-A58B829891CA}"/>
               </a:ext>
             </a:extLst>
           </p:cNvPr>
           <p:cNvSpPr>
-            <a:spLocks xmlns:a="http://schemas.openxmlformats.org/drawingml/2006/main" noGrp="1"/>
-          </p:cNvSpPr>
-          <p:nvPr/>
-        </p:nvSpPr>
-        <p:spPr>
-          <a:xfrm xmlns:a="http://schemas.openxmlformats.org/drawingml/2006/main">
+            <a:spLocks noGrp="1"/>
+          </p:cNvSpPr>
+          <p:nvPr/>
+        </p:nvSpPr>
+        <p:spPr>
+          <a:xfrm>
             <a:off x="666750" y="4667250"/>
             <a:ext cx="2667000" cy="209550"/>
           </a:xfrm>
-          <a:prstGeom xmlns:a="http://schemas.openxmlformats.org/drawingml/2006/main" prst="rect">
-            <a:avLst/>
-          </a:prstGeom>
-        </p:spPr>
-        <p:txBody>
-          <a:bodyPr xmlns:a="http://schemas.openxmlformats.org/drawingml/2006/main" wrap="square" lIns="0" tIns="0" rIns="0" bIns="0" anchor="t">
-            <a:normAutofit fontScale="100000"/>
+          <a:prstGeom prst="rect">
+            <a:avLst/>
+          </a:prstGeom>
+        </p:spPr>
+        <p:txBody>
+          <a:bodyPr wrap="square" lIns="0" tIns="0" rIns="0" bIns="0" anchor="t">
+            <a:normAutofit/>
           </a:bodyPr>
-          <a:lstStyle xmlns:a="http://schemas.openxmlformats.org/drawingml/2006/main"/>
-          <a:p xmlns:a="http://schemas.openxmlformats.org/drawingml/2006/main">
+          <a:lstStyle/>
+          <a:p>
             <a:pPr algn="l">
               <a:buNone/>
               <a:defRPr sz="1125" b="1">
@@ -6405,32 +6349,32 @@
       <p:sp>
         <p:nvSpPr>
           <p:cNvPr id="8" name="terminal-code">
-            <a:extLst xmlns:a="http://schemas.openxmlformats.org/drawingml/2006/main">
+            <a:extLst>
               <a:ext uri="{FF2B5EF4-FFF2-40B4-BE49-F238E27FC236}">
                 <a16:creationId xmlns:a16="http://schemas.microsoft.com/office/drawing/2014/main" id="{B1FDFBAF-E13F-470A-A381-7539DE0F19E5}"/>
               </a:ext>
             </a:extLst>
           </p:cNvPr>
           <p:cNvSpPr>
-            <a:spLocks xmlns:a="http://schemas.openxmlformats.org/drawingml/2006/main" noGrp="1"/>
-          </p:cNvSpPr>
-          <p:nvPr/>
-        </p:nvSpPr>
-        <p:spPr>
-          <a:xfrm xmlns:a="http://schemas.openxmlformats.org/drawingml/2006/main">
+            <a:spLocks noGrp="1"/>
+          </p:cNvSpPr>
+          <p:nvPr/>
+        </p:nvSpPr>
+        <p:spPr>
+          <a:xfrm>
             <a:off x="666750" y="5010150"/>
             <a:ext cx="6667500" cy="685800"/>
           </a:xfrm>
-          <a:prstGeom xmlns:a="http://schemas.openxmlformats.org/drawingml/2006/main" prst="rect">
-            <a:avLst/>
-          </a:prstGeom>
-        </p:spPr>
-        <p:txBody>
-          <a:bodyPr xmlns:a="http://schemas.openxmlformats.org/drawingml/2006/main" wrap="square" lIns="0" tIns="0" rIns="0" bIns="0" anchor="t">
-            <a:normAutofit fontScale="100000"/>
+          <a:prstGeom prst="rect">
+            <a:avLst/>
+          </a:prstGeom>
+        </p:spPr>
+        <p:txBody>
+          <a:bodyPr wrap="square" lIns="0" tIns="0" rIns="0" bIns="0" anchor="t">
+            <a:normAutofit/>
           </a:bodyPr>
-          <a:lstStyle xmlns:a="http://schemas.openxmlformats.org/drawingml/2006/main"/>
-          <a:p xmlns:a="http://schemas.openxmlformats.org/drawingml/2006/main">
+          <a:lstStyle/>
+          <a:p>
             <a:pPr algn="l">
               <a:buNone/>
               <a:defRPr sz="1500" b="0">
@@ -6452,67 +6396,74 @@
       <p:sp>
         <p:nvSpPr>
           <p:cNvPr id="9" name="ci-proof">
-            <a:extLst xmlns:a="http://schemas.openxmlformats.org/drawingml/2006/main">
+            <a:extLst>
               <a:ext uri="{FF2B5EF4-FFF2-40B4-BE49-F238E27FC236}">
                 <a16:creationId xmlns:a16="http://schemas.microsoft.com/office/drawing/2014/main" id="{77545F42-2D07-4291-A449-AFD3D27960C8}"/>
               </a:ext>
             </a:extLst>
           </p:cNvPr>
           <p:cNvSpPr>
-            <a:spLocks xmlns:a="http://schemas.openxmlformats.org/drawingml/2006/main" noGrp="1"/>
-          </p:cNvSpPr>
-          <p:nvPr/>
-        </p:nvSpPr>
-        <p:spPr>
-          <a:xfrm xmlns:a="http://schemas.openxmlformats.org/drawingml/2006/main">
+            <a:spLocks noGrp="1"/>
+          </p:cNvSpPr>
+          <p:nvPr/>
+        </p:nvSpPr>
+        <p:spPr>
+          <a:xfrm>
             <a:off x="8172450" y="4457700"/>
             <a:ext cx="3619500" cy="1428750"/>
           </a:xfrm>
-          <a:prstGeom xmlns:a="http://schemas.openxmlformats.org/drawingml/2006/main" prst="roundRect">
+          <a:prstGeom prst="roundRect">
             <a:avLst>
               <a:gd name="adj" fmla="val 5333"/>
             </a:avLst>
           </a:prstGeom>
-          <a:solidFill xmlns:a="http://schemas.openxmlformats.org/drawingml/2006/main">
+          <a:solidFill>
             <a:srgbClr val="EAF8FD"/>
           </a:solidFill>
-          <a:ln xmlns:a="http://schemas.openxmlformats.org/drawingml/2006/main" w="9525">
+          <a:ln w="9525">
             <a:solidFill>
               <a:srgbClr val="BCE5F5"/>
             </a:solidFill>
             <a:prstDash val="solid"/>
           </a:ln>
         </p:spPr>
+        <p:txBody>
+          <a:bodyPr/>
+          <a:lstStyle/>
+          <a:p>
+            <a:endParaRPr lang="en-CN"/>
+          </a:p>
+        </p:txBody>
       </p:sp>
       <p:sp>
         <p:nvSpPr>
           <p:cNvPr id="10" name="ci-proof-head">
-            <a:extLst xmlns:a="http://schemas.openxmlformats.org/drawingml/2006/main">
+            <a:extLst>
               <a:ext uri="{FF2B5EF4-FFF2-40B4-BE49-F238E27FC236}">
                 <a16:creationId xmlns:a16="http://schemas.microsoft.com/office/drawing/2014/main" id="{7C53A09E-7D84-426C-AE00-8B88CC362BA7}"/>
               </a:ext>
             </a:extLst>
           </p:cNvPr>
           <p:cNvSpPr>
-            <a:spLocks xmlns:a="http://schemas.openxmlformats.org/drawingml/2006/main" noGrp="1"/>
-          </p:cNvSpPr>
-          <p:nvPr/>
-        </p:nvSpPr>
-        <p:spPr>
-          <a:xfrm xmlns:a="http://schemas.openxmlformats.org/drawingml/2006/main">
+            <a:spLocks noGrp="1"/>
+          </p:cNvSpPr>
+          <p:nvPr/>
+        </p:nvSpPr>
+        <p:spPr>
+          <a:xfrm>
             <a:off x="8477250" y="4686300"/>
             <a:ext cx="2762250" cy="266700"/>
           </a:xfrm>
-          <a:prstGeom xmlns:a="http://schemas.openxmlformats.org/drawingml/2006/main" prst="rect">
-            <a:avLst/>
-          </a:prstGeom>
-        </p:spPr>
-        <p:txBody>
-          <a:bodyPr xmlns:a="http://schemas.openxmlformats.org/drawingml/2006/main" wrap="square" lIns="0" tIns="0" rIns="0" bIns="0" anchor="t">
-            <a:normAutofit fontScale="100000"/>
+          <a:prstGeom prst="rect">
+            <a:avLst/>
+          </a:prstGeom>
+        </p:spPr>
+        <p:txBody>
+          <a:bodyPr wrap="square" lIns="0" tIns="0" rIns="0" bIns="0" anchor="t">
+            <a:normAutofit/>
           </a:bodyPr>
-          <a:lstStyle xmlns:a="http://schemas.openxmlformats.org/drawingml/2006/main"/>
-          <a:p xmlns:a="http://schemas.openxmlformats.org/drawingml/2006/main">
+          <a:lstStyle/>
+          <a:p>
             <a:pPr algn="l">
               <a:buNone/>
               <a:defRPr sz="1725" b="1">
@@ -6533,32 +6484,32 @@
       <p:sp>
         <p:nvSpPr>
           <p:cNvPr id="11" name="ci-proof-main">
-            <a:extLst xmlns:a="http://schemas.openxmlformats.org/drawingml/2006/main">
+            <a:extLst>
               <a:ext uri="{FF2B5EF4-FFF2-40B4-BE49-F238E27FC236}">
                 <a16:creationId xmlns:a16="http://schemas.microsoft.com/office/drawing/2014/main" id="{69EC5FF9-2F4F-412E-8E1B-87707E89795C}"/>
               </a:ext>
             </a:extLst>
           </p:cNvPr>
           <p:cNvSpPr>
-            <a:spLocks xmlns:a="http://schemas.openxmlformats.org/drawingml/2006/main" noGrp="1"/>
-          </p:cNvSpPr>
-          <p:nvPr/>
-        </p:nvSpPr>
-        <p:spPr>
-          <a:xfrm xmlns:a="http://schemas.openxmlformats.org/drawingml/2006/main">
+            <a:spLocks noGrp="1"/>
+          </p:cNvSpPr>
+          <p:nvPr/>
+        </p:nvSpPr>
+        <p:spPr>
+          <a:xfrm>
             <a:off x="8477250" y="5067300"/>
             <a:ext cx="2762250" cy="495300"/>
           </a:xfrm>
-          <a:prstGeom xmlns:a="http://schemas.openxmlformats.org/drawingml/2006/main" prst="rect">
-            <a:avLst/>
-          </a:prstGeom>
-        </p:spPr>
-        <p:txBody>
-          <a:bodyPr xmlns:a="http://schemas.openxmlformats.org/drawingml/2006/main" wrap="square" lIns="0" tIns="0" rIns="0" bIns="0" anchor="t">
+          <a:prstGeom prst="rect">
+            <a:avLst/>
+          </a:prstGeom>
+        </p:spPr>
+        <p:txBody>
+          <a:bodyPr wrap="square" lIns="0" tIns="0" rIns="0" bIns="0" anchor="t">
             <a:normAutofit fontScale="80247"/>
           </a:bodyPr>
-          <a:lstStyle xmlns:a="http://schemas.openxmlformats.org/drawingml/2006/main"/>
-          <a:p xmlns:a="http://schemas.openxmlformats.org/drawingml/2006/main">
+          <a:lstStyle/>
+          <a:p>
             <a:pPr algn="l">
               <a:buNone/>
               <a:defRPr sz="2025" b="1">
@@ -6580,32 +6531,32 @@
       <p:sp>
         <p:nvSpPr>
           <p:cNvPr id="12" name="verification-footer">
-            <a:extLst xmlns:a="http://schemas.openxmlformats.org/drawingml/2006/main">
+            <a:extLst>
               <a:ext uri="{FF2B5EF4-FFF2-40B4-BE49-F238E27FC236}">
                 <a16:creationId xmlns:a16="http://schemas.microsoft.com/office/drawing/2014/main" id="{019453AC-81C5-41AA-8414-D3337DF8788B}"/>
               </a:ext>
             </a:extLst>
           </p:cNvPr>
           <p:cNvSpPr>
-            <a:spLocks xmlns:a="http://schemas.openxmlformats.org/drawingml/2006/main" noGrp="1"/>
-          </p:cNvSpPr>
-          <p:nvPr/>
-        </p:nvSpPr>
-        <p:spPr>
-          <a:xfrm xmlns:a="http://schemas.openxmlformats.org/drawingml/2006/main">
+            <a:spLocks noGrp="1"/>
+          </p:cNvSpPr>
+          <p:nvPr/>
+        </p:nvSpPr>
+        <p:spPr>
+          <a:xfrm>
             <a:off x="400050" y="6143625"/>
             <a:ext cx="8191500" cy="190500"/>
           </a:xfrm>
-          <a:prstGeom xmlns:a="http://schemas.openxmlformats.org/drawingml/2006/main" prst="rect">
-            <a:avLst/>
-          </a:prstGeom>
-        </p:spPr>
-        <p:txBody>
-          <a:bodyPr xmlns:a="http://schemas.openxmlformats.org/drawingml/2006/main" wrap="square" lIns="0" tIns="0" rIns="0" bIns="0" anchor="t">
-            <a:normAutofit fontScale="100000"/>
+          <a:prstGeom prst="rect">
+            <a:avLst/>
+          </a:prstGeom>
+        </p:spPr>
+        <p:txBody>
+          <a:bodyPr wrap="square" lIns="0" tIns="0" rIns="0" bIns="0" anchor="t">
+            <a:normAutofit/>
           </a:bodyPr>
-          <a:lstStyle xmlns:a="http://schemas.openxmlformats.org/drawingml/2006/main"/>
-          <a:p xmlns:a="http://schemas.openxmlformats.org/drawingml/2006/main">
+          <a:lstStyle/>
+          <a:p>
             <a:pPr algn="l">
               <a:buNone/>
               <a:defRPr sz="1050" b="0">
@@ -6630,6 +6581,9 @@
       </p:ext>
     </p:extLst>
   </p:cSld>
+  <p:clrMapOvr>
+    <a:masterClrMapping/>
+  </p:clrMapOvr>
 </p:sld>
 </file>
 
@@ -6875,5 +6829,254 @@
       </a:bgFillStyleLst>
     </a:fmtScheme>
   </a:themeElements>
+  <a:objectDefaults/>
+  <a:extraClrSchemeLst/>
+</a:theme>
+</file>
+
+<file path=ppt/theme/theme2.xml><?xml version="1.0" encoding="utf-8"?>
+<a:theme xmlns:a="http://schemas.openxmlformats.org/drawingml/2006/main" name="ChatGPT">
+  <a:themeElements>
+    <a:clrScheme name="ChatGPT">
+      <a:dk1>
+        <a:srgbClr val="000000"/>
+      </a:dk1>
+      <a:lt1>
+        <a:srgbClr val="FFFFFF"/>
+      </a:lt1>
+      <a:dk2>
+        <a:srgbClr val="0E2841"/>
+      </a:dk2>
+      <a:lt2>
+        <a:srgbClr val="E8E8E8"/>
+      </a:lt2>
+      <a:accent1>
+        <a:srgbClr val="156082"/>
+      </a:accent1>
+      <a:accent2>
+        <a:srgbClr val="E97132"/>
+      </a:accent2>
+      <a:accent3>
+        <a:srgbClr val="196B24"/>
+      </a:accent3>
+      <a:accent4>
+        <a:srgbClr val="0F9ED5"/>
+      </a:accent4>
+      <a:accent5>
+        <a:srgbClr val="A02B93"/>
+      </a:accent5>
+      <a:accent6>
+        <a:srgbClr val="4EA72E"/>
+      </a:accent6>
+      <a:hlink>
+        <a:srgbClr val="467886"/>
+      </a:hlink>
+      <a:folHlink>
+        <a:srgbClr val="96607D"/>
+      </a:folHlink>
+    </a:clrScheme>
+    <a:fontScheme name="Office">
+      <a:majorFont>
+        <a:latin typeface="Calibri Light"/>
+        <a:ea typeface="Calibri Light"/>
+        <a:cs typeface="Calibri Light"/>
+      </a:majorFont>
+      <a:minorFont>
+        <a:latin typeface="Calibri"/>
+        <a:ea typeface="Calibri"/>
+        <a:cs typeface="Calibri"/>
+      </a:minorFont>
+    </a:fontScheme>
+    <a:fmtScheme name="ChatGPT">
+      <a:fillStyleLst>
+        <a:solidFill>
+          <a:schemeClr val="phClr"/>
+        </a:solidFill>
+        <a:gradFill>
+          <a:gsLst>
+            <a:gs pos="0">
+              <a:schemeClr val="phClr">
+                <a:tint val="67000"/>
+                <a:lumMod val="110000"/>
+                <a:satMod val="105000"/>
+              </a:schemeClr>
+            </a:gs>
+            <a:gs pos="50000">
+              <a:schemeClr val="phClr">
+                <a:tint val="73000"/>
+                <a:lumMod val="105000"/>
+                <a:satMod val="103000"/>
+              </a:schemeClr>
+            </a:gs>
+            <a:gs pos="100000">
+              <a:schemeClr val="phClr">
+                <a:tint val="81000"/>
+                <a:lumMod val="105000"/>
+                <a:satMod val="109000"/>
+              </a:schemeClr>
+            </a:gs>
+          </a:gsLst>
+          <a:lin ang="5400000" scaled="0"/>
+        </a:gradFill>
+        <a:gradFill>
+          <a:gsLst>
+            <a:gs pos="0">
+              <a:schemeClr val="phClr">
+                <a:tint val="94000"/>
+                <a:lumMod val="102000"/>
+                <a:satMod val="103000"/>
+              </a:schemeClr>
+            </a:gs>
+            <a:gs pos="50000">
+              <a:schemeClr val="phClr">
+                <a:shade val="100000"/>
+                <a:lumMod val="100000"/>
+                <a:satMod val="110000"/>
+              </a:schemeClr>
+            </a:gs>
+            <a:gs pos="100000">
+              <a:schemeClr val="phClr">
+                <a:shade val="78000"/>
+                <a:lumMod val="99000"/>
+                <a:satMod val="120000"/>
+              </a:schemeClr>
+            </a:gs>
+          </a:gsLst>
+          <a:lin ang="5400000" scaled="0"/>
+        </a:gradFill>
+      </a:fillStyleLst>
+      <a:lnStyleLst>
+        <a:ln w="12700">
+          <a:solidFill>
+            <a:schemeClr val="phClr"/>
+          </a:solidFill>
+          <a:prstDash val="solid"/>
+        </a:ln>
+        <a:ln w="19050">
+          <a:solidFill>
+            <a:schemeClr val="phClr"/>
+          </a:solidFill>
+          <a:prstDash val="solid"/>
+        </a:ln>
+        <a:ln w="25400">
+          <a:solidFill>
+            <a:schemeClr val="phClr"/>
+          </a:solidFill>
+          <a:prstDash val="solid"/>
+        </a:ln>
+      </a:lnStyleLst>
+      <a:effectStyleLst>
+        <a:effectStyle>
+          <a:effectLst/>
+        </a:effectStyle>
+        <a:effectStyle>
+          <a:effectLst/>
+        </a:effectStyle>
+        <a:effectStyle>
+          <a:effectLst>
+            <a:outerShdw blurRad="57150" dist="19050" dir="5400000">
+              <a:srgbClr val="000000">
+                <a:alpha val="16000"/>
+              </a:srgbClr>
+            </a:outerShdw>
+          </a:effectLst>
+        </a:effectStyle>
+        <a:effectStyle>
+          <a:effectLst>
+            <a:outerShdw blurRad="19050" dist="9525" dir="5400000">
+              <a:srgbClr val="000000">
+                <a:alpha val="6000"/>
+              </a:srgbClr>
+            </a:outerShdw>
+          </a:effectLst>
+        </a:effectStyle>
+        <a:effectStyle>
+          <a:effectLst>
+            <a:outerShdw blurRad="28575" dist="9525" dir="5400000">
+              <a:srgbClr val="000000">
+                <a:alpha val="8000"/>
+              </a:srgbClr>
+            </a:outerShdw>
+          </a:effectLst>
+        </a:effectStyle>
+        <a:effectStyle>
+          <a:effectLst>
+            <a:outerShdw blurRad="57150" dist="19050" dir="5400000">
+              <a:srgbClr val="000000">
+                <a:alpha val="10000"/>
+              </a:srgbClr>
+            </a:outerShdw>
+          </a:effectLst>
+        </a:effectStyle>
+        <a:effectStyle>
+          <a:effectLst>
+            <a:outerShdw blurRad="114300" dist="38100" dir="5400000">
+              <a:srgbClr val="000000">
+                <a:alpha val="12000"/>
+              </a:srgbClr>
+            </a:outerShdw>
+          </a:effectLst>
+        </a:effectStyle>
+        <a:effectStyle>
+          <a:effectLst>
+            <a:outerShdw blurRad="171450" dist="57150" dir="5400000">
+              <a:srgbClr val="000000">
+                <a:alpha val="16000"/>
+              </a:srgbClr>
+            </a:outerShdw>
+          </a:effectLst>
+        </a:effectStyle>
+        <a:effectStyle>
+          <a:effectLst>
+            <a:outerShdw blurRad="266700" dist="95250" dir="5400000">
+              <a:srgbClr val="000000">
+                <a:alpha val="24000"/>
+              </a:srgbClr>
+            </a:outerShdw>
+          </a:effectLst>
+        </a:effectStyle>
+      </a:effectStyleLst>
+      <a:bgFillStyleLst>
+        <a:solidFill>
+          <a:schemeClr val="phClr"/>
+        </a:solidFill>
+        <a:solidFill>
+          <a:schemeClr val="phClr">
+            <a:tint val="95000"/>
+            <a:satMod val="170000"/>
+          </a:schemeClr>
+        </a:solidFill>
+        <a:gradFill>
+          <a:gsLst>
+            <a:gs pos="0">
+              <a:schemeClr val="phClr">
+                <a:tint val="93000"/>
+                <a:shade val="98000"/>
+                <a:lumMod val="102000"/>
+                <a:satMod val="150000"/>
+              </a:schemeClr>
+            </a:gs>
+            <a:gs pos="50000">
+              <a:schemeClr val="phClr">
+                <a:tint val="98000"/>
+                <a:shade val="90000"/>
+                <a:lumMod val="103000"/>
+                <a:satMod val="130000"/>
+              </a:schemeClr>
+            </a:gs>
+            <a:gs pos="100000">
+              <a:schemeClr val="phClr">
+                <a:shade val="63000"/>
+                <a:satMod val="120000"/>
+              </a:schemeClr>
+            </a:gs>
+          </a:gsLst>
+          <a:lin ang="5400000" scaled="0"/>
+        </a:gradFill>
+      </a:bgFillStyleLst>
+    </a:fmtScheme>
+  </a:themeElements>
+  <a:objectDefaults/>
+  <a:extraClrSchemeLst/>
 </a:theme>
 </file>